--- a/assets/tvd-behavior-taxonomy.pptx
+++ b/assets/tvd-behavior-taxonomy.pptx
@@ -3441,7 +3441,7 @@
     <p:bg>
       <p:bgPr>
         <a:solidFill xmlns:a="http://schemas.openxmlformats.org/drawingml/2006/main">
-          <a:srgbClr val="F6F5F1"/>
+          <a:srgbClr val="F8F6F0"/>
         </a:solidFill>
       </p:bgPr>
     </p:bg>
@@ -3490,7 +3490,7 @@
             <a:defPPr algn="l">
               <a:defRPr sz="3000" b="1">
                 <a:solidFill>
-                  <a:srgbClr val="142033"/>
+                  <a:srgbClr val="2B2B28"/>
                 </a:solidFill>
                 <a:latin typeface="Helvetica Neue"/>
                 <a:ea typeface="Helvetica Neue"/>
@@ -3500,7 +3500,7 @@
             <a:lvl1pPr algn="l">
               <a:defRPr sz="3000" b="1">
                 <a:solidFill>
-                  <a:srgbClr val="142033"/>
+                  <a:srgbClr val="2B2B28"/>
                 </a:solidFill>
                 <a:latin typeface="Helvetica Neue"/>
                 <a:ea typeface="Helvetica Neue"/>
@@ -3510,7 +3510,7 @@
             <a:lvl2pPr algn="l">
               <a:defRPr sz="3000" b="1">
                 <a:solidFill>
-                  <a:srgbClr val="142033"/>
+                  <a:srgbClr val="2B2B28"/>
                 </a:solidFill>
                 <a:latin typeface="Helvetica Neue"/>
                 <a:ea typeface="Helvetica Neue"/>
@@ -3520,7 +3520,7 @@
             <a:lvl3pPr algn="l">
               <a:defRPr sz="3000" b="1">
                 <a:solidFill>
-                  <a:srgbClr val="142033"/>
+                  <a:srgbClr val="2B2B28"/>
                 </a:solidFill>
                 <a:latin typeface="Helvetica Neue"/>
                 <a:ea typeface="Helvetica Neue"/>
@@ -3530,7 +3530,7 @@
             <a:lvl4pPr algn="l">
               <a:defRPr sz="3000" b="1">
                 <a:solidFill>
-                  <a:srgbClr val="142033"/>
+                  <a:srgbClr val="2B2B28"/>
                 </a:solidFill>
                 <a:latin typeface="Helvetica Neue"/>
                 <a:ea typeface="Helvetica Neue"/>
@@ -3540,7 +3540,7 @@
             <a:lvl5pPr algn="l">
               <a:defRPr sz="3000" b="1">
                 <a:solidFill>
-                  <a:srgbClr val="142033"/>
+                  <a:srgbClr val="2B2B28"/>
                 </a:solidFill>
                 <a:latin typeface="Helvetica Neue"/>
                 <a:ea typeface="Helvetica Neue"/>
@@ -3550,7 +3550,7 @@
             <a:lvl6pPr algn="l">
               <a:defRPr sz="3000" b="1">
                 <a:solidFill>
-                  <a:srgbClr val="142033"/>
+                  <a:srgbClr val="2B2B28"/>
                 </a:solidFill>
                 <a:latin typeface="Helvetica Neue"/>
                 <a:ea typeface="Helvetica Neue"/>
@@ -3560,7 +3560,7 @@
             <a:lvl7pPr algn="l">
               <a:defRPr sz="3000" b="1">
                 <a:solidFill>
-                  <a:srgbClr val="142033"/>
+                  <a:srgbClr val="2B2B28"/>
                 </a:solidFill>
                 <a:latin typeface="Helvetica Neue"/>
                 <a:ea typeface="Helvetica Neue"/>
@@ -3570,7 +3570,7 @@
             <a:lvl8pPr algn="l">
               <a:defRPr sz="3000" b="1">
                 <a:solidFill>
-                  <a:srgbClr val="142033"/>
+                  <a:srgbClr val="2B2B28"/>
                 </a:solidFill>
                 <a:latin typeface="Helvetica Neue"/>
                 <a:ea typeface="Helvetica Neue"/>
@@ -3580,7 +3580,7 @@
             <a:lvl9pPr algn="l">
               <a:defRPr sz="3000" b="1">
                 <a:solidFill>
-                  <a:srgbClr val="142033"/>
+                  <a:srgbClr val="2B2B28"/>
                 </a:solidFill>
                 <a:latin typeface="Helvetica Neue"/>
                 <a:ea typeface="Helvetica Neue"/>
@@ -3592,7 +3592,7 @@
             <a:pPr algn="l">
               <a:defRPr sz="3000" b="1">
                 <a:solidFill>
-                  <a:srgbClr val="142033"/>
+                  <a:srgbClr val="2B2B28"/>
                 </a:solidFill>
                 <a:latin typeface="Helvetica Neue"/>
                 <a:ea typeface="Helvetica Neue"/>
@@ -3602,7 +3602,7 @@
             <a:r>
               <a:rPr sz="3000" b="1">
                 <a:solidFill>
-                  <a:srgbClr val="142033"/>
+                  <a:srgbClr val="2B2B28"/>
                 </a:solidFill>
                 <a:latin typeface="Helvetica Neue"/>
                 <a:ea typeface="Helvetica Neue"/>
@@ -3649,7 +3649,7 @@
             <a:defPPr algn="l">
               <a:defRPr sz="1800" b="0">
                 <a:solidFill>
-                  <a:srgbClr val="4B596C"/>
+                  <a:srgbClr val="57564F"/>
                 </a:solidFill>
                 <a:latin typeface="Helvetica Neue"/>
                 <a:ea typeface="Helvetica Neue"/>
@@ -3659,7 +3659,7 @@
             <a:lvl1pPr algn="l">
               <a:defRPr sz="1800" b="0">
                 <a:solidFill>
-                  <a:srgbClr val="4B596C"/>
+                  <a:srgbClr val="57564F"/>
                 </a:solidFill>
                 <a:latin typeface="Helvetica Neue"/>
                 <a:ea typeface="Helvetica Neue"/>
@@ -3669,7 +3669,7 @@
             <a:lvl2pPr algn="l">
               <a:defRPr sz="1800" b="0">
                 <a:solidFill>
-                  <a:srgbClr val="4B596C"/>
+                  <a:srgbClr val="57564F"/>
                 </a:solidFill>
                 <a:latin typeface="Helvetica Neue"/>
                 <a:ea typeface="Helvetica Neue"/>
@@ -3679,7 +3679,7 @@
             <a:lvl3pPr algn="l">
               <a:defRPr sz="1800" b="0">
                 <a:solidFill>
-                  <a:srgbClr val="4B596C"/>
+                  <a:srgbClr val="57564F"/>
                 </a:solidFill>
                 <a:latin typeface="Helvetica Neue"/>
                 <a:ea typeface="Helvetica Neue"/>
@@ -3689,7 +3689,7 @@
             <a:lvl4pPr algn="l">
               <a:defRPr sz="1800" b="0">
                 <a:solidFill>
-                  <a:srgbClr val="4B596C"/>
+                  <a:srgbClr val="57564F"/>
                 </a:solidFill>
                 <a:latin typeface="Helvetica Neue"/>
                 <a:ea typeface="Helvetica Neue"/>
@@ -3699,7 +3699,7 @@
             <a:lvl5pPr algn="l">
               <a:defRPr sz="1800" b="0">
                 <a:solidFill>
-                  <a:srgbClr val="4B596C"/>
+                  <a:srgbClr val="57564F"/>
                 </a:solidFill>
                 <a:latin typeface="Helvetica Neue"/>
                 <a:ea typeface="Helvetica Neue"/>
@@ -3709,7 +3709,7 @@
             <a:lvl6pPr algn="l">
               <a:defRPr sz="1800" b="0">
                 <a:solidFill>
-                  <a:srgbClr val="4B596C"/>
+                  <a:srgbClr val="57564F"/>
                 </a:solidFill>
                 <a:latin typeface="Helvetica Neue"/>
                 <a:ea typeface="Helvetica Neue"/>
@@ -3719,7 +3719,7 @@
             <a:lvl7pPr algn="l">
               <a:defRPr sz="1800" b="0">
                 <a:solidFill>
-                  <a:srgbClr val="4B596C"/>
+                  <a:srgbClr val="57564F"/>
                 </a:solidFill>
                 <a:latin typeface="Helvetica Neue"/>
                 <a:ea typeface="Helvetica Neue"/>
@@ -3729,7 +3729,7 @@
             <a:lvl8pPr algn="l">
               <a:defRPr sz="1800" b="0">
                 <a:solidFill>
-                  <a:srgbClr val="4B596C"/>
+                  <a:srgbClr val="57564F"/>
                 </a:solidFill>
                 <a:latin typeface="Helvetica Neue"/>
                 <a:ea typeface="Helvetica Neue"/>
@@ -3739,7 +3739,7 @@
             <a:lvl9pPr algn="l">
               <a:defRPr sz="1800" b="0">
                 <a:solidFill>
-                  <a:srgbClr val="4B596C"/>
+                  <a:srgbClr val="57564F"/>
                 </a:solidFill>
                 <a:latin typeface="Helvetica Neue"/>
                 <a:ea typeface="Helvetica Neue"/>
@@ -3751,7 +3751,7 @@
             <a:pPr algn="l">
               <a:defRPr sz="1800" b="0">
                 <a:solidFill>
-                  <a:srgbClr val="4B596C"/>
+                  <a:srgbClr val="57564F"/>
                 </a:solidFill>
                 <a:latin typeface="Helvetica Neue"/>
                 <a:ea typeface="Helvetica Neue"/>
@@ -3761,7 +3761,7 @@
             <a:r>
               <a:rPr sz="1800" b="0">
                 <a:solidFill>
-                  <a:srgbClr val="4B596C"/>
+                  <a:srgbClr val="57564F"/>
                 </a:solidFill>
                 <a:latin typeface="Helvetica Neue"/>
                 <a:ea typeface="Helvetica Neue"/>
@@ -3795,17 +3795,17 @@
             <a:avLst/>
           </a:prstGeom>
           <a:solidFill xmlns:a="http://schemas.openxmlformats.org/drawingml/2006/main">
-            <a:srgbClr val="235CF0"/>
+            <a:srgbClr val="EEEAE2"/>
           </a:solidFill>
           <a:ln xmlns:a="http://schemas.openxmlformats.org/drawingml/2006/main" w="19050">
             <a:solidFill>
-              <a:srgbClr val="142033"/>
+              <a:srgbClr val="2B2B28"/>
             </a:solidFill>
             <a:prstDash val="solid"/>
           </a:ln>
           <ns0:effectLst xmlns:ns0="http://schemas.openxmlformats.org/drawingml/2006/main">
             <ns0:outerShdw blurRad="57150" dist="42597" dir="3806097" sx="100000" sy="100000" kx="0" ky="0" algn="ctr" rotWithShape="0">
-              <ns0:srgbClr val="142033">
+              <ns0:srgbClr val="2B2B28">
                 <ns0:alpha val="18000"/>
               </ns0:srgbClr>
             </ns0:outerShdw>
@@ -3854,7 +3854,7 @@
             <a:defPPr algn="ctr">
               <a:defRPr sz="1875" b="1">
                 <a:solidFill>
-                  <a:srgbClr val="FFFFFF"/>
+                  <a:srgbClr val="2B2B28"/>
                 </a:solidFill>
                 <a:latin typeface="Helvetica Neue"/>
                 <a:ea typeface="Helvetica Neue"/>
@@ -3864,7 +3864,7 @@
             <a:lvl1pPr algn="ctr">
               <a:defRPr sz="1875" b="1">
                 <a:solidFill>
-                  <a:srgbClr val="FFFFFF"/>
+                  <a:srgbClr val="2B2B28"/>
                 </a:solidFill>
                 <a:latin typeface="Helvetica Neue"/>
                 <a:ea typeface="Helvetica Neue"/>
@@ -3874,7 +3874,7 @@
             <a:lvl2pPr algn="ctr">
               <a:defRPr sz="1875" b="1">
                 <a:solidFill>
-                  <a:srgbClr val="FFFFFF"/>
+                  <a:srgbClr val="2B2B28"/>
                 </a:solidFill>
                 <a:latin typeface="Helvetica Neue"/>
                 <a:ea typeface="Helvetica Neue"/>
@@ -3884,7 +3884,7 @@
             <a:lvl3pPr algn="ctr">
               <a:defRPr sz="1875" b="1">
                 <a:solidFill>
-                  <a:srgbClr val="FFFFFF"/>
+                  <a:srgbClr val="2B2B28"/>
                 </a:solidFill>
                 <a:latin typeface="Helvetica Neue"/>
                 <a:ea typeface="Helvetica Neue"/>
@@ -3894,7 +3894,7 @@
             <a:lvl4pPr algn="ctr">
               <a:defRPr sz="1875" b="1">
                 <a:solidFill>
-                  <a:srgbClr val="FFFFFF"/>
+                  <a:srgbClr val="2B2B28"/>
                 </a:solidFill>
                 <a:latin typeface="Helvetica Neue"/>
                 <a:ea typeface="Helvetica Neue"/>
@@ -3904,7 +3904,7 @@
             <a:lvl5pPr algn="ctr">
               <a:defRPr sz="1875" b="1">
                 <a:solidFill>
-                  <a:srgbClr val="FFFFFF"/>
+                  <a:srgbClr val="2B2B28"/>
                 </a:solidFill>
                 <a:latin typeface="Helvetica Neue"/>
                 <a:ea typeface="Helvetica Neue"/>
@@ -3914,7 +3914,7 @@
             <a:lvl6pPr algn="ctr">
               <a:defRPr sz="1875" b="1">
                 <a:solidFill>
-                  <a:srgbClr val="FFFFFF"/>
+                  <a:srgbClr val="2B2B28"/>
                 </a:solidFill>
                 <a:latin typeface="Helvetica Neue"/>
                 <a:ea typeface="Helvetica Neue"/>
@@ -3924,7 +3924,7 @@
             <a:lvl7pPr algn="ctr">
               <a:defRPr sz="1875" b="1">
                 <a:solidFill>
-                  <a:srgbClr val="FFFFFF"/>
+                  <a:srgbClr val="2B2B28"/>
                 </a:solidFill>
                 <a:latin typeface="Helvetica Neue"/>
                 <a:ea typeface="Helvetica Neue"/>
@@ -3934,7 +3934,7 @@
             <a:lvl8pPr algn="ctr">
               <a:defRPr sz="1875" b="1">
                 <a:solidFill>
-                  <a:srgbClr val="FFFFFF"/>
+                  <a:srgbClr val="2B2B28"/>
                 </a:solidFill>
                 <a:latin typeface="Helvetica Neue"/>
                 <a:ea typeface="Helvetica Neue"/>
@@ -3944,7 +3944,7 @@
             <a:lvl9pPr algn="ctr">
               <a:defRPr sz="1875" b="1">
                 <a:solidFill>
-                  <a:srgbClr val="FFFFFF"/>
+                  <a:srgbClr val="2B2B28"/>
                 </a:solidFill>
                 <a:latin typeface="Helvetica Neue"/>
                 <a:ea typeface="Helvetica Neue"/>
@@ -3956,7 +3956,7 @@
             <a:pPr algn="ctr">
               <a:defRPr sz="1875" b="1">
                 <a:solidFill>
-                  <a:srgbClr val="FFFFFF"/>
+                  <a:srgbClr val="2B2B28"/>
                 </a:solidFill>
                 <a:latin typeface="Helvetica Neue"/>
                 <a:ea typeface="Helvetica Neue"/>
@@ -3966,7 +3966,7 @@
             <a:r>
               <a:rPr sz="1875" b="1">
                 <a:solidFill>
-                  <a:srgbClr val="FFFFFF"/>
+                  <a:srgbClr val="2B2B28"/>
                 </a:solidFill>
                 <a:latin typeface="Helvetica Neue"/>
                 <a:ea typeface="Helvetica Neue"/>
@@ -4013,7 +4013,7 @@
             <a:defPPr algn="l">
               <a:defRPr sz="1650" b="1">
                 <a:solidFill>
-                  <a:srgbClr val="235CF0"/>
+                  <a:srgbClr val="2B2B28"/>
                 </a:solidFill>
                 <a:latin typeface="Helvetica Neue"/>
                 <a:ea typeface="Helvetica Neue"/>
@@ -4023,7 +4023,7 @@
             <a:lvl1pPr algn="l">
               <a:defRPr sz="1650" b="1">
                 <a:solidFill>
-                  <a:srgbClr val="235CF0"/>
+                  <a:srgbClr val="2B2B28"/>
                 </a:solidFill>
                 <a:latin typeface="Helvetica Neue"/>
                 <a:ea typeface="Helvetica Neue"/>
@@ -4033,7 +4033,7 @@
             <a:lvl2pPr algn="l">
               <a:defRPr sz="1650" b="1">
                 <a:solidFill>
-                  <a:srgbClr val="235CF0"/>
+                  <a:srgbClr val="2B2B28"/>
                 </a:solidFill>
                 <a:latin typeface="Helvetica Neue"/>
                 <a:ea typeface="Helvetica Neue"/>
@@ -4043,7 +4043,7 @@
             <a:lvl3pPr algn="l">
               <a:defRPr sz="1650" b="1">
                 <a:solidFill>
-                  <a:srgbClr val="235CF0"/>
+                  <a:srgbClr val="2B2B28"/>
                 </a:solidFill>
                 <a:latin typeface="Helvetica Neue"/>
                 <a:ea typeface="Helvetica Neue"/>
@@ -4053,7 +4053,7 @@
             <a:lvl4pPr algn="l">
               <a:defRPr sz="1650" b="1">
                 <a:solidFill>
-                  <a:srgbClr val="235CF0"/>
+                  <a:srgbClr val="2B2B28"/>
                 </a:solidFill>
                 <a:latin typeface="Helvetica Neue"/>
                 <a:ea typeface="Helvetica Neue"/>
@@ -4063,7 +4063,7 @@
             <a:lvl5pPr algn="l">
               <a:defRPr sz="1650" b="1">
                 <a:solidFill>
-                  <a:srgbClr val="235CF0"/>
+                  <a:srgbClr val="2B2B28"/>
                 </a:solidFill>
                 <a:latin typeface="Helvetica Neue"/>
                 <a:ea typeface="Helvetica Neue"/>
@@ -4073,7 +4073,7 @@
             <a:lvl6pPr algn="l">
               <a:defRPr sz="1650" b="1">
                 <a:solidFill>
-                  <a:srgbClr val="235CF0"/>
+                  <a:srgbClr val="2B2B28"/>
                 </a:solidFill>
                 <a:latin typeface="Helvetica Neue"/>
                 <a:ea typeface="Helvetica Neue"/>
@@ -4083,7 +4083,7 @@
             <a:lvl7pPr algn="l">
               <a:defRPr sz="1650" b="1">
                 <a:solidFill>
-                  <a:srgbClr val="235CF0"/>
+                  <a:srgbClr val="2B2B28"/>
                 </a:solidFill>
                 <a:latin typeface="Helvetica Neue"/>
                 <a:ea typeface="Helvetica Neue"/>
@@ -4093,7 +4093,7 @@
             <a:lvl8pPr algn="l">
               <a:defRPr sz="1650" b="1">
                 <a:solidFill>
-                  <a:srgbClr val="235CF0"/>
+                  <a:srgbClr val="2B2B28"/>
                 </a:solidFill>
                 <a:latin typeface="Helvetica Neue"/>
                 <a:ea typeface="Helvetica Neue"/>
@@ -4103,7 +4103,7 @@
             <a:lvl9pPr algn="l">
               <a:defRPr sz="1650" b="1">
                 <a:solidFill>
-                  <a:srgbClr val="235CF0"/>
+                  <a:srgbClr val="2B2B28"/>
                 </a:solidFill>
                 <a:latin typeface="Helvetica Neue"/>
                 <a:ea typeface="Helvetica Neue"/>
@@ -4115,7 +4115,7 @@
             <a:pPr algn="l">
               <a:defRPr sz="1650" b="1">
                 <a:solidFill>
-                  <a:srgbClr val="235CF0"/>
+                  <a:srgbClr val="2B2B28"/>
                 </a:solidFill>
                 <a:latin typeface="Helvetica Neue"/>
                 <a:ea typeface="Helvetica Neue"/>
@@ -4125,7 +4125,7 @@
             <a:r>
               <a:rPr sz="1650" b="1">
                 <a:solidFill>
-                  <a:srgbClr val="235CF0"/>
+                  <a:srgbClr val="2B2B28"/>
                 </a:solidFill>
                 <a:latin typeface="Helvetica Neue"/>
                 <a:ea typeface="Helvetica Neue"/>
@@ -4172,7 +4172,7 @@
             <a:defPPr algn="l">
               <a:defRPr sz="1650" b="1">
                 <a:solidFill>
-                  <a:srgbClr val="235CF0"/>
+                  <a:srgbClr val="2B2B28"/>
                 </a:solidFill>
                 <a:latin typeface="Helvetica Neue"/>
                 <a:ea typeface="Helvetica Neue"/>
@@ -4182,7 +4182,7 @@
             <a:lvl1pPr algn="l">
               <a:defRPr sz="1650" b="1">
                 <a:solidFill>
-                  <a:srgbClr val="235CF0"/>
+                  <a:srgbClr val="2B2B28"/>
                 </a:solidFill>
                 <a:latin typeface="Helvetica Neue"/>
                 <a:ea typeface="Helvetica Neue"/>
@@ -4192,7 +4192,7 @@
             <a:lvl2pPr algn="l">
               <a:defRPr sz="1650" b="1">
                 <a:solidFill>
-                  <a:srgbClr val="235CF0"/>
+                  <a:srgbClr val="2B2B28"/>
                 </a:solidFill>
                 <a:latin typeface="Helvetica Neue"/>
                 <a:ea typeface="Helvetica Neue"/>
@@ -4202,7 +4202,7 @@
             <a:lvl3pPr algn="l">
               <a:defRPr sz="1650" b="1">
                 <a:solidFill>
-                  <a:srgbClr val="235CF0"/>
+                  <a:srgbClr val="2B2B28"/>
                 </a:solidFill>
                 <a:latin typeface="Helvetica Neue"/>
                 <a:ea typeface="Helvetica Neue"/>
@@ -4212,7 +4212,7 @@
             <a:lvl4pPr algn="l">
               <a:defRPr sz="1650" b="1">
                 <a:solidFill>
-                  <a:srgbClr val="235CF0"/>
+                  <a:srgbClr val="2B2B28"/>
                 </a:solidFill>
                 <a:latin typeface="Helvetica Neue"/>
                 <a:ea typeface="Helvetica Neue"/>
@@ -4222,7 +4222,7 @@
             <a:lvl5pPr algn="l">
               <a:defRPr sz="1650" b="1">
                 <a:solidFill>
-                  <a:srgbClr val="235CF0"/>
+                  <a:srgbClr val="2B2B28"/>
                 </a:solidFill>
                 <a:latin typeface="Helvetica Neue"/>
                 <a:ea typeface="Helvetica Neue"/>
@@ -4232,7 +4232,7 @@
             <a:lvl6pPr algn="l">
               <a:defRPr sz="1650" b="1">
                 <a:solidFill>
-                  <a:srgbClr val="235CF0"/>
+                  <a:srgbClr val="2B2B28"/>
                 </a:solidFill>
                 <a:latin typeface="Helvetica Neue"/>
                 <a:ea typeface="Helvetica Neue"/>
@@ -4242,7 +4242,7 @@
             <a:lvl7pPr algn="l">
               <a:defRPr sz="1650" b="1">
                 <a:solidFill>
-                  <a:srgbClr val="235CF0"/>
+                  <a:srgbClr val="2B2B28"/>
                 </a:solidFill>
                 <a:latin typeface="Helvetica Neue"/>
                 <a:ea typeface="Helvetica Neue"/>
@@ -4252,7 +4252,7 @@
             <a:lvl8pPr algn="l">
               <a:defRPr sz="1650" b="1">
                 <a:solidFill>
-                  <a:srgbClr val="235CF0"/>
+                  <a:srgbClr val="2B2B28"/>
                 </a:solidFill>
                 <a:latin typeface="Helvetica Neue"/>
                 <a:ea typeface="Helvetica Neue"/>
@@ -4262,7 +4262,7 @@
             <a:lvl9pPr algn="l">
               <a:defRPr sz="1650" b="1">
                 <a:solidFill>
-                  <a:srgbClr val="235CF0"/>
+                  <a:srgbClr val="2B2B28"/>
                 </a:solidFill>
                 <a:latin typeface="Helvetica Neue"/>
                 <a:ea typeface="Helvetica Neue"/>
@@ -4274,7 +4274,7 @@
             <a:pPr algn="l">
               <a:defRPr sz="1650" b="1">
                 <a:solidFill>
-                  <a:srgbClr val="235CF0"/>
+                  <a:srgbClr val="2B2B28"/>
                 </a:solidFill>
                 <a:latin typeface="Helvetica Neue"/>
                 <a:ea typeface="Helvetica Neue"/>
@@ -4284,7 +4284,7 @@
             <a:r>
               <a:rPr sz="1650" b="1">
                 <a:solidFill>
-                  <a:srgbClr val="235CF0"/>
+                  <a:srgbClr val="2B2B28"/>
                 </a:solidFill>
                 <a:latin typeface="Helvetica Neue"/>
                 <a:ea typeface="Helvetica Neue"/>
@@ -4318,17 +4318,17 @@
             <a:avLst/>
           </a:prstGeom>
           <a:solidFill xmlns:a="http://schemas.openxmlformats.org/drawingml/2006/main">
-            <a:srgbClr val="FFFFFF"/>
+            <a:srgbClr val="FFFEFB"/>
           </a:solidFill>
           <a:ln xmlns:a="http://schemas.openxmlformats.org/drawingml/2006/main" w="19050">
             <a:solidFill>
-              <a:srgbClr val="142033"/>
+              <a:srgbClr val="2B2B28"/>
             </a:solidFill>
             <a:prstDash val="solid"/>
           </a:ln>
           <ns1:effectLst xmlns:ns1="http://schemas.openxmlformats.org/drawingml/2006/main">
             <ns1:outerShdw blurRad="57150" dist="42597" dir="3806097" sx="100000" sy="100000" kx="0" ky="0" algn="ctr" rotWithShape="0">
-              <ns1:srgbClr val="142033">
+              <ns1:srgbClr val="2B2B28">
                 <ns1:alpha val="18000"/>
               </ns1:srgbClr>
             </ns1:outerShdw>
@@ -4377,7 +4377,7 @@
             <a:defPPr algn="ctr">
               <a:defRPr sz="1650" b="1">
                 <a:solidFill>
-                  <a:srgbClr val="142033"/>
+                  <a:srgbClr val="2B2B28"/>
                 </a:solidFill>
                 <a:latin typeface="Helvetica Neue"/>
                 <a:ea typeface="Helvetica Neue"/>
@@ -4387,7 +4387,7 @@
             <a:lvl1pPr algn="ctr">
               <a:defRPr sz="1650" b="1">
                 <a:solidFill>
-                  <a:srgbClr val="142033"/>
+                  <a:srgbClr val="2B2B28"/>
                 </a:solidFill>
                 <a:latin typeface="Helvetica Neue"/>
                 <a:ea typeface="Helvetica Neue"/>
@@ -4397,7 +4397,7 @@
             <a:lvl2pPr algn="ctr">
               <a:defRPr sz="1650" b="1">
                 <a:solidFill>
-                  <a:srgbClr val="142033"/>
+                  <a:srgbClr val="2B2B28"/>
                 </a:solidFill>
                 <a:latin typeface="Helvetica Neue"/>
                 <a:ea typeface="Helvetica Neue"/>
@@ -4407,7 +4407,7 @@
             <a:lvl3pPr algn="ctr">
               <a:defRPr sz="1650" b="1">
                 <a:solidFill>
-                  <a:srgbClr val="142033"/>
+                  <a:srgbClr val="2B2B28"/>
                 </a:solidFill>
                 <a:latin typeface="Helvetica Neue"/>
                 <a:ea typeface="Helvetica Neue"/>
@@ -4417,7 +4417,7 @@
             <a:lvl4pPr algn="ctr">
               <a:defRPr sz="1650" b="1">
                 <a:solidFill>
-                  <a:srgbClr val="142033"/>
+                  <a:srgbClr val="2B2B28"/>
                 </a:solidFill>
                 <a:latin typeface="Helvetica Neue"/>
                 <a:ea typeface="Helvetica Neue"/>
@@ -4427,7 +4427,7 @@
             <a:lvl5pPr algn="ctr">
               <a:defRPr sz="1650" b="1">
                 <a:solidFill>
-                  <a:srgbClr val="142033"/>
+                  <a:srgbClr val="2B2B28"/>
                 </a:solidFill>
                 <a:latin typeface="Helvetica Neue"/>
                 <a:ea typeface="Helvetica Neue"/>
@@ -4437,7 +4437,7 @@
             <a:lvl6pPr algn="ctr">
               <a:defRPr sz="1650" b="1">
                 <a:solidFill>
-                  <a:srgbClr val="142033"/>
+                  <a:srgbClr val="2B2B28"/>
                 </a:solidFill>
                 <a:latin typeface="Helvetica Neue"/>
                 <a:ea typeface="Helvetica Neue"/>
@@ -4447,7 +4447,7 @@
             <a:lvl7pPr algn="ctr">
               <a:defRPr sz="1650" b="1">
                 <a:solidFill>
-                  <a:srgbClr val="142033"/>
+                  <a:srgbClr val="2B2B28"/>
                 </a:solidFill>
                 <a:latin typeface="Helvetica Neue"/>
                 <a:ea typeface="Helvetica Neue"/>
@@ -4457,7 +4457,7 @@
             <a:lvl8pPr algn="ctr">
               <a:defRPr sz="1650" b="1">
                 <a:solidFill>
-                  <a:srgbClr val="142033"/>
+                  <a:srgbClr val="2B2B28"/>
                 </a:solidFill>
                 <a:latin typeface="Helvetica Neue"/>
                 <a:ea typeface="Helvetica Neue"/>
@@ -4467,7 +4467,7 @@
             <a:lvl9pPr algn="ctr">
               <a:defRPr sz="1650" b="1">
                 <a:solidFill>
-                  <a:srgbClr val="142033"/>
+                  <a:srgbClr val="2B2B28"/>
                 </a:solidFill>
                 <a:latin typeface="Helvetica Neue"/>
                 <a:ea typeface="Helvetica Neue"/>
@@ -4479,7 +4479,7 @@
             <a:pPr algn="ctr">
               <a:defRPr sz="1650" b="1">
                 <a:solidFill>
-                  <a:srgbClr val="142033"/>
+                  <a:srgbClr val="2B2B28"/>
                 </a:solidFill>
                 <a:latin typeface="Helvetica Neue"/>
                 <a:ea typeface="Helvetica Neue"/>
@@ -4489,7 +4489,7 @@
             <a:r>
               <a:rPr sz="1650" b="1">
                 <a:solidFill>
-                  <a:srgbClr val="142033"/>
+                  <a:srgbClr val="2B2B28"/>
                 </a:solidFill>
                 <a:latin typeface="Helvetica Neue"/>
                 <a:ea typeface="Helvetica Neue"/>
@@ -4536,7 +4536,7 @@
             <a:defPPr algn="ctr">
               <a:defRPr sz="1575" b="0">
                 <a:solidFill>
-                  <a:srgbClr val="4B596C"/>
+                  <a:srgbClr val="57564F"/>
                 </a:solidFill>
                 <a:latin typeface="Helvetica Neue"/>
                 <a:ea typeface="Helvetica Neue"/>
@@ -4546,7 +4546,7 @@
             <a:lvl1pPr algn="ctr">
               <a:defRPr sz="1575" b="0">
                 <a:solidFill>
-                  <a:srgbClr val="4B596C"/>
+                  <a:srgbClr val="57564F"/>
                 </a:solidFill>
                 <a:latin typeface="Helvetica Neue"/>
                 <a:ea typeface="Helvetica Neue"/>
@@ -4556,7 +4556,7 @@
             <a:lvl2pPr algn="ctr">
               <a:defRPr sz="1575" b="0">
                 <a:solidFill>
-                  <a:srgbClr val="4B596C"/>
+                  <a:srgbClr val="57564F"/>
                 </a:solidFill>
                 <a:latin typeface="Helvetica Neue"/>
                 <a:ea typeface="Helvetica Neue"/>
@@ -4566,7 +4566,7 @@
             <a:lvl3pPr algn="ctr">
               <a:defRPr sz="1575" b="0">
                 <a:solidFill>
-                  <a:srgbClr val="4B596C"/>
+                  <a:srgbClr val="57564F"/>
                 </a:solidFill>
                 <a:latin typeface="Helvetica Neue"/>
                 <a:ea typeface="Helvetica Neue"/>
@@ -4576,7 +4576,7 @@
             <a:lvl4pPr algn="ctr">
               <a:defRPr sz="1575" b="0">
                 <a:solidFill>
-                  <a:srgbClr val="4B596C"/>
+                  <a:srgbClr val="57564F"/>
                 </a:solidFill>
                 <a:latin typeface="Helvetica Neue"/>
                 <a:ea typeface="Helvetica Neue"/>
@@ -4586,7 +4586,7 @@
             <a:lvl5pPr algn="ctr">
               <a:defRPr sz="1575" b="0">
                 <a:solidFill>
-                  <a:srgbClr val="4B596C"/>
+                  <a:srgbClr val="57564F"/>
                 </a:solidFill>
                 <a:latin typeface="Helvetica Neue"/>
                 <a:ea typeface="Helvetica Neue"/>
@@ -4596,7 +4596,7 @@
             <a:lvl6pPr algn="ctr">
               <a:defRPr sz="1575" b="0">
                 <a:solidFill>
-                  <a:srgbClr val="4B596C"/>
+                  <a:srgbClr val="57564F"/>
                 </a:solidFill>
                 <a:latin typeface="Helvetica Neue"/>
                 <a:ea typeface="Helvetica Neue"/>
@@ -4606,7 +4606,7 @@
             <a:lvl7pPr algn="ctr">
               <a:defRPr sz="1575" b="0">
                 <a:solidFill>
-                  <a:srgbClr val="4B596C"/>
+                  <a:srgbClr val="57564F"/>
                 </a:solidFill>
                 <a:latin typeface="Helvetica Neue"/>
                 <a:ea typeface="Helvetica Neue"/>
@@ -4616,7 +4616,7 @@
             <a:lvl8pPr algn="ctr">
               <a:defRPr sz="1575" b="0">
                 <a:solidFill>
-                  <a:srgbClr val="4B596C"/>
+                  <a:srgbClr val="57564F"/>
                 </a:solidFill>
                 <a:latin typeface="Helvetica Neue"/>
                 <a:ea typeface="Helvetica Neue"/>
@@ -4626,7 +4626,7 @@
             <a:lvl9pPr algn="ctr">
               <a:defRPr sz="1575" b="0">
                 <a:solidFill>
-                  <a:srgbClr val="4B596C"/>
+                  <a:srgbClr val="57564F"/>
                 </a:solidFill>
                 <a:latin typeface="Helvetica Neue"/>
                 <a:ea typeface="Helvetica Neue"/>
@@ -4638,7 +4638,7 @@
             <a:pPr algn="ctr">
               <a:defRPr sz="1575" b="0">
                 <a:solidFill>
-                  <a:srgbClr val="4B596C"/>
+                  <a:srgbClr val="57564F"/>
                 </a:solidFill>
                 <a:latin typeface="Helvetica Neue"/>
                 <a:ea typeface="Helvetica Neue"/>
@@ -4648,7 +4648,7 @@
             <a:r>
               <a:rPr sz="1575" b="0">
                 <a:solidFill>
-                  <a:srgbClr val="4B596C"/>
+                  <a:srgbClr val="57564F"/>
                 </a:solidFill>
                 <a:latin typeface="Helvetica Neue"/>
                 <a:ea typeface="Helvetica Neue"/>
@@ -4682,17 +4682,17 @@
             <a:avLst/>
           </a:prstGeom>
           <a:solidFill xmlns:a="http://schemas.openxmlformats.org/drawingml/2006/main">
-            <a:srgbClr val="FFFFFF"/>
+            <a:srgbClr val="FFFEFB"/>
           </a:solidFill>
           <a:ln xmlns:a="http://schemas.openxmlformats.org/drawingml/2006/main" w="19050">
             <a:solidFill>
-              <a:srgbClr val="142033"/>
+              <a:srgbClr val="2B2B28"/>
             </a:solidFill>
             <a:prstDash val="solid"/>
           </a:ln>
           <ns2:effectLst xmlns:ns2="http://schemas.openxmlformats.org/drawingml/2006/main">
             <ns2:outerShdw blurRad="57150" dist="42597" dir="3806097" sx="100000" sy="100000" kx="0" ky="0" algn="ctr" rotWithShape="0">
-              <ns2:srgbClr val="142033">
+              <ns2:srgbClr val="2B2B28">
                 <ns2:alpha val="18000"/>
               </ns2:srgbClr>
             </ns2:outerShdw>
@@ -4741,7 +4741,7 @@
             <a:defPPr algn="ctr">
               <a:defRPr sz="1650" b="1">
                 <a:solidFill>
-                  <a:srgbClr val="142033"/>
+                  <a:srgbClr val="2B2B28"/>
                 </a:solidFill>
                 <a:latin typeface="Helvetica Neue"/>
                 <a:ea typeface="Helvetica Neue"/>
@@ -4751,7 +4751,7 @@
             <a:lvl1pPr algn="ctr">
               <a:defRPr sz="1650" b="1">
                 <a:solidFill>
-                  <a:srgbClr val="142033"/>
+                  <a:srgbClr val="2B2B28"/>
                 </a:solidFill>
                 <a:latin typeface="Helvetica Neue"/>
                 <a:ea typeface="Helvetica Neue"/>
@@ -4761,7 +4761,7 @@
             <a:lvl2pPr algn="ctr">
               <a:defRPr sz="1650" b="1">
                 <a:solidFill>
-                  <a:srgbClr val="142033"/>
+                  <a:srgbClr val="2B2B28"/>
                 </a:solidFill>
                 <a:latin typeface="Helvetica Neue"/>
                 <a:ea typeface="Helvetica Neue"/>
@@ -4771,7 +4771,7 @@
             <a:lvl3pPr algn="ctr">
               <a:defRPr sz="1650" b="1">
                 <a:solidFill>
-                  <a:srgbClr val="142033"/>
+                  <a:srgbClr val="2B2B28"/>
                 </a:solidFill>
                 <a:latin typeface="Helvetica Neue"/>
                 <a:ea typeface="Helvetica Neue"/>
@@ -4781,7 +4781,7 @@
             <a:lvl4pPr algn="ctr">
               <a:defRPr sz="1650" b="1">
                 <a:solidFill>
-                  <a:srgbClr val="142033"/>
+                  <a:srgbClr val="2B2B28"/>
                 </a:solidFill>
                 <a:latin typeface="Helvetica Neue"/>
                 <a:ea typeface="Helvetica Neue"/>
@@ -4791,7 +4791,7 @@
             <a:lvl5pPr algn="ctr">
               <a:defRPr sz="1650" b="1">
                 <a:solidFill>
-                  <a:srgbClr val="142033"/>
+                  <a:srgbClr val="2B2B28"/>
                 </a:solidFill>
                 <a:latin typeface="Helvetica Neue"/>
                 <a:ea typeface="Helvetica Neue"/>
@@ -4801,7 +4801,7 @@
             <a:lvl6pPr algn="ctr">
               <a:defRPr sz="1650" b="1">
                 <a:solidFill>
-                  <a:srgbClr val="142033"/>
+                  <a:srgbClr val="2B2B28"/>
                 </a:solidFill>
                 <a:latin typeface="Helvetica Neue"/>
                 <a:ea typeface="Helvetica Neue"/>
@@ -4811,7 +4811,7 @@
             <a:lvl7pPr algn="ctr">
               <a:defRPr sz="1650" b="1">
                 <a:solidFill>
-                  <a:srgbClr val="142033"/>
+                  <a:srgbClr val="2B2B28"/>
                 </a:solidFill>
                 <a:latin typeface="Helvetica Neue"/>
                 <a:ea typeface="Helvetica Neue"/>
@@ -4821,7 +4821,7 @@
             <a:lvl8pPr algn="ctr">
               <a:defRPr sz="1650" b="1">
                 <a:solidFill>
-                  <a:srgbClr val="142033"/>
+                  <a:srgbClr val="2B2B28"/>
                 </a:solidFill>
                 <a:latin typeface="Helvetica Neue"/>
                 <a:ea typeface="Helvetica Neue"/>
@@ -4831,7 +4831,7 @@
             <a:lvl9pPr algn="ctr">
               <a:defRPr sz="1650" b="1">
                 <a:solidFill>
-                  <a:srgbClr val="142033"/>
+                  <a:srgbClr val="2B2B28"/>
                 </a:solidFill>
                 <a:latin typeface="Helvetica Neue"/>
                 <a:ea typeface="Helvetica Neue"/>
@@ -4843,7 +4843,7 @@
             <a:pPr algn="ctr">
               <a:defRPr sz="1650" b="1">
                 <a:solidFill>
-                  <a:srgbClr val="142033"/>
+                  <a:srgbClr val="2B2B28"/>
                 </a:solidFill>
                 <a:latin typeface="Helvetica Neue"/>
                 <a:ea typeface="Helvetica Neue"/>
@@ -4853,7 +4853,7 @@
             <a:r>
               <a:rPr sz="1650" b="1">
                 <a:solidFill>
-                  <a:srgbClr val="142033"/>
+                  <a:srgbClr val="2B2B28"/>
                 </a:solidFill>
                 <a:latin typeface="Helvetica Neue"/>
                 <a:ea typeface="Helvetica Neue"/>
@@ -4900,7 +4900,7 @@
             <a:defPPr algn="ctr">
               <a:defRPr sz="1575" b="0">
                 <a:solidFill>
-                  <a:srgbClr val="4B596C"/>
+                  <a:srgbClr val="57564F"/>
                 </a:solidFill>
                 <a:latin typeface="Helvetica Neue"/>
                 <a:ea typeface="Helvetica Neue"/>
@@ -4910,7 +4910,7 @@
             <a:lvl1pPr algn="ctr">
               <a:defRPr sz="1575" b="0">
                 <a:solidFill>
-                  <a:srgbClr val="4B596C"/>
+                  <a:srgbClr val="57564F"/>
                 </a:solidFill>
                 <a:latin typeface="Helvetica Neue"/>
                 <a:ea typeface="Helvetica Neue"/>
@@ -4920,7 +4920,7 @@
             <a:lvl2pPr algn="ctr">
               <a:defRPr sz="1575" b="0">
                 <a:solidFill>
-                  <a:srgbClr val="4B596C"/>
+                  <a:srgbClr val="57564F"/>
                 </a:solidFill>
                 <a:latin typeface="Helvetica Neue"/>
                 <a:ea typeface="Helvetica Neue"/>
@@ -4930,7 +4930,7 @@
             <a:lvl3pPr algn="ctr">
               <a:defRPr sz="1575" b="0">
                 <a:solidFill>
-                  <a:srgbClr val="4B596C"/>
+                  <a:srgbClr val="57564F"/>
                 </a:solidFill>
                 <a:latin typeface="Helvetica Neue"/>
                 <a:ea typeface="Helvetica Neue"/>
@@ -4940,7 +4940,7 @@
             <a:lvl4pPr algn="ctr">
               <a:defRPr sz="1575" b="0">
                 <a:solidFill>
-                  <a:srgbClr val="4B596C"/>
+                  <a:srgbClr val="57564F"/>
                 </a:solidFill>
                 <a:latin typeface="Helvetica Neue"/>
                 <a:ea typeface="Helvetica Neue"/>
@@ -4950,7 +4950,7 @@
             <a:lvl5pPr algn="ctr">
               <a:defRPr sz="1575" b="0">
                 <a:solidFill>
-                  <a:srgbClr val="4B596C"/>
+                  <a:srgbClr val="57564F"/>
                 </a:solidFill>
                 <a:latin typeface="Helvetica Neue"/>
                 <a:ea typeface="Helvetica Neue"/>
@@ -4960,7 +4960,7 @@
             <a:lvl6pPr algn="ctr">
               <a:defRPr sz="1575" b="0">
                 <a:solidFill>
-                  <a:srgbClr val="4B596C"/>
+                  <a:srgbClr val="57564F"/>
                 </a:solidFill>
                 <a:latin typeface="Helvetica Neue"/>
                 <a:ea typeface="Helvetica Neue"/>
@@ -4970,7 +4970,7 @@
             <a:lvl7pPr algn="ctr">
               <a:defRPr sz="1575" b="0">
                 <a:solidFill>
-                  <a:srgbClr val="4B596C"/>
+                  <a:srgbClr val="57564F"/>
                 </a:solidFill>
                 <a:latin typeface="Helvetica Neue"/>
                 <a:ea typeface="Helvetica Neue"/>
@@ -4980,7 +4980,7 @@
             <a:lvl8pPr algn="ctr">
               <a:defRPr sz="1575" b="0">
                 <a:solidFill>
-                  <a:srgbClr val="4B596C"/>
+                  <a:srgbClr val="57564F"/>
                 </a:solidFill>
                 <a:latin typeface="Helvetica Neue"/>
                 <a:ea typeface="Helvetica Neue"/>
@@ -4990,7 +4990,7 @@
             <a:lvl9pPr algn="ctr">
               <a:defRPr sz="1575" b="0">
                 <a:solidFill>
-                  <a:srgbClr val="4B596C"/>
+                  <a:srgbClr val="57564F"/>
                 </a:solidFill>
                 <a:latin typeface="Helvetica Neue"/>
                 <a:ea typeface="Helvetica Neue"/>
@@ -5002,7 +5002,7 @@
             <a:pPr algn="ctr">
               <a:defRPr sz="1575" b="0">
                 <a:solidFill>
-                  <a:srgbClr val="4B596C"/>
+                  <a:srgbClr val="57564F"/>
                 </a:solidFill>
                 <a:latin typeface="Helvetica Neue"/>
                 <a:ea typeface="Helvetica Neue"/>
@@ -5012,7 +5012,7 @@
             <a:r>
               <a:rPr sz="1575" b="0">
                 <a:solidFill>
-                  <a:srgbClr val="4B596C"/>
+                  <a:srgbClr val="57564F"/>
                 </a:solidFill>
                 <a:latin typeface="Helvetica Neue"/>
                 <a:ea typeface="Helvetica Neue"/>
@@ -5025,7 +5025,7 @@
             <a:pPr algn="ctr">
               <a:defRPr sz="1575" b="0">
                 <a:solidFill>
-                  <a:srgbClr val="4B596C"/>
+                  <a:srgbClr val="57564F"/>
                 </a:solidFill>
                 <a:latin typeface="Helvetica Neue"/>
                 <a:ea typeface="Helvetica Neue"/>
@@ -5035,7 +5035,7 @@
             <a:r>
               <a:rPr sz="1575" b="0">
                 <a:solidFill>
-                  <a:srgbClr val="4B596C"/>
+                  <a:srgbClr val="57564F"/>
                 </a:solidFill>
                 <a:latin typeface="Helvetica Neue"/>
                 <a:ea typeface="Helvetica Neue"/>
@@ -5069,17 +5069,17 @@
             <a:avLst/>
           </a:prstGeom>
           <a:solidFill xmlns:a="http://schemas.openxmlformats.org/drawingml/2006/main">
-            <a:srgbClr val="FFFFFF"/>
+            <a:srgbClr val="FFFEFB"/>
           </a:solidFill>
           <a:ln xmlns:a="http://schemas.openxmlformats.org/drawingml/2006/main" w="19050">
             <a:solidFill>
-              <a:srgbClr val="142033"/>
+              <a:srgbClr val="2B2B28"/>
             </a:solidFill>
             <a:prstDash val="solid"/>
           </a:ln>
           <ns3:effectLst xmlns:ns3="http://schemas.openxmlformats.org/drawingml/2006/main">
             <ns3:outerShdw blurRad="57150" dist="42597" dir="3806097" sx="100000" sy="100000" kx="0" ky="0" algn="ctr" rotWithShape="0">
-              <ns3:srgbClr val="142033">
+              <ns3:srgbClr val="2B2B28">
                 <ns3:alpha val="18000"/>
               </ns3:srgbClr>
             </ns3:outerShdw>
@@ -5128,7 +5128,7 @@
             <a:defPPr algn="ctr">
               <a:defRPr sz="1650" b="1">
                 <a:solidFill>
-                  <a:srgbClr val="142033"/>
+                  <a:srgbClr val="2B2B28"/>
                 </a:solidFill>
                 <a:latin typeface="Helvetica Neue"/>
                 <a:ea typeface="Helvetica Neue"/>
@@ -5138,7 +5138,7 @@
             <a:lvl1pPr algn="ctr">
               <a:defRPr sz="1650" b="1">
                 <a:solidFill>
-                  <a:srgbClr val="142033"/>
+                  <a:srgbClr val="2B2B28"/>
                 </a:solidFill>
                 <a:latin typeface="Helvetica Neue"/>
                 <a:ea typeface="Helvetica Neue"/>
@@ -5148,7 +5148,7 @@
             <a:lvl2pPr algn="ctr">
               <a:defRPr sz="1650" b="1">
                 <a:solidFill>
-                  <a:srgbClr val="142033"/>
+                  <a:srgbClr val="2B2B28"/>
                 </a:solidFill>
                 <a:latin typeface="Helvetica Neue"/>
                 <a:ea typeface="Helvetica Neue"/>
@@ -5158,7 +5158,7 @@
             <a:lvl3pPr algn="ctr">
               <a:defRPr sz="1650" b="1">
                 <a:solidFill>
-                  <a:srgbClr val="142033"/>
+                  <a:srgbClr val="2B2B28"/>
                 </a:solidFill>
                 <a:latin typeface="Helvetica Neue"/>
                 <a:ea typeface="Helvetica Neue"/>
@@ -5168,7 +5168,7 @@
             <a:lvl4pPr algn="ctr">
               <a:defRPr sz="1650" b="1">
                 <a:solidFill>
-                  <a:srgbClr val="142033"/>
+                  <a:srgbClr val="2B2B28"/>
                 </a:solidFill>
                 <a:latin typeface="Helvetica Neue"/>
                 <a:ea typeface="Helvetica Neue"/>
@@ -5178,7 +5178,7 @@
             <a:lvl5pPr algn="ctr">
               <a:defRPr sz="1650" b="1">
                 <a:solidFill>
-                  <a:srgbClr val="142033"/>
+                  <a:srgbClr val="2B2B28"/>
                 </a:solidFill>
                 <a:latin typeface="Helvetica Neue"/>
                 <a:ea typeface="Helvetica Neue"/>
@@ -5188,7 +5188,7 @@
             <a:lvl6pPr algn="ctr">
               <a:defRPr sz="1650" b="1">
                 <a:solidFill>
-                  <a:srgbClr val="142033"/>
+                  <a:srgbClr val="2B2B28"/>
                 </a:solidFill>
                 <a:latin typeface="Helvetica Neue"/>
                 <a:ea typeface="Helvetica Neue"/>
@@ -5198,7 +5198,7 @@
             <a:lvl7pPr algn="ctr">
               <a:defRPr sz="1650" b="1">
                 <a:solidFill>
-                  <a:srgbClr val="142033"/>
+                  <a:srgbClr val="2B2B28"/>
                 </a:solidFill>
                 <a:latin typeface="Helvetica Neue"/>
                 <a:ea typeface="Helvetica Neue"/>
@@ -5208,7 +5208,7 @@
             <a:lvl8pPr algn="ctr">
               <a:defRPr sz="1650" b="1">
                 <a:solidFill>
-                  <a:srgbClr val="142033"/>
+                  <a:srgbClr val="2B2B28"/>
                 </a:solidFill>
                 <a:latin typeface="Helvetica Neue"/>
                 <a:ea typeface="Helvetica Neue"/>
@@ -5218,7 +5218,7 @@
             <a:lvl9pPr algn="ctr">
               <a:defRPr sz="1650" b="1">
                 <a:solidFill>
-                  <a:srgbClr val="142033"/>
+                  <a:srgbClr val="2B2B28"/>
                 </a:solidFill>
                 <a:latin typeface="Helvetica Neue"/>
                 <a:ea typeface="Helvetica Neue"/>
@@ -5230,7 +5230,7 @@
             <a:pPr algn="ctr">
               <a:defRPr sz="1650" b="1">
                 <a:solidFill>
-                  <a:srgbClr val="142033"/>
+                  <a:srgbClr val="2B2B28"/>
                 </a:solidFill>
                 <a:latin typeface="Helvetica Neue"/>
                 <a:ea typeface="Helvetica Neue"/>
@@ -5240,7 +5240,7 @@
             <a:r>
               <a:rPr sz="1650" b="1">
                 <a:solidFill>
-                  <a:srgbClr val="142033"/>
+                  <a:srgbClr val="2B2B28"/>
                 </a:solidFill>
                 <a:latin typeface="Helvetica Neue"/>
                 <a:ea typeface="Helvetica Neue"/>
@@ -5287,7 +5287,7 @@
             <a:defPPr algn="ctr">
               <a:defRPr sz="1575" b="0">
                 <a:solidFill>
-                  <a:srgbClr val="4B596C"/>
+                  <a:srgbClr val="57564F"/>
                 </a:solidFill>
                 <a:latin typeface="Helvetica Neue"/>
                 <a:ea typeface="Helvetica Neue"/>
@@ -5297,7 +5297,7 @@
             <a:lvl1pPr algn="ctr">
               <a:defRPr sz="1575" b="0">
                 <a:solidFill>
-                  <a:srgbClr val="4B596C"/>
+                  <a:srgbClr val="57564F"/>
                 </a:solidFill>
                 <a:latin typeface="Helvetica Neue"/>
                 <a:ea typeface="Helvetica Neue"/>
@@ -5307,7 +5307,7 @@
             <a:lvl2pPr algn="ctr">
               <a:defRPr sz="1575" b="0">
                 <a:solidFill>
-                  <a:srgbClr val="4B596C"/>
+                  <a:srgbClr val="57564F"/>
                 </a:solidFill>
                 <a:latin typeface="Helvetica Neue"/>
                 <a:ea typeface="Helvetica Neue"/>
@@ -5317,7 +5317,7 @@
             <a:lvl3pPr algn="ctr">
               <a:defRPr sz="1575" b="0">
                 <a:solidFill>
-                  <a:srgbClr val="4B596C"/>
+                  <a:srgbClr val="57564F"/>
                 </a:solidFill>
                 <a:latin typeface="Helvetica Neue"/>
                 <a:ea typeface="Helvetica Neue"/>
@@ -5327,7 +5327,7 @@
             <a:lvl4pPr algn="ctr">
               <a:defRPr sz="1575" b="0">
                 <a:solidFill>
-                  <a:srgbClr val="4B596C"/>
+                  <a:srgbClr val="57564F"/>
                 </a:solidFill>
                 <a:latin typeface="Helvetica Neue"/>
                 <a:ea typeface="Helvetica Neue"/>
@@ -5337,7 +5337,7 @@
             <a:lvl5pPr algn="ctr">
               <a:defRPr sz="1575" b="0">
                 <a:solidFill>
-                  <a:srgbClr val="4B596C"/>
+                  <a:srgbClr val="57564F"/>
                 </a:solidFill>
                 <a:latin typeface="Helvetica Neue"/>
                 <a:ea typeface="Helvetica Neue"/>
@@ -5347,7 +5347,7 @@
             <a:lvl6pPr algn="ctr">
               <a:defRPr sz="1575" b="0">
                 <a:solidFill>
-                  <a:srgbClr val="4B596C"/>
+                  <a:srgbClr val="57564F"/>
                 </a:solidFill>
                 <a:latin typeface="Helvetica Neue"/>
                 <a:ea typeface="Helvetica Neue"/>
@@ -5357,7 +5357,7 @@
             <a:lvl7pPr algn="ctr">
               <a:defRPr sz="1575" b="0">
                 <a:solidFill>
-                  <a:srgbClr val="4B596C"/>
+                  <a:srgbClr val="57564F"/>
                 </a:solidFill>
                 <a:latin typeface="Helvetica Neue"/>
                 <a:ea typeface="Helvetica Neue"/>
@@ -5367,7 +5367,7 @@
             <a:lvl8pPr algn="ctr">
               <a:defRPr sz="1575" b="0">
                 <a:solidFill>
-                  <a:srgbClr val="4B596C"/>
+                  <a:srgbClr val="57564F"/>
                 </a:solidFill>
                 <a:latin typeface="Helvetica Neue"/>
                 <a:ea typeface="Helvetica Neue"/>
@@ -5377,7 +5377,7 @@
             <a:lvl9pPr algn="ctr">
               <a:defRPr sz="1575" b="0">
                 <a:solidFill>
-                  <a:srgbClr val="4B596C"/>
+                  <a:srgbClr val="57564F"/>
                 </a:solidFill>
                 <a:latin typeface="Helvetica Neue"/>
                 <a:ea typeface="Helvetica Neue"/>
@@ -5389,7 +5389,7 @@
             <a:pPr algn="ctr">
               <a:defRPr sz="1575" b="0">
                 <a:solidFill>
-                  <a:srgbClr val="4B596C"/>
+                  <a:srgbClr val="57564F"/>
                 </a:solidFill>
                 <a:latin typeface="Helvetica Neue"/>
                 <a:ea typeface="Helvetica Neue"/>
@@ -5399,7 +5399,7 @@
             <a:r>
               <a:rPr sz="1575" b="0">
                 <a:solidFill>
-                  <a:srgbClr val="4B596C"/>
+                  <a:srgbClr val="57564F"/>
                 </a:solidFill>
                 <a:latin typeface="Helvetica Neue"/>
                 <a:ea typeface="Helvetica Neue"/>
@@ -5412,7 +5412,7 @@
             <a:pPr algn="ctr">
               <a:defRPr sz="1575" b="0">
                 <a:solidFill>
-                  <a:srgbClr val="4B596C"/>
+                  <a:srgbClr val="57564F"/>
                 </a:solidFill>
                 <a:latin typeface="Helvetica Neue"/>
                 <a:ea typeface="Helvetica Neue"/>
@@ -5422,7 +5422,7 @@
             <a:r>
               <a:rPr sz="1575" b="0">
                 <a:solidFill>
-                  <a:srgbClr val="4B596C"/>
+                  <a:srgbClr val="57564F"/>
                 </a:solidFill>
                 <a:latin typeface="Helvetica Neue"/>
                 <a:ea typeface="Helvetica Neue"/>
@@ -5456,17 +5456,17 @@
             <a:avLst/>
           </a:prstGeom>
           <a:solidFill xmlns:a="http://schemas.openxmlformats.org/drawingml/2006/main">
-            <a:srgbClr val="FFFFFF"/>
+            <a:srgbClr val="FFFEFB"/>
           </a:solidFill>
           <a:ln xmlns:a="http://schemas.openxmlformats.org/drawingml/2006/main" w="19050">
             <a:solidFill>
-              <a:srgbClr val="142033"/>
+              <a:srgbClr val="2B2B28"/>
             </a:solidFill>
             <a:prstDash val="solid"/>
           </a:ln>
           <ns4:effectLst xmlns:ns4="http://schemas.openxmlformats.org/drawingml/2006/main">
             <ns4:outerShdw blurRad="57150" dist="42597" dir="3806097" sx="100000" sy="100000" kx="0" ky="0" algn="ctr" rotWithShape="0">
-              <ns4:srgbClr val="142033">
+              <ns4:srgbClr val="2B2B28">
                 <ns4:alpha val="18000"/>
               </ns4:srgbClr>
             </ns4:outerShdw>
@@ -5515,7 +5515,7 @@
             <a:defPPr algn="ctr">
               <a:defRPr sz="1650" b="1">
                 <a:solidFill>
-                  <a:srgbClr val="142033"/>
+                  <a:srgbClr val="2B2B28"/>
                 </a:solidFill>
                 <a:latin typeface="Helvetica Neue"/>
                 <a:ea typeface="Helvetica Neue"/>
@@ -5525,7 +5525,7 @@
             <a:lvl1pPr algn="ctr">
               <a:defRPr sz="1650" b="1">
                 <a:solidFill>
-                  <a:srgbClr val="142033"/>
+                  <a:srgbClr val="2B2B28"/>
                 </a:solidFill>
                 <a:latin typeface="Helvetica Neue"/>
                 <a:ea typeface="Helvetica Neue"/>
@@ -5535,7 +5535,7 @@
             <a:lvl2pPr algn="ctr">
               <a:defRPr sz="1650" b="1">
                 <a:solidFill>
-                  <a:srgbClr val="142033"/>
+                  <a:srgbClr val="2B2B28"/>
                 </a:solidFill>
                 <a:latin typeface="Helvetica Neue"/>
                 <a:ea typeface="Helvetica Neue"/>
@@ -5545,7 +5545,7 @@
             <a:lvl3pPr algn="ctr">
               <a:defRPr sz="1650" b="1">
                 <a:solidFill>
-                  <a:srgbClr val="142033"/>
+                  <a:srgbClr val="2B2B28"/>
                 </a:solidFill>
                 <a:latin typeface="Helvetica Neue"/>
                 <a:ea typeface="Helvetica Neue"/>
@@ -5555,7 +5555,7 @@
             <a:lvl4pPr algn="ctr">
               <a:defRPr sz="1650" b="1">
                 <a:solidFill>
-                  <a:srgbClr val="142033"/>
+                  <a:srgbClr val="2B2B28"/>
                 </a:solidFill>
                 <a:latin typeface="Helvetica Neue"/>
                 <a:ea typeface="Helvetica Neue"/>
@@ -5565,7 +5565,7 @@
             <a:lvl5pPr algn="ctr">
               <a:defRPr sz="1650" b="1">
                 <a:solidFill>
-                  <a:srgbClr val="142033"/>
+                  <a:srgbClr val="2B2B28"/>
                 </a:solidFill>
                 <a:latin typeface="Helvetica Neue"/>
                 <a:ea typeface="Helvetica Neue"/>
@@ -5575,7 +5575,7 @@
             <a:lvl6pPr algn="ctr">
               <a:defRPr sz="1650" b="1">
                 <a:solidFill>
-                  <a:srgbClr val="142033"/>
+                  <a:srgbClr val="2B2B28"/>
                 </a:solidFill>
                 <a:latin typeface="Helvetica Neue"/>
                 <a:ea typeface="Helvetica Neue"/>
@@ -5585,7 +5585,7 @@
             <a:lvl7pPr algn="ctr">
               <a:defRPr sz="1650" b="1">
                 <a:solidFill>
-                  <a:srgbClr val="142033"/>
+                  <a:srgbClr val="2B2B28"/>
                 </a:solidFill>
                 <a:latin typeface="Helvetica Neue"/>
                 <a:ea typeface="Helvetica Neue"/>
@@ -5595,7 +5595,7 @@
             <a:lvl8pPr algn="ctr">
               <a:defRPr sz="1650" b="1">
                 <a:solidFill>
-                  <a:srgbClr val="142033"/>
+                  <a:srgbClr val="2B2B28"/>
                 </a:solidFill>
                 <a:latin typeface="Helvetica Neue"/>
                 <a:ea typeface="Helvetica Neue"/>
@@ -5605,7 +5605,7 @@
             <a:lvl9pPr algn="ctr">
               <a:defRPr sz="1650" b="1">
                 <a:solidFill>
-                  <a:srgbClr val="142033"/>
+                  <a:srgbClr val="2B2B28"/>
                 </a:solidFill>
                 <a:latin typeface="Helvetica Neue"/>
                 <a:ea typeface="Helvetica Neue"/>
@@ -5617,7 +5617,7 @@
             <a:pPr algn="ctr">
               <a:defRPr sz="1650" b="1">
                 <a:solidFill>
-                  <a:srgbClr val="142033"/>
+                  <a:srgbClr val="2B2B28"/>
                 </a:solidFill>
                 <a:latin typeface="Helvetica Neue"/>
                 <a:ea typeface="Helvetica Neue"/>
@@ -5627,7 +5627,7 @@
             <a:r>
               <a:rPr sz="1650" b="1">
                 <a:solidFill>
-                  <a:srgbClr val="142033"/>
+                  <a:srgbClr val="2B2B28"/>
                 </a:solidFill>
                 <a:latin typeface="Helvetica Neue"/>
                 <a:ea typeface="Helvetica Neue"/>
@@ -5674,7 +5674,7 @@
             <a:defPPr algn="ctr">
               <a:defRPr sz="1575" b="0">
                 <a:solidFill>
-                  <a:srgbClr val="4B596C"/>
+                  <a:srgbClr val="57564F"/>
                 </a:solidFill>
                 <a:latin typeface="Helvetica Neue"/>
                 <a:ea typeface="Helvetica Neue"/>
@@ -5684,7 +5684,7 @@
             <a:lvl1pPr algn="ctr">
               <a:defRPr sz="1575" b="0">
                 <a:solidFill>
-                  <a:srgbClr val="4B596C"/>
+                  <a:srgbClr val="57564F"/>
                 </a:solidFill>
                 <a:latin typeface="Helvetica Neue"/>
                 <a:ea typeface="Helvetica Neue"/>
@@ -5694,7 +5694,7 @@
             <a:lvl2pPr algn="ctr">
               <a:defRPr sz="1575" b="0">
                 <a:solidFill>
-                  <a:srgbClr val="4B596C"/>
+                  <a:srgbClr val="57564F"/>
                 </a:solidFill>
                 <a:latin typeface="Helvetica Neue"/>
                 <a:ea typeface="Helvetica Neue"/>
@@ -5704,7 +5704,7 @@
             <a:lvl3pPr algn="ctr">
               <a:defRPr sz="1575" b="0">
                 <a:solidFill>
-                  <a:srgbClr val="4B596C"/>
+                  <a:srgbClr val="57564F"/>
                 </a:solidFill>
                 <a:latin typeface="Helvetica Neue"/>
                 <a:ea typeface="Helvetica Neue"/>
@@ -5714,7 +5714,7 @@
             <a:lvl4pPr algn="ctr">
               <a:defRPr sz="1575" b="0">
                 <a:solidFill>
-                  <a:srgbClr val="4B596C"/>
+                  <a:srgbClr val="57564F"/>
                 </a:solidFill>
                 <a:latin typeface="Helvetica Neue"/>
                 <a:ea typeface="Helvetica Neue"/>
@@ -5724,7 +5724,7 @@
             <a:lvl5pPr algn="ctr">
               <a:defRPr sz="1575" b="0">
                 <a:solidFill>
-                  <a:srgbClr val="4B596C"/>
+                  <a:srgbClr val="57564F"/>
                 </a:solidFill>
                 <a:latin typeface="Helvetica Neue"/>
                 <a:ea typeface="Helvetica Neue"/>
@@ -5734,7 +5734,7 @@
             <a:lvl6pPr algn="ctr">
               <a:defRPr sz="1575" b="0">
                 <a:solidFill>
-                  <a:srgbClr val="4B596C"/>
+                  <a:srgbClr val="57564F"/>
                 </a:solidFill>
                 <a:latin typeface="Helvetica Neue"/>
                 <a:ea typeface="Helvetica Neue"/>
@@ -5744,7 +5744,7 @@
             <a:lvl7pPr algn="ctr">
               <a:defRPr sz="1575" b="0">
                 <a:solidFill>
-                  <a:srgbClr val="4B596C"/>
+                  <a:srgbClr val="57564F"/>
                 </a:solidFill>
                 <a:latin typeface="Helvetica Neue"/>
                 <a:ea typeface="Helvetica Neue"/>
@@ -5754,7 +5754,7 @@
             <a:lvl8pPr algn="ctr">
               <a:defRPr sz="1575" b="0">
                 <a:solidFill>
-                  <a:srgbClr val="4B596C"/>
+                  <a:srgbClr val="57564F"/>
                 </a:solidFill>
                 <a:latin typeface="Helvetica Neue"/>
                 <a:ea typeface="Helvetica Neue"/>
@@ -5764,7 +5764,7 @@
             <a:lvl9pPr algn="ctr">
               <a:defRPr sz="1575" b="0">
                 <a:solidFill>
-                  <a:srgbClr val="4B596C"/>
+                  <a:srgbClr val="57564F"/>
                 </a:solidFill>
                 <a:latin typeface="Helvetica Neue"/>
                 <a:ea typeface="Helvetica Neue"/>
@@ -5776,7 +5776,7 @@
             <a:pPr algn="ctr">
               <a:defRPr sz="1575" b="0">
                 <a:solidFill>
-                  <a:srgbClr val="4B596C"/>
+                  <a:srgbClr val="57564F"/>
                 </a:solidFill>
                 <a:latin typeface="Helvetica Neue"/>
                 <a:ea typeface="Helvetica Neue"/>
@@ -5786,7 +5786,7 @@
             <a:r>
               <a:rPr sz="1575" b="0">
                 <a:solidFill>
-                  <a:srgbClr val="4B596C"/>
+                  <a:srgbClr val="57564F"/>
                 </a:solidFill>
                 <a:latin typeface="Helvetica Neue"/>
                 <a:ea typeface="Helvetica Neue"/>
@@ -5799,7 +5799,7 @@
             <a:pPr algn="ctr">
               <a:defRPr sz="1575" b="0">
                 <a:solidFill>
-                  <a:srgbClr val="4B596C"/>
+                  <a:srgbClr val="57564F"/>
                 </a:solidFill>
                 <a:latin typeface="Helvetica Neue"/>
                 <a:ea typeface="Helvetica Neue"/>
@@ -5809,7 +5809,7 @@
             <a:r>
               <a:rPr sz="1575" b="0">
                 <a:solidFill>
-                  <a:srgbClr val="4B596C"/>
+                  <a:srgbClr val="57564F"/>
                 </a:solidFill>
                 <a:latin typeface="Helvetica Neue"/>
                 <a:ea typeface="Helvetica Neue"/>
@@ -5842,7 +5842,7 @@
           </a:prstGeom>
           <a:ln xmlns:a="http://schemas.openxmlformats.org/drawingml/2006/main" w="23813">
             <a:solidFill>
-              <a:srgbClr val="235CF0"/>
+              <a:srgbClr val="2B2B28"/>
             </a:solidFill>
             <a:prstDash val="solid"/>
             <a:tailEnd type="triangle" w="med" len="med"/>
@@ -5871,7 +5871,7 @@
           </a:prstGeom>
           <a:ln xmlns:a="http://schemas.openxmlformats.org/drawingml/2006/main" w="23813">
             <a:solidFill>
-              <a:srgbClr val="235CF0"/>
+              <a:srgbClr val="2B2B28"/>
             </a:solidFill>
             <a:prstDash val="solid"/>
             <a:tailEnd type="triangle" w="med" len="med"/>
@@ -5914,7 +5914,7 @@
             <a:defPPr algn="l">
               <a:defRPr sz="1575" b="1">
                 <a:solidFill>
-                  <a:srgbClr val="235CF0"/>
+                  <a:srgbClr val="2B2B28"/>
                 </a:solidFill>
                 <a:latin typeface="Helvetica Neue"/>
                 <a:ea typeface="Helvetica Neue"/>
@@ -5924,7 +5924,7 @@
             <a:lvl1pPr algn="l">
               <a:defRPr sz="1575" b="1">
                 <a:solidFill>
-                  <a:srgbClr val="235CF0"/>
+                  <a:srgbClr val="2B2B28"/>
                 </a:solidFill>
                 <a:latin typeface="Helvetica Neue"/>
                 <a:ea typeface="Helvetica Neue"/>
@@ -5934,7 +5934,7 @@
             <a:lvl2pPr algn="l">
               <a:defRPr sz="1575" b="1">
                 <a:solidFill>
-                  <a:srgbClr val="235CF0"/>
+                  <a:srgbClr val="2B2B28"/>
                 </a:solidFill>
                 <a:latin typeface="Helvetica Neue"/>
                 <a:ea typeface="Helvetica Neue"/>
@@ -5944,7 +5944,7 @@
             <a:lvl3pPr algn="l">
               <a:defRPr sz="1575" b="1">
                 <a:solidFill>
-                  <a:srgbClr val="235CF0"/>
+                  <a:srgbClr val="2B2B28"/>
                 </a:solidFill>
                 <a:latin typeface="Helvetica Neue"/>
                 <a:ea typeface="Helvetica Neue"/>
@@ -5954,7 +5954,7 @@
             <a:lvl4pPr algn="l">
               <a:defRPr sz="1575" b="1">
                 <a:solidFill>
-                  <a:srgbClr val="235CF0"/>
+                  <a:srgbClr val="2B2B28"/>
                 </a:solidFill>
                 <a:latin typeface="Helvetica Neue"/>
                 <a:ea typeface="Helvetica Neue"/>
@@ -5964,7 +5964,7 @@
             <a:lvl5pPr algn="l">
               <a:defRPr sz="1575" b="1">
                 <a:solidFill>
-                  <a:srgbClr val="235CF0"/>
+                  <a:srgbClr val="2B2B28"/>
                 </a:solidFill>
                 <a:latin typeface="Helvetica Neue"/>
                 <a:ea typeface="Helvetica Neue"/>
@@ -5974,7 +5974,7 @@
             <a:lvl6pPr algn="l">
               <a:defRPr sz="1575" b="1">
                 <a:solidFill>
-                  <a:srgbClr val="235CF0"/>
+                  <a:srgbClr val="2B2B28"/>
                 </a:solidFill>
                 <a:latin typeface="Helvetica Neue"/>
                 <a:ea typeface="Helvetica Neue"/>
@@ -5984,7 +5984,7 @@
             <a:lvl7pPr algn="l">
               <a:defRPr sz="1575" b="1">
                 <a:solidFill>
-                  <a:srgbClr val="235CF0"/>
+                  <a:srgbClr val="2B2B28"/>
                 </a:solidFill>
                 <a:latin typeface="Helvetica Neue"/>
                 <a:ea typeface="Helvetica Neue"/>
@@ -5994,7 +5994,7 @@
             <a:lvl8pPr algn="l">
               <a:defRPr sz="1575" b="1">
                 <a:solidFill>
-                  <a:srgbClr val="235CF0"/>
+                  <a:srgbClr val="2B2B28"/>
                 </a:solidFill>
                 <a:latin typeface="Helvetica Neue"/>
                 <a:ea typeface="Helvetica Neue"/>
@@ -6004,7 +6004,7 @@
             <a:lvl9pPr algn="l">
               <a:defRPr sz="1575" b="1">
                 <a:solidFill>
-                  <a:srgbClr val="235CF0"/>
+                  <a:srgbClr val="2B2B28"/>
                 </a:solidFill>
                 <a:latin typeface="Helvetica Neue"/>
                 <a:ea typeface="Helvetica Neue"/>
@@ -6016,7 +6016,7 @@
             <a:pPr algn="l">
               <a:defRPr sz="1575" b="1">
                 <a:solidFill>
-                  <a:srgbClr val="235CF0"/>
+                  <a:srgbClr val="2B2B28"/>
                 </a:solidFill>
                 <a:latin typeface="Helvetica Neue"/>
                 <a:ea typeface="Helvetica Neue"/>
@@ -6026,7 +6026,7 @@
             <a:r>
               <a:rPr sz="1575" b="1">
                 <a:solidFill>
-                  <a:srgbClr val="235CF0"/>
+                  <a:srgbClr val="2B2B28"/>
                 </a:solidFill>
                 <a:latin typeface="Helvetica Neue"/>
                 <a:ea typeface="Helvetica Neue"/>
@@ -6059,7 +6059,7 @@
           </a:prstGeom>
           <a:ln xmlns:a="http://schemas.openxmlformats.org/drawingml/2006/main" w="23813">
             <a:solidFill>
-              <a:srgbClr val="235CF0"/>
+              <a:srgbClr val="2B2B28"/>
             </a:solidFill>
             <a:prstDash val="solid"/>
             <a:tailEnd type="triangle" w="med" len="med"/>
@@ -6102,7 +6102,7 @@
             <a:defPPr algn="l">
               <a:defRPr sz="1575" b="1">
                 <a:solidFill>
-                  <a:srgbClr val="235CF0"/>
+                  <a:srgbClr val="2B2B28"/>
                 </a:solidFill>
                 <a:latin typeface="Helvetica Neue"/>
                 <a:ea typeface="Helvetica Neue"/>
@@ -6112,7 +6112,7 @@
             <a:lvl1pPr algn="l">
               <a:defRPr sz="1575" b="1">
                 <a:solidFill>
-                  <a:srgbClr val="235CF0"/>
+                  <a:srgbClr val="2B2B28"/>
                 </a:solidFill>
                 <a:latin typeface="Helvetica Neue"/>
                 <a:ea typeface="Helvetica Neue"/>
@@ -6122,7 +6122,7 @@
             <a:lvl2pPr algn="l">
               <a:defRPr sz="1575" b="1">
                 <a:solidFill>
-                  <a:srgbClr val="235CF0"/>
+                  <a:srgbClr val="2B2B28"/>
                 </a:solidFill>
                 <a:latin typeface="Helvetica Neue"/>
                 <a:ea typeface="Helvetica Neue"/>
@@ -6132,7 +6132,7 @@
             <a:lvl3pPr algn="l">
               <a:defRPr sz="1575" b="1">
                 <a:solidFill>
-                  <a:srgbClr val="235CF0"/>
+                  <a:srgbClr val="2B2B28"/>
                 </a:solidFill>
                 <a:latin typeface="Helvetica Neue"/>
                 <a:ea typeface="Helvetica Neue"/>
@@ -6142,7 +6142,7 @@
             <a:lvl4pPr algn="l">
               <a:defRPr sz="1575" b="1">
                 <a:solidFill>
-                  <a:srgbClr val="235CF0"/>
+                  <a:srgbClr val="2B2B28"/>
                 </a:solidFill>
                 <a:latin typeface="Helvetica Neue"/>
                 <a:ea typeface="Helvetica Neue"/>
@@ -6152,7 +6152,7 @@
             <a:lvl5pPr algn="l">
               <a:defRPr sz="1575" b="1">
                 <a:solidFill>
-                  <a:srgbClr val="235CF0"/>
+                  <a:srgbClr val="2B2B28"/>
                 </a:solidFill>
                 <a:latin typeface="Helvetica Neue"/>
                 <a:ea typeface="Helvetica Neue"/>
@@ -6162,7 +6162,7 @@
             <a:lvl6pPr algn="l">
               <a:defRPr sz="1575" b="1">
                 <a:solidFill>
-                  <a:srgbClr val="235CF0"/>
+                  <a:srgbClr val="2B2B28"/>
                 </a:solidFill>
                 <a:latin typeface="Helvetica Neue"/>
                 <a:ea typeface="Helvetica Neue"/>
@@ -6172,7 +6172,7 @@
             <a:lvl7pPr algn="l">
               <a:defRPr sz="1575" b="1">
                 <a:solidFill>
-                  <a:srgbClr val="235CF0"/>
+                  <a:srgbClr val="2B2B28"/>
                 </a:solidFill>
                 <a:latin typeface="Helvetica Neue"/>
                 <a:ea typeface="Helvetica Neue"/>
@@ -6182,7 +6182,7 @@
             <a:lvl8pPr algn="l">
               <a:defRPr sz="1575" b="1">
                 <a:solidFill>
-                  <a:srgbClr val="235CF0"/>
+                  <a:srgbClr val="2B2B28"/>
                 </a:solidFill>
                 <a:latin typeface="Helvetica Neue"/>
                 <a:ea typeface="Helvetica Neue"/>
@@ -6192,7 +6192,7 @@
             <a:lvl9pPr algn="l">
               <a:defRPr sz="1575" b="1">
                 <a:solidFill>
-                  <a:srgbClr val="235CF0"/>
+                  <a:srgbClr val="2B2B28"/>
                 </a:solidFill>
                 <a:latin typeface="Helvetica Neue"/>
                 <a:ea typeface="Helvetica Neue"/>
@@ -6204,7 +6204,7 @@
             <a:pPr algn="l">
               <a:defRPr sz="1575" b="1">
                 <a:solidFill>
-                  <a:srgbClr val="235CF0"/>
+                  <a:srgbClr val="2B2B28"/>
                 </a:solidFill>
                 <a:latin typeface="Helvetica Neue"/>
                 <a:ea typeface="Helvetica Neue"/>
@@ -6214,7 +6214,7 @@
             <a:r>
               <a:rPr sz="1575" b="1">
                 <a:solidFill>
-                  <a:srgbClr val="235CF0"/>
+                  <a:srgbClr val="2B2B28"/>
                 </a:solidFill>
                 <a:latin typeface="Helvetica Neue"/>
                 <a:ea typeface="Helvetica Neue"/>
@@ -6247,7 +6247,7 @@
           </a:prstGeom>
           <a:ln xmlns:a="http://schemas.openxmlformats.org/drawingml/2006/main" w="23813">
             <a:solidFill>
-              <a:srgbClr val="235CF0"/>
+              <a:srgbClr val="2B2B28"/>
             </a:solidFill>
             <a:prstDash val="solid"/>
             <a:tailEnd type="triangle" w="med" len="med"/>
@@ -6290,7 +6290,7 @@
             <a:defPPr algn="l">
               <a:defRPr sz="1575" b="1">
                 <a:solidFill>
-                  <a:srgbClr val="235CF0"/>
+                  <a:srgbClr val="2B2B28"/>
                 </a:solidFill>
                 <a:latin typeface="Helvetica Neue"/>
                 <a:ea typeface="Helvetica Neue"/>
@@ -6300,7 +6300,7 @@
             <a:lvl1pPr algn="l">
               <a:defRPr sz="1575" b="1">
                 <a:solidFill>
-                  <a:srgbClr val="235CF0"/>
+                  <a:srgbClr val="2B2B28"/>
                 </a:solidFill>
                 <a:latin typeface="Helvetica Neue"/>
                 <a:ea typeface="Helvetica Neue"/>
@@ -6310,7 +6310,7 @@
             <a:lvl2pPr algn="l">
               <a:defRPr sz="1575" b="1">
                 <a:solidFill>
-                  <a:srgbClr val="235CF0"/>
+                  <a:srgbClr val="2B2B28"/>
                 </a:solidFill>
                 <a:latin typeface="Helvetica Neue"/>
                 <a:ea typeface="Helvetica Neue"/>
@@ -6320,7 +6320,7 @@
             <a:lvl3pPr algn="l">
               <a:defRPr sz="1575" b="1">
                 <a:solidFill>
-                  <a:srgbClr val="235CF0"/>
+                  <a:srgbClr val="2B2B28"/>
                 </a:solidFill>
                 <a:latin typeface="Helvetica Neue"/>
                 <a:ea typeface="Helvetica Neue"/>
@@ -6330,7 +6330,7 @@
             <a:lvl4pPr algn="l">
               <a:defRPr sz="1575" b="1">
                 <a:solidFill>
-                  <a:srgbClr val="235CF0"/>
+                  <a:srgbClr val="2B2B28"/>
                 </a:solidFill>
                 <a:latin typeface="Helvetica Neue"/>
                 <a:ea typeface="Helvetica Neue"/>
@@ -6340,7 +6340,7 @@
             <a:lvl5pPr algn="l">
               <a:defRPr sz="1575" b="1">
                 <a:solidFill>
-                  <a:srgbClr val="235CF0"/>
+                  <a:srgbClr val="2B2B28"/>
                 </a:solidFill>
                 <a:latin typeface="Helvetica Neue"/>
                 <a:ea typeface="Helvetica Neue"/>
@@ -6350,7 +6350,7 @@
             <a:lvl6pPr algn="l">
               <a:defRPr sz="1575" b="1">
                 <a:solidFill>
-                  <a:srgbClr val="235CF0"/>
+                  <a:srgbClr val="2B2B28"/>
                 </a:solidFill>
                 <a:latin typeface="Helvetica Neue"/>
                 <a:ea typeface="Helvetica Neue"/>
@@ -6360,7 +6360,7 @@
             <a:lvl7pPr algn="l">
               <a:defRPr sz="1575" b="1">
                 <a:solidFill>
-                  <a:srgbClr val="235CF0"/>
+                  <a:srgbClr val="2B2B28"/>
                 </a:solidFill>
                 <a:latin typeface="Helvetica Neue"/>
                 <a:ea typeface="Helvetica Neue"/>
@@ -6370,7 +6370,7 @@
             <a:lvl8pPr algn="l">
               <a:defRPr sz="1575" b="1">
                 <a:solidFill>
-                  <a:srgbClr val="235CF0"/>
+                  <a:srgbClr val="2B2B28"/>
                 </a:solidFill>
                 <a:latin typeface="Helvetica Neue"/>
                 <a:ea typeface="Helvetica Neue"/>
@@ -6380,7 +6380,7 @@
             <a:lvl9pPr algn="l">
               <a:defRPr sz="1575" b="1">
                 <a:solidFill>
-                  <a:srgbClr val="235CF0"/>
+                  <a:srgbClr val="2B2B28"/>
                 </a:solidFill>
                 <a:latin typeface="Helvetica Neue"/>
                 <a:ea typeface="Helvetica Neue"/>
@@ -6392,7 +6392,7 @@
             <a:pPr algn="l">
               <a:defRPr sz="1575" b="1">
                 <a:solidFill>
-                  <a:srgbClr val="235CF0"/>
+                  <a:srgbClr val="2B2B28"/>
                 </a:solidFill>
                 <a:latin typeface="Helvetica Neue"/>
                 <a:ea typeface="Helvetica Neue"/>
@@ -6402,7 +6402,7 @@
             <a:r>
               <a:rPr sz="1575" b="1">
                 <a:solidFill>
-                  <a:srgbClr val="235CF0"/>
+                  <a:srgbClr val="2B2B28"/>
                 </a:solidFill>
                 <a:latin typeface="Helvetica Neue"/>
                 <a:ea typeface="Helvetica Neue"/>
@@ -6436,17 +6436,17 @@
             <a:avLst/>
           </a:prstGeom>
           <a:solidFill xmlns:a="http://schemas.openxmlformats.org/drawingml/2006/main">
-            <a:srgbClr val="FFFFFF"/>
+            <a:srgbClr val="FFFEFB"/>
           </a:solidFill>
           <a:ln xmlns:a="http://schemas.openxmlformats.org/drawingml/2006/main" w="19050">
             <a:solidFill>
-              <a:srgbClr val="142033"/>
+              <a:srgbClr val="2B2B28"/>
             </a:solidFill>
             <a:prstDash val="solid"/>
           </a:ln>
           <ns5:effectLst xmlns:ns5="http://schemas.openxmlformats.org/drawingml/2006/main">
             <ns5:outerShdw blurRad="57150" dist="42597" dir="3806097" sx="100000" sy="100000" kx="0" ky="0" algn="ctr" rotWithShape="0">
-              <ns5:srgbClr val="142033">
+              <ns5:srgbClr val="2B2B28">
                 <ns5:alpha val="18000"/>
               </ns5:srgbClr>
             </ns5:outerShdw>
@@ -6482,7 +6482,7 @@
             <a:avLst/>
           </a:prstGeom>
           <a:solidFill xmlns:a="http://schemas.openxmlformats.org/drawingml/2006/main">
-            <a:srgbClr val="E8F4EE"/>
+            <a:srgbClr val="EDF1E8"/>
           </a:solidFill>
           <a:ln xmlns:a="http://schemas.openxmlformats.org/drawingml/2006/main" w="0">
             <a:noFill/>
@@ -6526,7 +6526,7 @@
             <a:defPPr algn="ctr">
               <a:defRPr sz="1875" b="1">
                 <a:solidFill>
-                  <a:srgbClr val="087C57"/>
+                  <a:srgbClr val="447A61"/>
                 </a:solidFill>
                 <a:latin typeface="Helvetica Neue"/>
                 <a:ea typeface="Helvetica Neue"/>
@@ -6536,7 +6536,7 @@
             <a:lvl1pPr algn="ctr">
               <a:defRPr sz="1875" b="1">
                 <a:solidFill>
-                  <a:srgbClr val="087C57"/>
+                  <a:srgbClr val="447A61"/>
                 </a:solidFill>
                 <a:latin typeface="Helvetica Neue"/>
                 <a:ea typeface="Helvetica Neue"/>
@@ -6546,7 +6546,7 @@
             <a:lvl2pPr algn="ctr">
               <a:defRPr sz="1875" b="1">
                 <a:solidFill>
-                  <a:srgbClr val="087C57"/>
+                  <a:srgbClr val="447A61"/>
                 </a:solidFill>
                 <a:latin typeface="Helvetica Neue"/>
                 <a:ea typeface="Helvetica Neue"/>
@@ -6556,7 +6556,7 @@
             <a:lvl3pPr algn="ctr">
               <a:defRPr sz="1875" b="1">
                 <a:solidFill>
-                  <a:srgbClr val="087C57"/>
+                  <a:srgbClr val="447A61"/>
                 </a:solidFill>
                 <a:latin typeface="Helvetica Neue"/>
                 <a:ea typeface="Helvetica Neue"/>
@@ -6566,7 +6566,7 @@
             <a:lvl4pPr algn="ctr">
               <a:defRPr sz="1875" b="1">
                 <a:solidFill>
-                  <a:srgbClr val="087C57"/>
+                  <a:srgbClr val="447A61"/>
                 </a:solidFill>
                 <a:latin typeface="Helvetica Neue"/>
                 <a:ea typeface="Helvetica Neue"/>
@@ -6576,7 +6576,7 @@
             <a:lvl5pPr algn="ctr">
               <a:defRPr sz="1875" b="1">
                 <a:solidFill>
-                  <a:srgbClr val="087C57"/>
+                  <a:srgbClr val="447A61"/>
                 </a:solidFill>
                 <a:latin typeface="Helvetica Neue"/>
                 <a:ea typeface="Helvetica Neue"/>
@@ -6586,7 +6586,7 @@
             <a:lvl6pPr algn="ctr">
               <a:defRPr sz="1875" b="1">
                 <a:solidFill>
-                  <a:srgbClr val="087C57"/>
+                  <a:srgbClr val="447A61"/>
                 </a:solidFill>
                 <a:latin typeface="Helvetica Neue"/>
                 <a:ea typeface="Helvetica Neue"/>
@@ -6596,7 +6596,7 @@
             <a:lvl7pPr algn="ctr">
               <a:defRPr sz="1875" b="1">
                 <a:solidFill>
-                  <a:srgbClr val="087C57"/>
+                  <a:srgbClr val="447A61"/>
                 </a:solidFill>
                 <a:latin typeface="Helvetica Neue"/>
                 <a:ea typeface="Helvetica Neue"/>
@@ -6606,7 +6606,7 @@
             <a:lvl8pPr algn="ctr">
               <a:defRPr sz="1875" b="1">
                 <a:solidFill>
-                  <a:srgbClr val="087C57"/>
+                  <a:srgbClr val="447A61"/>
                 </a:solidFill>
                 <a:latin typeface="Helvetica Neue"/>
                 <a:ea typeface="Helvetica Neue"/>
@@ -6616,7 +6616,7 @@
             <a:lvl9pPr algn="ctr">
               <a:defRPr sz="1875" b="1">
                 <a:solidFill>
-                  <a:srgbClr val="087C57"/>
+                  <a:srgbClr val="447A61"/>
                 </a:solidFill>
                 <a:latin typeface="Helvetica Neue"/>
                 <a:ea typeface="Helvetica Neue"/>
@@ -6628,7 +6628,7 @@
             <a:pPr algn="ctr">
               <a:defRPr sz="1875" b="1">
                 <a:solidFill>
-                  <a:srgbClr val="087C57"/>
+                  <a:srgbClr val="447A61"/>
                 </a:solidFill>
                 <a:latin typeface="Helvetica Neue"/>
                 <a:ea typeface="Helvetica Neue"/>
@@ -6638,7 +6638,7 @@
             <a:r>
               <a:rPr sz="1875" b="1">
                 <a:solidFill>
-                  <a:srgbClr val="087C57"/>
+                  <a:srgbClr val="447A61"/>
                 </a:solidFill>
                 <a:latin typeface="Helvetica Neue"/>
                 <a:ea typeface="Helvetica Neue"/>
@@ -6685,7 +6685,7 @@
             <a:defPPr algn="l">
               <a:defRPr sz="2100" b="1">
                 <a:solidFill>
-                  <a:srgbClr val="142033"/>
+                  <a:srgbClr val="2B2B28"/>
                 </a:solidFill>
                 <a:latin typeface="Helvetica Neue"/>
                 <a:ea typeface="Helvetica Neue"/>
@@ -6695,7 +6695,7 @@
             <a:lvl1pPr algn="l">
               <a:defRPr sz="2100" b="1">
                 <a:solidFill>
-                  <a:srgbClr val="142033"/>
+                  <a:srgbClr val="2B2B28"/>
                 </a:solidFill>
                 <a:latin typeface="Helvetica Neue"/>
                 <a:ea typeface="Helvetica Neue"/>
@@ -6705,7 +6705,7 @@
             <a:lvl2pPr algn="l">
               <a:defRPr sz="2100" b="1">
                 <a:solidFill>
-                  <a:srgbClr val="142033"/>
+                  <a:srgbClr val="2B2B28"/>
                 </a:solidFill>
                 <a:latin typeface="Helvetica Neue"/>
                 <a:ea typeface="Helvetica Neue"/>
@@ -6715,7 +6715,7 @@
             <a:lvl3pPr algn="l">
               <a:defRPr sz="2100" b="1">
                 <a:solidFill>
-                  <a:srgbClr val="142033"/>
+                  <a:srgbClr val="2B2B28"/>
                 </a:solidFill>
                 <a:latin typeface="Helvetica Neue"/>
                 <a:ea typeface="Helvetica Neue"/>
@@ -6725,7 +6725,7 @@
             <a:lvl4pPr algn="l">
               <a:defRPr sz="2100" b="1">
                 <a:solidFill>
-                  <a:srgbClr val="142033"/>
+                  <a:srgbClr val="2B2B28"/>
                 </a:solidFill>
                 <a:latin typeface="Helvetica Neue"/>
                 <a:ea typeface="Helvetica Neue"/>
@@ -6735,7 +6735,7 @@
             <a:lvl5pPr algn="l">
               <a:defRPr sz="2100" b="1">
                 <a:solidFill>
-                  <a:srgbClr val="142033"/>
+                  <a:srgbClr val="2B2B28"/>
                 </a:solidFill>
                 <a:latin typeface="Helvetica Neue"/>
                 <a:ea typeface="Helvetica Neue"/>
@@ -6745,7 +6745,7 @@
             <a:lvl6pPr algn="l">
               <a:defRPr sz="2100" b="1">
                 <a:solidFill>
-                  <a:srgbClr val="142033"/>
+                  <a:srgbClr val="2B2B28"/>
                 </a:solidFill>
                 <a:latin typeface="Helvetica Neue"/>
                 <a:ea typeface="Helvetica Neue"/>
@@ -6755,7 +6755,7 @@
             <a:lvl7pPr algn="l">
               <a:defRPr sz="2100" b="1">
                 <a:solidFill>
-                  <a:srgbClr val="142033"/>
+                  <a:srgbClr val="2B2B28"/>
                 </a:solidFill>
                 <a:latin typeface="Helvetica Neue"/>
                 <a:ea typeface="Helvetica Neue"/>
@@ -6765,7 +6765,7 @@
             <a:lvl8pPr algn="l">
               <a:defRPr sz="2100" b="1">
                 <a:solidFill>
-                  <a:srgbClr val="142033"/>
+                  <a:srgbClr val="2B2B28"/>
                 </a:solidFill>
                 <a:latin typeface="Helvetica Neue"/>
                 <a:ea typeface="Helvetica Neue"/>
@@ -6775,7 +6775,7 @@
             <a:lvl9pPr algn="l">
               <a:defRPr sz="2100" b="1">
                 <a:solidFill>
-                  <a:srgbClr val="142033"/>
+                  <a:srgbClr val="2B2B28"/>
                 </a:solidFill>
                 <a:latin typeface="Helvetica Neue"/>
                 <a:ea typeface="Helvetica Neue"/>
@@ -6787,7 +6787,7 @@
             <a:pPr algn="l">
               <a:defRPr sz="2100" b="1">
                 <a:solidFill>
-                  <a:srgbClr val="142033"/>
+                  <a:srgbClr val="2B2B28"/>
                 </a:solidFill>
                 <a:latin typeface="Helvetica Neue"/>
                 <a:ea typeface="Helvetica Neue"/>
@@ -6797,7 +6797,7 @@
             <a:r>
               <a:rPr sz="2100" b="1">
                 <a:solidFill>
-                  <a:srgbClr val="142033"/>
+                  <a:srgbClr val="2B2B28"/>
                 </a:solidFill>
                 <a:latin typeface="Helvetica Neue"/>
                 <a:ea typeface="Helvetica Neue"/>
@@ -6844,7 +6844,7 @@
             <a:defPPr algn="l">
               <a:defRPr sz="1950" b="0">
                 <a:solidFill>
-                  <a:srgbClr val="142033"/>
+                  <a:srgbClr val="2B2B28"/>
                 </a:solidFill>
                 <a:latin typeface="Helvetica Neue"/>
                 <a:ea typeface="Helvetica Neue"/>
@@ -6854,7 +6854,7 @@
             <a:lvl1pPr algn="l">
               <a:defRPr sz="1950" b="0">
                 <a:solidFill>
-                  <a:srgbClr val="142033"/>
+                  <a:srgbClr val="2B2B28"/>
                 </a:solidFill>
                 <a:latin typeface="Helvetica Neue"/>
                 <a:ea typeface="Helvetica Neue"/>
@@ -6864,7 +6864,7 @@
             <a:lvl2pPr algn="l">
               <a:defRPr sz="1950" b="0">
                 <a:solidFill>
-                  <a:srgbClr val="142033"/>
+                  <a:srgbClr val="2B2B28"/>
                 </a:solidFill>
                 <a:latin typeface="Helvetica Neue"/>
                 <a:ea typeface="Helvetica Neue"/>
@@ -6874,7 +6874,7 @@
             <a:lvl3pPr algn="l">
               <a:defRPr sz="1950" b="0">
                 <a:solidFill>
-                  <a:srgbClr val="142033"/>
+                  <a:srgbClr val="2B2B28"/>
                 </a:solidFill>
                 <a:latin typeface="Helvetica Neue"/>
                 <a:ea typeface="Helvetica Neue"/>
@@ -6884,7 +6884,7 @@
             <a:lvl4pPr algn="l">
               <a:defRPr sz="1950" b="0">
                 <a:solidFill>
-                  <a:srgbClr val="142033"/>
+                  <a:srgbClr val="2B2B28"/>
                 </a:solidFill>
                 <a:latin typeface="Helvetica Neue"/>
                 <a:ea typeface="Helvetica Neue"/>
@@ -6894,7 +6894,7 @@
             <a:lvl5pPr algn="l">
               <a:defRPr sz="1950" b="0">
                 <a:solidFill>
-                  <a:srgbClr val="142033"/>
+                  <a:srgbClr val="2B2B28"/>
                 </a:solidFill>
                 <a:latin typeface="Helvetica Neue"/>
                 <a:ea typeface="Helvetica Neue"/>
@@ -6904,7 +6904,7 @@
             <a:lvl6pPr algn="l">
               <a:defRPr sz="1950" b="0">
                 <a:solidFill>
-                  <a:srgbClr val="142033"/>
+                  <a:srgbClr val="2B2B28"/>
                 </a:solidFill>
                 <a:latin typeface="Helvetica Neue"/>
                 <a:ea typeface="Helvetica Neue"/>
@@ -6914,7 +6914,7 @@
             <a:lvl7pPr algn="l">
               <a:defRPr sz="1950" b="0">
                 <a:solidFill>
-                  <a:srgbClr val="142033"/>
+                  <a:srgbClr val="2B2B28"/>
                 </a:solidFill>
                 <a:latin typeface="Helvetica Neue"/>
                 <a:ea typeface="Helvetica Neue"/>
@@ -6924,7 +6924,7 @@
             <a:lvl8pPr algn="l">
               <a:defRPr sz="1950" b="0">
                 <a:solidFill>
-                  <a:srgbClr val="142033"/>
+                  <a:srgbClr val="2B2B28"/>
                 </a:solidFill>
                 <a:latin typeface="Helvetica Neue"/>
                 <a:ea typeface="Helvetica Neue"/>
@@ -6934,7 +6934,7 @@
             <a:lvl9pPr algn="l">
               <a:defRPr sz="1950" b="0">
                 <a:solidFill>
-                  <a:srgbClr val="142033"/>
+                  <a:srgbClr val="2B2B28"/>
                 </a:solidFill>
                 <a:latin typeface="Helvetica Neue"/>
                 <a:ea typeface="Helvetica Neue"/>
@@ -6946,7 +6946,7 @@
             <a:pPr algn="l">
               <a:defRPr sz="1950" b="0">
                 <a:solidFill>
-                  <a:srgbClr val="142033"/>
+                  <a:srgbClr val="2B2B28"/>
                 </a:solidFill>
                 <a:latin typeface="Helvetica Neue"/>
                 <a:ea typeface="Helvetica Neue"/>
@@ -6956,7 +6956,7 @@
             <a:r>
               <a:rPr sz="1950" b="0">
                 <a:solidFill>
-                  <a:srgbClr val="142033"/>
+                  <a:srgbClr val="2B2B28"/>
                 </a:solidFill>
                 <a:latin typeface="Helvetica Neue"/>
                 <a:ea typeface="Helvetica Neue"/>
@@ -6969,7 +6969,7 @@
             <a:pPr algn="l">
               <a:defRPr sz="1950" b="0">
                 <a:solidFill>
-                  <a:srgbClr val="142033"/>
+                  <a:srgbClr val="2B2B28"/>
                 </a:solidFill>
                 <a:latin typeface="Helvetica Neue"/>
                 <a:ea typeface="Helvetica Neue"/>
@@ -6979,7 +6979,7 @@
             <a:r>
               <a:rPr sz="1950" b="0">
                 <a:solidFill>
-                  <a:srgbClr val="142033"/>
+                  <a:srgbClr val="2B2B28"/>
                 </a:solidFill>
                 <a:latin typeface="Helvetica Neue"/>
                 <a:ea typeface="Helvetica Neue"/>
@@ -7012,7 +7012,7 @@
           </a:prstGeom>
           <a:ln xmlns:a="http://schemas.openxmlformats.org/drawingml/2006/main" w="9525">
             <a:solidFill>
-              <a:srgbClr val="D8DBE1"/>
+              <a:srgbClr val="D6D1C8"/>
             </a:solidFill>
             <a:prstDash val="solid"/>
             <a:tailEnd type="none" w="med" len="med"/>
@@ -7055,7 +7055,7 @@
             <a:defPPr algn="l">
               <a:defRPr sz="1950" b="0">
                 <a:solidFill>
-                  <a:srgbClr val="142033"/>
+                  <a:srgbClr val="2B2B28"/>
                 </a:solidFill>
                 <a:latin typeface="Helvetica Neue"/>
                 <a:ea typeface="Helvetica Neue"/>
@@ -7065,7 +7065,7 @@
             <a:lvl1pPr algn="l">
               <a:defRPr sz="1950" b="0">
                 <a:solidFill>
-                  <a:srgbClr val="142033"/>
+                  <a:srgbClr val="2B2B28"/>
                 </a:solidFill>
                 <a:latin typeface="Helvetica Neue"/>
                 <a:ea typeface="Helvetica Neue"/>
@@ -7075,7 +7075,7 @@
             <a:lvl2pPr algn="l">
               <a:defRPr sz="1950" b="0">
                 <a:solidFill>
-                  <a:srgbClr val="142033"/>
+                  <a:srgbClr val="2B2B28"/>
                 </a:solidFill>
                 <a:latin typeface="Helvetica Neue"/>
                 <a:ea typeface="Helvetica Neue"/>
@@ -7085,7 +7085,7 @@
             <a:lvl3pPr algn="l">
               <a:defRPr sz="1950" b="0">
                 <a:solidFill>
-                  <a:srgbClr val="142033"/>
+                  <a:srgbClr val="2B2B28"/>
                 </a:solidFill>
                 <a:latin typeface="Helvetica Neue"/>
                 <a:ea typeface="Helvetica Neue"/>
@@ -7095,7 +7095,7 @@
             <a:lvl4pPr algn="l">
               <a:defRPr sz="1950" b="0">
                 <a:solidFill>
-                  <a:srgbClr val="142033"/>
+                  <a:srgbClr val="2B2B28"/>
                 </a:solidFill>
                 <a:latin typeface="Helvetica Neue"/>
                 <a:ea typeface="Helvetica Neue"/>
@@ -7105,7 +7105,7 @@
             <a:lvl5pPr algn="l">
               <a:defRPr sz="1950" b="0">
                 <a:solidFill>
-                  <a:srgbClr val="142033"/>
+                  <a:srgbClr val="2B2B28"/>
                 </a:solidFill>
                 <a:latin typeface="Helvetica Neue"/>
                 <a:ea typeface="Helvetica Neue"/>
@@ -7115,7 +7115,7 @@
             <a:lvl6pPr algn="l">
               <a:defRPr sz="1950" b="0">
                 <a:solidFill>
-                  <a:srgbClr val="142033"/>
+                  <a:srgbClr val="2B2B28"/>
                 </a:solidFill>
                 <a:latin typeface="Helvetica Neue"/>
                 <a:ea typeface="Helvetica Neue"/>
@@ -7125,7 +7125,7 @@
             <a:lvl7pPr algn="l">
               <a:defRPr sz="1950" b="0">
                 <a:solidFill>
-                  <a:srgbClr val="142033"/>
+                  <a:srgbClr val="2B2B28"/>
                 </a:solidFill>
                 <a:latin typeface="Helvetica Neue"/>
                 <a:ea typeface="Helvetica Neue"/>
@@ -7135,7 +7135,7 @@
             <a:lvl8pPr algn="l">
               <a:defRPr sz="1950" b="0">
                 <a:solidFill>
-                  <a:srgbClr val="142033"/>
+                  <a:srgbClr val="2B2B28"/>
                 </a:solidFill>
                 <a:latin typeface="Helvetica Neue"/>
                 <a:ea typeface="Helvetica Neue"/>
@@ -7145,7 +7145,7 @@
             <a:lvl9pPr algn="l">
               <a:defRPr sz="1950" b="0">
                 <a:solidFill>
-                  <a:srgbClr val="142033"/>
+                  <a:srgbClr val="2B2B28"/>
                 </a:solidFill>
                 <a:latin typeface="Helvetica Neue"/>
                 <a:ea typeface="Helvetica Neue"/>
@@ -7157,7 +7157,7 @@
             <a:pPr algn="l">
               <a:defRPr sz="1950" b="0">
                 <a:solidFill>
-                  <a:srgbClr val="142033"/>
+                  <a:srgbClr val="2B2B28"/>
                 </a:solidFill>
                 <a:latin typeface="Helvetica Neue"/>
                 <a:ea typeface="Helvetica Neue"/>
@@ -7167,7 +7167,7 @@
             <a:r>
               <a:rPr sz="1950" b="0">
                 <a:solidFill>
-                  <a:srgbClr val="142033"/>
+                  <a:srgbClr val="2B2B28"/>
                 </a:solidFill>
                 <a:latin typeface="Helvetica Neue"/>
                 <a:ea typeface="Helvetica Neue"/>
@@ -7180,7 +7180,7 @@
             <a:pPr algn="l">
               <a:defRPr sz="1950" b="0">
                 <a:solidFill>
-                  <a:srgbClr val="142033"/>
+                  <a:srgbClr val="2B2B28"/>
                 </a:solidFill>
                 <a:latin typeface="Helvetica Neue"/>
                 <a:ea typeface="Helvetica Neue"/>
@@ -7190,7 +7190,7 @@
             <a:r>
               <a:rPr sz="1950" b="0">
                 <a:solidFill>
-                  <a:srgbClr val="142033"/>
+                  <a:srgbClr val="2B2B28"/>
                 </a:solidFill>
                 <a:latin typeface="Helvetica Neue"/>
                 <a:ea typeface="Helvetica Neue"/>
@@ -7224,17 +7224,17 @@
             <a:avLst/>
           </a:prstGeom>
           <a:solidFill xmlns:a="http://schemas.openxmlformats.org/drawingml/2006/main">
-            <a:srgbClr val="FFFFFF"/>
+            <a:srgbClr val="FFFEFB"/>
           </a:solidFill>
           <a:ln xmlns:a="http://schemas.openxmlformats.org/drawingml/2006/main" w="19050">
             <a:solidFill>
-              <a:srgbClr val="142033"/>
+              <a:srgbClr val="2B2B28"/>
             </a:solidFill>
             <a:prstDash val="solid"/>
           </a:ln>
           <ns6:effectLst xmlns:ns6="http://schemas.openxmlformats.org/drawingml/2006/main">
             <ns6:outerShdw blurRad="57150" dist="42597" dir="3806097" sx="100000" sy="100000" kx="0" ky="0" algn="ctr" rotWithShape="0">
-              <ns6:srgbClr val="142033">
+              <ns6:srgbClr val="2B2B28">
                 <ns6:alpha val="18000"/>
               </ns6:srgbClr>
             </ns6:outerShdw>
@@ -7270,7 +7270,7 @@
             <a:avLst/>
           </a:prstGeom>
           <a:solidFill xmlns:a="http://schemas.openxmlformats.org/drawingml/2006/main">
-            <a:srgbClr val="EDF1FF"/>
+            <a:srgbClr val="EEEAE2"/>
           </a:solidFill>
           <a:ln xmlns:a="http://schemas.openxmlformats.org/drawingml/2006/main" w="0">
             <a:noFill/>
@@ -7314,7 +7314,7 @@
             <a:defPPr algn="ctr">
               <a:defRPr sz="1875" b="1">
                 <a:solidFill>
-                  <a:srgbClr val="235CF0"/>
+                  <a:srgbClr val="2B2B28"/>
                 </a:solidFill>
                 <a:latin typeface="Helvetica Neue"/>
                 <a:ea typeface="Helvetica Neue"/>
@@ -7324,7 +7324,7 @@
             <a:lvl1pPr algn="ctr">
               <a:defRPr sz="1875" b="1">
                 <a:solidFill>
-                  <a:srgbClr val="235CF0"/>
+                  <a:srgbClr val="2B2B28"/>
                 </a:solidFill>
                 <a:latin typeface="Helvetica Neue"/>
                 <a:ea typeface="Helvetica Neue"/>
@@ -7334,7 +7334,7 @@
             <a:lvl2pPr algn="ctr">
               <a:defRPr sz="1875" b="1">
                 <a:solidFill>
-                  <a:srgbClr val="235CF0"/>
+                  <a:srgbClr val="2B2B28"/>
                 </a:solidFill>
                 <a:latin typeface="Helvetica Neue"/>
                 <a:ea typeface="Helvetica Neue"/>
@@ -7344,7 +7344,7 @@
             <a:lvl3pPr algn="ctr">
               <a:defRPr sz="1875" b="1">
                 <a:solidFill>
-                  <a:srgbClr val="235CF0"/>
+                  <a:srgbClr val="2B2B28"/>
                 </a:solidFill>
                 <a:latin typeface="Helvetica Neue"/>
                 <a:ea typeface="Helvetica Neue"/>
@@ -7354,7 +7354,7 @@
             <a:lvl4pPr algn="ctr">
               <a:defRPr sz="1875" b="1">
                 <a:solidFill>
-                  <a:srgbClr val="235CF0"/>
+                  <a:srgbClr val="2B2B28"/>
                 </a:solidFill>
                 <a:latin typeface="Helvetica Neue"/>
                 <a:ea typeface="Helvetica Neue"/>
@@ -7364,7 +7364,7 @@
             <a:lvl5pPr algn="ctr">
               <a:defRPr sz="1875" b="1">
                 <a:solidFill>
-                  <a:srgbClr val="235CF0"/>
+                  <a:srgbClr val="2B2B28"/>
                 </a:solidFill>
                 <a:latin typeface="Helvetica Neue"/>
                 <a:ea typeface="Helvetica Neue"/>
@@ -7374,7 +7374,7 @@
             <a:lvl6pPr algn="ctr">
               <a:defRPr sz="1875" b="1">
                 <a:solidFill>
-                  <a:srgbClr val="235CF0"/>
+                  <a:srgbClr val="2B2B28"/>
                 </a:solidFill>
                 <a:latin typeface="Helvetica Neue"/>
                 <a:ea typeface="Helvetica Neue"/>
@@ -7384,7 +7384,7 @@
             <a:lvl7pPr algn="ctr">
               <a:defRPr sz="1875" b="1">
                 <a:solidFill>
-                  <a:srgbClr val="235CF0"/>
+                  <a:srgbClr val="2B2B28"/>
                 </a:solidFill>
                 <a:latin typeface="Helvetica Neue"/>
                 <a:ea typeface="Helvetica Neue"/>
@@ -7394,7 +7394,7 @@
             <a:lvl8pPr algn="ctr">
               <a:defRPr sz="1875" b="1">
                 <a:solidFill>
-                  <a:srgbClr val="235CF0"/>
+                  <a:srgbClr val="2B2B28"/>
                 </a:solidFill>
                 <a:latin typeface="Helvetica Neue"/>
                 <a:ea typeface="Helvetica Neue"/>
@@ -7404,7 +7404,7 @@
             <a:lvl9pPr algn="ctr">
               <a:defRPr sz="1875" b="1">
                 <a:solidFill>
-                  <a:srgbClr val="235CF0"/>
+                  <a:srgbClr val="2B2B28"/>
                 </a:solidFill>
                 <a:latin typeface="Helvetica Neue"/>
                 <a:ea typeface="Helvetica Neue"/>
@@ -7416,7 +7416,7 @@
             <a:pPr algn="ctr">
               <a:defRPr sz="1875" b="1">
                 <a:solidFill>
-                  <a:srgbClr val="235CF0"/>
+                  <a:srgbClr val="2B2B28"/>
                 </a:solidFill>
                 <a:latin typeface="Helvetica Neue"/>
                 <a:ea typeface="Helvetica Neue"/>
@@ -7426,7 +7426,7 @@
             <a:r>
               <a:rPr sz="1875" b="1">
                 <a:solidFill>
-                  <a:srgbClr val="235CF0"/>
+                  <a:srgbClr val="2B2B28"/>
                 </a:solidFill>
                 <a:latin typeface="Helvetica Neue"/>
                 <a:ea typeface="Helvetica Neue"/>
@@ -7473,7 +7473,7 @@
             <a:defPPr algn="l">
               <a:defRPr sz="2100" b="1">
                 <a:solidFill>
-                  <a:srgbClr val="142033"/>
+                  <a:srgbClr val="2B2B28"/>
                 </a:solidFill>
                 <a:latin typeface="Helvetica Neue"/>
                 <a:ea typeface="Helvetica Neue"/>
@@ -7483,7 +7483,7 @@
             <a:lvl1pPr algn="l">
               <a:defRPr sz="2100" b="1">
                 <a:solidFill>
-                  <a:srgbClr val="142033"/>
+                  <a:srgbClr val="2B2B28"/>
                 </a:solidFill>
                 <a:latin typeface="Helvetica Neue"/>
                 <a:ea typeface="Helvetica Neue"/>
@@ -7493,7 +7493,7 @@
             <a:lvl2pPr algn="l">
               <a:defRPr sz="2100" b="1">
                 <a:solidFill>
-                  <a:srgbClr val="142033"/>
+                  <a:srgbClr val="2B2B28"/>
                 </a:solidFill>
                 <a:latin typeface="Helvetica Neue"/>
                 <a:ea typeface="Helvetica Neue"/>
@@ -7503,7 +7503,7 @@
             <a:lvl3pPr algn="l">
               <a:defRPr sz="2100" b="1">
                 <a:solidFill>
-                  <a:srgbClr val="142033"/>
+                  <a:srgbClr val="2B2B28"/>
                 </a:solidFill>
                 <a:latin typeface="Helvetica Neue"/>
                 <a:ea typeface="Helvetica Neue"/>
@@ -7513,7 +7513,7 @@
             <a:lvl4pPr algn="l">
               <a:defRPr sz="2100" b="1">
                 <a:solidFill>
-                  <a:srgbClr val="142033"/>
+                  <a:srgbClr val="2B2B28"/>
                 </a:solidFill>
                 <a:latin typeface="Helvetica Neue"/>
                 <a:ea typeface="Helvetica Neue"/>
@@ -7523,7 +7523,7 @@
             <a:lvl5pPr algn="l">
               <a:defRPr sz="2100" b="1">
                 <a:solidFill>
-                  <a:srgbClr val="142033"/>
+                  <a:srgbClr val="2B2B28"/>
                 </a:solidFill>
                 <a:latin typeface="Helvetica Neue"/>
                 <a:ea typeface="Helvetica Neue"/>
@@ -7533,7 +7533,7 @@
             <a:lvl6pPr algn="l">
               <a:defRPr sz="2100" b="1">
                 <a:solidFill>
-                  <a:srgbClr val="142033"/>
+                  <a:srgbClr val="2B2B28"/>
                 </a:solidFill>
                 <a:latin typeface="Helvetica Neue"/>
                 <a:ea typeface="Helvetica Neue"/>
@@ -7543,7 +7543,7 @@
             <a:lvl7pPr algn="l">
               <a:defRPr sz="2100" b="1">
                 <a:solidFill>
-                  <a:srgbClr val="142033"/>
+                  <a:srgbClr val="2B2B28"/>
                 </a:solidFill>
                 <a:latin typeface="Helvetica Neue"/>
                 <a:ea typeface="Helvetica Neue"/>
@@ -7553,7 +7553,7 @@
             <a:lvl8pPr algn="l">
               <a:defRPr sz="2100" b="1">
                 <a:solidFill>
-                  <a:srgbClr val="142033"/>
+                  <a:srgbClr val="2B2B28"/>
                 </a:solidFill>
                 <a:latin typeface="Helvetica Neue"/>
                 <a:ea typeface="Helvetica Neue"/>
@@ -7563,7 +7563,7 @@
             <a:lvl9pPr algn="l">
               <a:defRPr sz="2100" b="1">
                 <a:solidFill>
-                  <a:srgbClr val="142033"/>
+                  <a:srgbClr val="2B2B28"/>
                 </a:solidFill>
                 <a:latin typeface="Helvetica Neue"/>
                 <a:ea typeface="Helvetica Neue"/>
@@ -7575,7 +7575,7 @@
             <a:pPr algn="l">
               <a:defRPr sz="2100" b="1">
                 <a:solidFill>
-                  <a:srgbClr val="142033"/>
+                  <a:srgbClr val="2B2B28"/>
                 </a:solidFill>
                 <a:latin typeface="Helvetica Neue"/>
                 <a:ea typeface="Helvetica Neue"/>
@@ -7585,7 +7585,7 @@
             <a:r>
               <a:rPr sz="2100" b="1">
                 <a:solidFill>
-                  <a:srgbClr val="142033"/>
+                  <a:srgbClr val="2B2B28"/>
                 </a:solidFill>
                 <a:latin typeface="Helvetica Neue"/>
                 <a:ea typeface="Helvetica Neue"/>
@@ -7632,7 +7632,7 @@
             <a:defPPr algn="l">
               <a:defRPr sz="1950" b="0">
                 <a:solidFill>
-                  <a:srgbClr val="142033"/>
+                  <a:srgbClr val="2B2B28"/>
                 </a:solidFill>
                 <a:latin typeface="Helvetica Neue"/>
                 <a:ea typeface="Helvetica Neue"/>
@@ -7642,7 +7642,7 @@
             <a:lvl1pPr algn="l">
               <a:defRPr sz="1950" b="0">
                 <a:solidFill>
-                  <a:srgbClr val="142033"/>
+                  <a:srgbClr val="2B2B28"/>
                 </a:solidFill>
                 <a:latin typeface="Helvetica Neue"/>
                 <a:ea typeface="Helvetica Neue"/>
@@ -7652,7 +7652,7 @@
             <a:lvl2pPr algn="l">
               <a:defRPr sz="1950" b="0">
                 <a:solidFill>
-                  <a:srgbClr val="142033"/>
+                  <a:srgbClr val="2B2B28"/>
                 </a:solidFill>
                 <a:latin typeface="Helvetica Neue"/>
                 <a:ea typeface="Helvetica Neue"/>
@@ -7662,7 +7662,7 @@
             <a:lvl3pPr algn="l">
               <a:defRPr sz="1950" b="0">
                 <a:solidFill>
-                  <a:srgbClr val="142033"/>
+                  <a:srgbClr val="2B2B28"/>
                 </a:solidFill>
                 <a:latin typeface="Helvetica Neue"/>
                 <a:ea typeface="Helvetica Neue"/>
@@ -7672,7 +7672,7 @@
             <a:lvl4pPr algn="l">
               <a:defRPr sz="1950" b="0">
                 <a:solidFill>
-                  <a:srgbClr val="142033"/>
+                  <a:srgbClr val="2B2B28"/>
                 </a:solidFill>
                 <a:latin typeface="Helvetica Neue"/>
                 <a:ea typeface="Helvetica Neue"/>
@@ -7682,7 +7682,7 @@
             <a:lvl5pPr algn="l">
               <a:defRPr sz="1950" b="0">
                 <a:solidFill>
-                  <a:srgbClr val="142033"/>
+                  <a:srgbClr val="2B2B28"/>
                 </a:solidFill>
                 <a:latin typeface="Helvetica Neue"/>
                 <a:ea typeface="Helvetica Neue"/>
@@ -7692,7 +7692,7 @@
             <a:lvl6pPr algn="l">
               <a:defRPr sz="1950" b="0">
                 <a:solidFill>
-                  <a:srgbClr val="142033"/>
+                  <a:srgbClr val="2B2B28"/>
                 </a:solidFill>
                 <a:latin typeface="Helvetica Neue"/>
                 <a:ea typeface="Helvetica Neue"/>
@@ -7702,7 +7702,7 @@
             <a:lvl7pPr algn="l">
               <a:defRPr sz="1950" b="0">
                 <a:solidFill>
-                  <a:srgbClr val="142033"/>
+                  <a:srgbClr val="2B2B28"/>
                 </a:solidFill>
                 <a:latin typeface="Helvetica Neue"/>
                 <a:ea typeface="Helvetica Neue"/>
@@ -7712,7 +7712,7 @@
             <a:lvl8pPr algn="l">
               <a:defRPr sz="1950" b="0">
                 <a:solidFill>
-                  <a:srgbClr val="142033"/>
+                  <a:srgbClr val="2B2B28"/>
                 </a:solidFill>
                 <a:latin typeface="Helvetica Neue"/>
                 <a:ea typeface="Helvetica Neue"/>
@@ -7722,7 +7722,7 @@
             <a:lvl9pPr algn="l">
               <a:defRPr sz="1950" b="0">
                 <a:solidFill>
-                  <a:srgbClr val="142033"/>
+                  <a:srgbClr val="2B2B28"/>
                 </a:solidFill>
                 <a:latin typeface="Helvetica Neue"/>
                 <a:ea typeface="Helvetica Neue"/>
@@ -7734,7 +7734,7 @@
             <a:pPr algn="l">
               <a:defRPr sz="1950" b="0">
                 <a:solidFill>
-                  <a:srgbClr val="142033"/>
+                  <a:srgbClr val="2B2B28"/>
                 </a:solidFill>
                 <a:latin typeface="Helvetica Neue"/>
                 <a:ea typeface="Helvetica Neue"/>
@@ -7744,7 +7744,7 @@
             <a:r>
               <a:rPr sz="1950" b="0">
                 <a:solidFill>
-                  <a:srgbClr val="142033"/>
+                  <a:srgbClr val="2B2B28"/>
                 </a:solidFill>
                 <a:latin typeface="Helvetica Neue"/>
                 <a:ea typeface="Helvetica Neue"/>
@@ -7757,7 +7757,7 @@
             <a:pPr algn="l">
               <a:defRPr sz="1950" b="0">
                 <a:solidFill>
-                  <a:srgbClr val="142033"/>
+                  <a:srgbClr val="2B2B28"/>
                 </a:solidFill>
                 <a:latin typeface="Helvetica Neue"/>
                 <a:ea typeface="Helvetica Neue"/>
@@ -7767,7 +7767,7 @@
             <a:r>
               <a:rPr sz="1950" b="0">
                 <a:solidFill>
-                  <a:srgbClr val="142033"/>
+                  <a:srgbClr val="2B2B28"/>
                 </a:solidFill>
                 <a:latin typeface="Helvetica Neue"/>
                 <a:ea typeface="Helvetica Neue"/>
@@ -7800,7 +7800,7 @@
           </a:prstGeom>
           <a:ln xmlns:a="http://schemas.openxmlformats.org/drawingml/2006/main" w="9525">
             <a:solidFill>
-              <a:srgbClr val="D8DBE1"/>
+              <a:srgbClr val="D6D1C8"/>
             </a:solidFill>
             <a:prstDash val="solid"/>
             <a:tailEnd type="none" w="med" len="med"/>
@@ -7843,7 +7843,7 @@
             <a:defPPr algn="l">
               <a:defRPr sz="1950" b="0">
                 <a:solidFill>
-                  <a:srgbClr val="142033"/>
+                  <a:srgbClr val="2B2B28"/>
                 </a:solidFill>
                 <a:latin typeface="Helvetica Neue"/>
                 <a:ea typeface="Helvetica Neue"/>
@@ -7853,7 +7853,7 @@
             <a:lvl1pPr algn="l">
               <a:defRPr sz="1950" b="0">
                 <a:solidFill>
-                  <a:srgbClr val="142033"/>
+                  <a:srgbClr val="2B2B28"/>
                 </a:solidFill>
                 <a:latin typeface="Helvetica Neue"/>
                 <a:ea typeface="Helvetica Neue"/>
@@ -7863,7 +7863,7 @@
             <a:lvl2pPr algn="l">
               <a:defRPr sz="1950" b="0">
                 <a:solidFill>
-                  <a:srgbClr val="142033"/>
+                  <a:srgbClr val="2B2B28"/>
                 </a:solidFill>
                 <a:latin typeface="Helvetica Neue"/>
                 <a:ea typeface="Helvetica Neue"/>
@@ -7873,7 +7873,7 @@
             <a:lvl3pPr algn="l">
               <a:defRPr sz="1950" b="0">
                 <a:solidFill>
-                  <a:srgbClr val="142033"/>
+                  <a:srgbClr val="2B2B28"/>
                 </a:solidFill>
                 <a:latin typeface="Helvetica Neue"/>
                 <a:ea typeface="Helvetica Neue"/>
@@ -7883,7 +7883,7 @@
             <a:lvl4pPr algn="l">
               <a:defRPr sz="1950" b="0">
                 <a:solidFill>
-                  <a:srgbClr val="142033"/>
+                  <a:srgbClr val="2B2B28"/>
                 </a:solidFill>
                 <a:latin typeface="Helvetica Neue"/>
                 <a:ea typeface="Helvetica Neue"/>
@@ -7893,7 +7893,7 @@
             <a:lvl5pPr algn="l">
               <a:defRPr sz="1950" b="0">
                 <a:solidFill>
-                  <a:srgbClr val="142033"/>
+                  <a:srgbClr val="2B2B28"/>
                 </a:solidFill>
                 <a:latin typeface="Helvetica Neue"/>
                 <a:ea typeface="Helvetica Neue"/>
@@ -7903,7 +7903,7 @@
             <a:lvl6pPr algn="l">
               <a:defRPr sz="1950" b="0">
                 <a:solidFill>
-                  <a:srgbClr val="142033"/>
+                  <a:srgbClr val="2B2B28"/>
                 </a:solidFill>
                 <a:latin typeface="Helvetica Neue"/>
                 <a:ea typeface="Helvetica Neue"/>
@@ -7913,7 +7913,7 @@
             <a:lvl7pPr algn="l">
               <a:defRPr sz="1950" b="0">
                 <a:solidFill>
-                  <a:srgbClr val="142033"/>
+                  <a:srgbClr val="2B2B28"/>
                 </a:solidFill>
                 <a:latin typeface="Helvetica Neue"/>
                 <a:ea typeface="Helvetica Neue"/>
@@ -7923,7 +7923,7 @@
             <a:lvl8pPr algn="l">
               <a:defRPr sz="1950" b="0">
                 <a:solidFill>
-                  <a:srgbClr val="142033"/>
+                  <a:srgbClr val="2B2B28"/>
                 </a:solidFill>
                 <a:latin typeface="Helvetica Neue"/>
                 <a:ea typeface="Helvetica Neue"/>
@@ -7933,7 +7933,7 @@
             <a:lvl9pPr algn="l">
               <a:defRPr sz="1950" b="0">
                 <a:solidFill>
-                  <a:srgbClr val="142033"/>
+                  <a:srgbClr val="2B2B28"/>
                 </a:solidFill>
                 <a:latin typeface="Helvetica Neue"/>
                 <a:ea typeface="Helvetica Neue"/>
@@ -7945,7 +7945,7 @@
             <a:pPr algn="l">
               <a:defRPr sz="1950" b="0">
                 <a:solidFill>
-                  <a:srgbClr val="142033"/>
+                  <a:srgbClr val="2B2B28"/>
                 </a:solidFill>
                 <a:latin typeface="Helvetica Neue"/>
                 <a:ea typeface="Helvetica Neue"/>
@@ -7955,7 +7955,7 @@
             <a:r>
               <a:rPr sz="1950" b="0">
                 <a:solidFill>
-                  <a:srgbClr val="142033"/>
+                  <a:srgbClr val="2B2B28"/>
                 </a:solidFill>
                 <a:latin typeface="Helvetica Neue"/>
                 <a:ea typeface="Helvetica Neue"/>
@@ -7968,7 +7968,7 @@
             <a:pPr algn="l">
               <a:defRPr sz="1950" b="0">
                 <a:solidFill>
-                  <a:srgbClr val="142033"/>
+                  <a:srgbClr val="2B2B28"/>
                 </a:solidFill>
                 <a:latin typeface="Helvetica Neue"/>
                 <a:ea typeface="Helvetica Neue"/>
@@ -7978,7 +7978,7 @@
             <a:r>
               <a:rPr sz="1950" b="0">
                 <a:solidFill>
-                  <a:srgbClr val="142033"/>
+                  <a:srgbClr val="2B2B28"/>
                 </a:solidFill>
                 <a:latin typeface="Helvetica Neue"/>
                 <a:ea typeface="Helvetica Neue"/>
@@ -8012,17 +8012,17 @@
             <a:avLst/>
           </a:prstGeom>
           <a:solidFill xmlns:a="http://schemas.openxmlformats.org/drawingml/2006/main">
-            <a:srgbClr val="FFFFFF"/>
+            <a:srgbClr val="FFFEFB"/>
           </a:solidFill>
           <a:ln xmlns:a="http://schemas.openxmlformats.org/drawingml/2006/main" w="19050">
             <a:solidFill>
-              <a:srgbClr val="142033"/>
+              <a:srgbClr val="2B2B28"/>
             </a:solidFill>
             <a:prstDash val="solid"/>
           </a:ln>
           <ns7:effectLst xmlns:ns7="http://schemas.openxmlformats.org/drawingml/2006/main">
             <ns7:outerShdw blurRad="57150" dist="42597" dir="3806097" sx="100000" sy="100000" kx="0" ky="0" algn="ctr" rotWithShape="0">
-              <ns7:srgbClr val="142033">
+              <ns7:srgbClr val="2B2B28">
                 <ns7:alpha val="18000"/>
               </ns7:srgbClr>
             </ns7:outerShdw>
@@ -8058,7 +8058,7 @@
             <a:avLst/>
           </a:prstGeom>
           <a:solidFill xmlns:a="http://schemas.openxmlformats.org/drawingml/2006/main">
-            <a:srgbClr val="E8F4EE"/>
+            <a:srgbClr val="EDF1E8"/>
           </a:solidFill>
           <a:ln xmlns:a="http://schemas.openxmlformats.org/drawingml/2006/main" w="0">
             <a:noFill/>
@@ -8102,7 +8102,7 @@
             <a:defPPr algn="ctr">
               <a:defRPr sz="1875" b="1">
                 <a:solidFill>
-                  <a:srgbClr val="087C57"/>
+                  <a:srgbClr val="447A61"/>
                 </a:solidFill>
                 <a:latin typeface="Helvetica Neue"/>
                 <a:ea typeface="Helvetica Neue"/>
@@ -8112,7 +8112,7 @@
             <a:lvl1pPr algn="ctr">
               <a:defRPr sz="1875" b="1">
                 <a:solidFill>
-                  <a:srgbClr val="087C57"/>
+                  <a:srgbClr val="447A61"/>
                 </a:solidFill>
                 <a:latin typeface="Helvetica Neue"/>
                 <a:ea typeface="Helvetica Neue"/>
@@ -8122,7 +8122,7 @@
             <a:lvl2pPr algn="ctr">
               <a:defRPr sz="1875" b="1">
                 <a:solidFill>
-                  <a:srgbClr val="087C57"/>
+                  <a:srgbClr val="447A61"/>
                 </a:solidFill>
                 <a:latin typeface="Helvetica Neue"/>
                 <a:ea typeface="Helvetica Neue"/>
@@ -8132,7 +8132,7 @@
             <a:lvl3pPr algn="ctr">
               <a:defRPr sz="1875" b="1">
                 <a:solidFill>
-                  <a:srgbClr val="087C57"/>
+                  <a:srgbClr val="447A61"/>
                 </a:solidFill>
                 <a:latin typeface="Helvetica Neue"/>
                 <a:ea typeface="Helvetica Neue"/>
@@ -8142,7 +8142,7 @@
             <a:lvl4pPr algn="ctr">
               <a:defRPr sz="1875" b="1">
                 <a:solidFill>
-                  <a:srgbClr val="087C57"/>
+                  <a:srgbClr val="447A61"/>
                 </a:solidFill>
                 <a:latin typeface="Helvetica Neue"/>
                 <a:ea typeface="Helvetica Neue"/>
@@ -8152,7 +8152,7 @@
             <a:lvl5pPr algn="ctr">
               <a:defRPr sz="1875" b="1">
                 <a:solidFill>
-                  <a:srgbClr val="087C57"/>
+                  <a:srgbClr val="447A61"/>
                 </a:solidFill>
                 <a:latin typeface="Helvetica Neue"/>
                 <a:ea typeface="Helvetica Neue"/>
@@ -8162,7 +8162,7 @@
             <a:lvl6pPr algn="ctr">
               <a:defRPr sz="1875" b="1">
                 <a:solidFill>
-                  <a:srgbClr val="087C57"/>
+                  <a:srgbClr val="447A61"/>
                 </a:solidFill>
                 <a:latin typeface="Helvetica Neue"/>
                 <a:ea typeface="Helvetica Neue"/>
@@ -8172,7 +8172,7 @@
             <a:lvl7pPr algn="ctr">
               <a:defRPr sz="1875" b="1">
                 <a:solidFill>
-                  <a:srgbClr val="087C57"/>
+                  <a:srgbClr val="447A61"/>
                 </a:solidFill>
                 <a:latin typeface="Helvetica Neue"/>
                 <a:ea typeface="Helvetica Neue"/>
@@ -8182,7 +8182,7 @@
             <a:lvl8pPr algn="ctr">
               <a:defRPr sz="1875" b="1">
                 <a:solidFill>
-                  <a:srgbClr val="087C57"/>
+                  <a:srgbClr val="447A61"/>
                 </a:solidFill>
                 <a:latin typeface="Helvetica Neue"/>
                 <a:ea typeface="Helvetica Neue"/>
@@ -8192,7 +8192,7 @@
             <a:lvl9pPr algn="ctr">
               <a:defRPr sz="1875" b="1">
                 <a:solidFill>
-                  <a:srgbClr val="087C57"/>
+                  <a:srgbClr val="447A61"/>
                 </a:solidFill>
                 <a:latin typeface="Helvetica Neue"/>
                 <a:ea typeface="Helvetica Neue"/>
@@ -8204,7 +8204,7 @@
             <a:pPr algn="ctr">
               <a:defRPr sz="1875" b="1">
                 <a:solidFill>
-                  <a:srgbClr val="087C57"/>
+                  <a:srgbClr val="447A61"/>
                 </a:solidFill>
                 <a:latin typeface="Helvetica Neue"/>
                 <a:ea typeface="Helvetica Neue"/>
@@ -8214,7 +8214,7 @@
             <a:r>
               <a:rPr sz="1875" b="1">
                 <a:solidFill>
-                  <a:srgbClr val="087C57"/>
+                  <a:srgbClr val="447A61"/>
                 </a:solidFill>
                 <a:latin typeface="Helvetica Neue"/>
                 <a:ea typeface="Helvetica Neue"/>
@@ -8261,7 +8261,7 @@
             <a:defPPr algn="l">
               <a:defRPr sz="2100" b="1">
                 <a:solidFill>
-                  <a:srgbClr val="142033"/>
+                  <a:srgbClr val="2B2B28"/>
                 </a:solidFill>
                 <a:latin typeface="Helvetica Neue"/>
                 <a:ea typeface="Helvetica Neue"/>
@@ -8271,7 +8271,7 @@
             <a:lvl1pPr algn="l">
               <a:defRPr sz="2100" b="1">
                 <a:solidFill>
-                  <a:srgbClr val="142033"/>
+                  <a:srgbClr val="2B2B28"/>
                 </a:solidFill>
                 <a:latin typeface="Helvetica Neue"/>
                 <a:ea typeface="Helvetica Neue"/>
@@ -8281,7 +8281,7 @@
             <a:lvl2pPr algn="l">
               <a:defRPr sz="2100" b="1">
                 <a:solidFill>
-                  <a:srgbClr val="142033"/>
+                  <a:srgbClr val="2B2B28"/>
                 </a:solidFill>
                 <a:latin typeface="Helvetica Neue"/>
                 <a:ea typeface="Helvetica Neue"/>
@@ -8291,7 +8291,7 @@
             <a:lvl3pPr algn="l">
               <a:defRPr sz="2100" b="1">
                 <a:solidFill>
-                  <a:srgbClr val="142033"/>
+                  <a:srgbClr val="2B2B28"/>
                 </a:solidFill>
                 <a:latin typeface="Helvetica Neue"/>
                 <a:ea typeface="Helvetica Neue"/>
@@ -8301,7 +8301,7 @@
             <a:lvl4pPr algn="l">
               <a:defRPr sz="2100" b="1">
                 <a:solidFill>
-                  <a:srgbClr val="142033"/>
+                  <a:srgbClr val="2B2B28"/>
                 </a:solidFill>
                 <a:latin typeface="Helvetica Neue"/>
                 <a:ea typeface="Helvetica Neue"/>
@@ -8311,7 +8311,7 @@
             <a:lvl5pPr algn="l">
               <a:defRPr sz="2100" b="1">
                 <a:solidFill>
-                  <a:srgbClr val="142033"/>
+                  <a:srgbClr val="2B2B28"/>
                 </a:solidFill>
                 <a:latin typeface="Helvetica Neue"/>
                 <a:ea typeface="Helvetica Neue"/>
@@ -8321,7 +8321,7 @@
             <a:lvl6pPr algn="l">
               <a:defRPr sz="2100" b="1">
                 <a:solidFill>
-                  <a:srgbClr val="142033"/>
+                  <a:srgbClr val="2B2B28"/>
                 </a:solidFill>
                 <a:latin typeface="Helvetica Neue"/>
                 <a:ea typeface="Helvetica Neue"/>
@@ -8331,7 +8331,7 @@
             <a:lvl7pPr algn="l">
               <a:defRPr sz="2100" b="1">
                 <a:solidFill>
-                  <a:srgbClr val="142033"/>
+                  <a:srgbClr val="2B2B28"/>
                 </a:solidFill>
                 <a:latin typeface="Helvetica Neue"/>
                 <a:ea typeface="Helvetica Neue"/>
@@ -8341,7 +8341,7 @@
             <a:lvl8pPr algn="l">
               <a:defRPr sz="2100" b="1">
                 <a:solidFill>
-                  <a:srgbClr val="142033"/>
+                  <a:srgbClr val="2B2B28"/>
                 </a:solidFill>
                 <a:latin typeface="Helvetica Neue"/>
                 <a:ea typeface="Helvetica Neue"/>
@@ -8351,7 +8351,7 @@
             <a:lvl9pPr algn="l">
               <a:defRPr sz="2100" b="1">
                 <a:solidFill>
-                  <a:srgbClr val="142033"/>
+                  <a:srgbClr val="2B2B28"/>
                 </a:solidFill>
                 <a:latin typeface="Helvetica Neue"/>
                 <a:ea typeface="Helvetica Neue"/>
@@ -8363,7 +8363,7 @@
             <a:pPr algn="l">
               <a:defRPr sz="2100" b="1">
                 <a:solidFill>
-                  <a:srgbClr val="142033"/>
+                  <a:srgbClr val="2B2B28"/>
                 </a:solidFill>
                 <a:latin typeface="Helvetica Neue"/>
                 <a:ea typeface="Helvetica Neue"/>
@@ -8373,7 +8373,7 @@
             <a:r>
               <a:rPr sz="2100" b="1">
                 <a:solidFill>
-                  <a:srgbClr val="142033"/>
+                  <a:srgbClr val="2B2B28"/>
                 </a:solidFill>
                 <a:latin typeface="Helvetica Neue"/>
                 <a:ea typeface="Helvetica Neue"/>
@@ -8420,7 +8420,7 @@
             <a:defPPr algn="l">
               <a:defRPr sz="1950" b="0">
                 <a:solidFill>
-                  <a:srgbClr val="142033"/>
+                  <a:srgbClr val="2B2B28"/>
                 </a:solidFill>
                 <a:latin typeface="Helvetica Neue"/>
                 <a:ea typeface="Helvetica Neue"/>
@@ -8430,7 +8430,7 @@
             <a:lvl1pPr algn="l">
               <a:defRPr sz="1950" b="0">
                 <a:solidFill>
-                  <a:srgbClr val="142033"/>
+                  <a:srgbClr val="2B2B28"/>
                 </a:solidFill>
                 <a:latin typeface="Helvetica Neue"/>
                 <a:ea typeface="Helvetica Neue"/>
@@ -8440,7 +8440,7 @@
             <a:lvl2pPr algn="l">
               <a:defRPr sz="1950" b="0">
                 <a:solidFill>
-                  <a:srgbClr val="142033"/>
+                  <a:srgbClr val="2B2B28"/>
                 </a:solidFill>
                 <a:latin typeface="Helvetica Neue"/>
                 <a:ea typeface="Helvetica Neue"/>
@@ -8450,7 +8450,7 @@
             <a:lvl3pPr algn="l">
               <a:defRPr sz="1950" b="0">
                 <a:solidFill>
-                  <a:srgbClr val="142033"/>
+                  <a:srgbClr val="2B2B28"/>
                 </a:solidFill>
                 <a:latin typeface="Helvetica Neue"/>
                 <a:ea typeface="Helvetica Neue"/>
@@ -8460,7 +8460,7 @@
             <a:lvl4pPr algn="l">
               <a:defRPr sz="1950" b="0">
                 <a:solidFill>
-                  <a:srgbClr val="142033"/>
+                  <a:srgbClr val="2B2B28"/>
                 </a:solidFill>
                 <a:latin typeface="Helvetica Neue"/>
                 <a:ea typeface="Helvetica Neue"/>
@@ -8470,7 +8470,7 @@
             <a:lvl5pPr algn="l">
               <a:defRPr sz="1950" b="0">
                 <a:solidFill>
-                  <a:srgbClr val="142033"/>
+                  <a:srgbClr val="2B2B28"/>
                 </a:solidFill>
                 <a:latin typeface="Helvetica Neue"/>
                 <a:ea typeface="Helvetica Neue"/>
@@ -8480,7 +8480,7 @@
             <a:lvl6pPr algn="l">
               <a:defRPr sz="1950" b="0">
                 <a:solidFill>
-                  <a:srgbClr val="142033"/>
+                  <a:srgbClr val="2B2B28"/>
                 </a:solidFill>
                 <a:latin typeface="Helvetica Neue"/>
                 <a:ea typeface="Helvetica Neue"/>
@@ -8490,7 +8490,7 @@
             <a:lvl7pPr algn="l">
               <a:defRPr sz="1950" b="0">
                 <a:solidFill>
-                  <a:srgbClr val="142033"/>
+                  <a:srgbClr val="2B2B28"/>
                 </a:solidFill>
                 <a:latin typeface="Helvetica Neue"/>
                 <a:ea typeface="Helvetica Neue"/>
@@ -8500,7 +8500,7 @@
             <a:lvl8pPr algn="l">
               <a:defRPr sz="1950" b="0">
                 <a:solidFill>
-                  <a:srgbClr val="142033"/>
+                  <a:srgbClr val="2B2B28"/>
                 </a:solidFill>
                 <a:latin typeface="Helvetica Neue"/>
                 <a:ea typeface="Helvetica Neue"/>
@@ -8510,7 +8510,7 @@
             <a:lvl9pPr algn="l">
               <a:defRPr sz="1950" b="0">
                 <a:solidFill>
-                  <a:srgbClr val="142033"/>
+                  <a:srgbClr val="2B2B28"/>
                 </a:solidFill>
                 <a:latin typeface="Helvetica Neue"/>
                 <a:ea typeface="Helvetica Neue"/>
@@ -8522,7 +8522,7 @@
             <a:pPr algn="l">
               <a:defRPr sz="1950" b="0">
                 <a:solidFill>
-                  <a:srgbClr val="142033"/>
+                  <a:srgbClr val="2B2B28"/>
                 </a:solidFill>
                 <a:latin typeface="Helvetica Neue"/>
                 <a:ea typeface="Helvetica Neue"/>
@@ -8532,7 +8532,7 @@
             <a:r>
               <a:rPr sz="1950" b="0">
                 <a:solidFill>
-                  <a:srgbClr val="142033"/>
+                  <a:srgbClr val="2B2B28"/>
                 </a:solidFill>
                 <a:latin typeface="Helvetica Neue"/>
                 <a:ea typeface="Helvetica Neue"/>
@@ -8545,7 +8545,7 @@
             <a:pPr algn="l">
               <a:defRPr sz="1950" b="0">
                 <a:solidFill>
-                  <a:srgbClr val="142033"/>
+                  <a:srgbClr val="2B2B28"/>
                 </a:solidFill>
                 <a:latin typeface="Helvetica Neue"/>
                 <a:ea typeface="Helvetica Neue"/>
@@ -8555,7 +8555,7 @@
             <a:r>
               <a:rPr sz="1950" b="0">
                 <a:solidFill>
-                  <a:srgbClr val="142033"/>
+                  <a:srgbClr val="2B2B28"/>
                 </a:solidFill>
                 <a:latin typeface="Helvetica Neue"/>
                 <a:ea typeface="Helvetica Neue"/>
@@ -8588,7 +8588,7 @@
           </a:prstGeom>
           <a:ln xmlns:a="http://schemas.openxmlformats.org/drawingml/2006/main" w="9525">
             <a:solidFill>
-              <a:srgbClr val="D8DBE1"/>
+              <a:srgbClr val="D6D1C8"/>
             </a:solidFill>
             <a:prstDash val="solid"/>
             <a:tailEnd type="none" w="med" len="med"/>
@@ -8631,7 +8631,7 @@
             <a:defPPr algn="l">
               <a:defRPr sz="1950" b="0">
                 <a:solidFill>
-                  <a:srgbClr val="142033"/>
+                  <a:srgbClr val="2B2B28"/>
                 </a:solidFill>
                 <a:latin typeface="Helvetica Neue"/>
                 <a:ea typeface="Helvetica Neue"/>
@@ -8641,7 +8641,7 @@
             <a:lvl1pPr algn="l">
               <a:defRPr sz="1950" b="0">
                 <a:solidFill>
-                  <a:srgbClr val="142033"/>
+                  <a:srgbClr val="2B2B28"/>
                 </a:solidFill>
                 <a:latin typeface="Helvetica Neue"/>
                 <a:ea typeface="Helvetica Neue"/>
@@ -8651,7 +8651,7 @@
             <a:lvl2pPr algn="l">
               <a:defRPr sz="1950" b="0">
                 <a:solidFill>
-                  <a:srgbClr val="142033"/>
+                  <a:srgbClr val="2B2B28"/>
                 </a:solidFill>
                 <a:latin typeface="Helvetica Neue"/>
                 <a:ea typeface="Helvetica Neue"/>
@@ -8661,7 +8661,7 @@
             <a:lvl3pPr algn="l">
               <a:defRPr sz="1950" b="0">
                 <a:solidFill>
-                  <a:srgbClr val="142033"/>
+                  <a:srgbClr val="2B2B28"/>
                 </a:solidFill>
                 <a:latin typeface="Helvetica Neue"/>
                 <a:ea typeface="Helvetica Neue"/>
@@ -8671,7 +8671,7 @@
             <a:lvl4pPr algn="l">
               <a:defRPr sz="1950" b="0">
                 <a:solidFill>
-                  <a:srgbClr val="142033"/>
+                  <a:srgbClr val="2B2B28"/>
                 </a:solidFill>
                 <a:latin typeface="Helvetica Neue"/>
                 <a:ea typeface="Helvetica Neue"/>
@@ -8681,7 +8681,7 @@
             <a:lvl5pPr algn="l">
               <a:defRPr sz="1950" b="0">
                 <a:solidFill>
-                  <a:srgbClr val="142033"/>
+                  <a:srgbClr val="2B2B28"/>
                 </a:solidFill>
                 <a:latin typeface="Helvetica Neue"/>
                 <a:ea typeface="Helvetica Neue"/>
@@ -8691,7 +8691,7 @@
             <a:lvl6pPr algn="l">
               <a:defRPr sz="1950" b="0">
                 <a:solidFill>
-                  <a:srgbClr val="142033"/>
+                  <a:srgbClr val="2B2B28"/>
                 </a:solidFill>
                 <a:latin typeface="Helvetica Neue"/>
                 <a:ea typeface="Helvetica Neue"/>
@@ -8701,7 +8701,7 @@
             <a:lvl7pPr algn="l">
               <a:defRPr sz="1950" b="0">
                 <a:solidFill>
-                  <a:srgbClr val="142033"/>
+                  <a:srgbClr val="2B2B28"/>
                 </a:solidFill>
                 <a:latin typeface="Helvetica Neue"/>
                 <a:ea typeface="Helvetica Neue"/>
@@ -8711,7 +8711,7 @@
             <a:lvl8pPr algn="l">
               <a:defRPr sz="1950" b="0">
                 <a:solidFill>
-                  <a:srgbClr val="142033"/>
+                  <a:srgbClr val="2B2B28"/>
                 </a:solidFill>
                 <a:latin typeface="Helvetica Neue"/>
                 <a:ea typeface="Helvetica Neue"/>
@@ -8721,7 +8721,7 @@
             <a:lvl9pPr algn="l">
               <a:defRPr sz="1950" b="0">
                 <a:solidFill>
-                  <a:srgbClr val="142033"/>
+                  <a:srgbClr val="2B2B28"/>
                 </a:solidFill>
                 <a:latin typeface="Helvetica Neue"/>
                 <a:ea typeface="Helvetica Neue"/>
@@ -8733,7 +8733,7 @@
             <a:pPr algn="l">
               <a:defRPr sz="1950" b="0">
                 <a:solidFill>
-                  <a:srgbClr val="142033"/>
+                  <a:srgbClr val="2B2B28"/>
                 </a:solidFill>
                 <a:latin typeface="Helvetica Neue"/>
                 <a:ea typeface="Helvetica Neue"/>
@@ -8743,7 +8743,7 @@
             <a:r>
               <a:rPr sz="1950" b="0">
                 <a:solidFill>
-                  <a:srgbClr val="142033"/>
+                  <a:srgbClr val="2B2B28"/>
                 </a:solidFill>
                 <a:latin typeface="Helvetica Neue"/>
                 <a:ea typeface="Helvetica Neue"/>
@@ -8756,7 +8756,7 @@
             <a:pPr algn="l">
               <a:defRPr sz="1950" b="0">
                 <a:solidFill>
-                  <a:srgbClr val="142033"/>
+                  <a:srgbClr val="2B2B28"/>
                 </a:solidFill>
                 <a:latin typeface="Helvetica Neue"/>
                 <a:ea typeface="Helvetica Neue"/>
@@ -8766,7 +8766,7 @@
             <a:r>
               <a:rPr sz="1950" b="0">
                 <a:solidFill>
-                  <a:srgbClr val="142033"/>
+                  <a:srgbClr val="2B2B28"/>
                 </a:solidFill>
                 <a:latin typeface="Helvetica Neue"/>
                 <a:ea typeface="Helvetica Neue"/>
@@ -8800,17 +8800,17 @@
             <a:avLst/>
           </a:prstGeom>
           <a:solidFill xmlns:a="http://schemas.openxmlformats.org/drawingml/2006/main">
-            <a:srgbClr val="FFFFFF"/>
+            <a:srgbClr val="FFFEFB"/>
           </a:solidFill>
           <a:ln xmlns:a="http://schemas.openxmlformats.org/drawingml/2006/main" w="19050">
             <a:solidFill>
-              <a:srgbClr val="142033"/>
+              <a:srgbClr val="2B2B28"/>
             </a:solidFill>
             <a:prstDash val="solid"/>
           </a:ln>
           <ns8:effectLst xmlns:ns8="http://schemas.openxmlformats.org/drawingml/2006/main">
             <ns8:outerShdw blurRad="57150" dist="42597" dir="3806097" sx="100000" sy="100000" kx="0" ky="0" algn="ctr" rotWithShape="0">
-              <ns8:srgbClr val="142033">
+              <ns8:srgbClr val="2B2B28">
                 <ns8:alpha val="18000"/>
               </ns8:srgbClr>
             </ns8:outerShdw>
@@ -8846,7 +8846,7 @@
             <a:avLst/>
           </a:prstGeom>
           <a:solidFill xmlns:a="http://schemas.openxmlformats.org/drawingml/2006/main">
-            <a:srgbClr val="FFF3E2"/>
+            <a:srgbClr val="F4ECDD"/>
           </a:solidFill>
           <a:ln xmlns:a="http://schemas.openxmlformats.org/drawingml/2006/main" w="0">
             <a:noFill/>
@@ -8890,7 +8890,7 @@
             <a:defPPr algn="ctr">
               <a:defRPr sz="1875" b="1">
                 <a:solidFill>
-                  <a:srgbClr val="B66B08"/>
+                  <a:srgbClr val="99702F"/>
                 </a:solidFill>
                 <a:latin typeface="Helvetica Neue"/>
                 <a:ea typeface="Helvetica Neue"/>
@@ -8900,7 +8900,7 @@
             <a:lvl1pPr algn="ctr">
               <a:defRPr sz="1875" b="1">
                 <a:solidFill>
-                  <a:srgbClr val="B66B08"/>
+                  <a:srgbClr val="99702F"/>
                 </a:solidFill>
                 <a:latin typeface="Helvetica Neue"/>
                 <a:ea typeface="Helvetica Neue"/>
@@ -8910,7 +8910,7 @@
             <a:lvl2pPr algn="ctr">
               <a:defRPr sz="1875" b="1">
                 <a:solidFill>
-                  <a:srgbClr val="B66B08"/>
+                  <a:srgbClr val="99702F"/>
                 </a:solidFill>
                 <a:latin typeface="Helvetica Neue"/>
                 <a:ea typeface="Helvetica Neue"/>
@@ -8920,7 +8920,7 @@
             <a:lvl3pPr algn="ctr">
               <a:defRPr sz="1875" b="1">
                 <a:solidFill>
-                  <a:srgbClr val="B66B08"/>
+                  <a:srgbClr val="99702F"/>
                 </a:solidFill>
                 <a:latin typeface="Helvetica Neue"/>
                 <a:ea typeface="Helvetica Neue"/>
@@ -8930,7 +8930,7 @@
             <a:lvl4pPr algn="ctr">
               <a:defRPr sz="1875" b="1">
                 <a:solidFill>
-                  <a:srgbClr val="B66B08"/>
+                  <a:srgbClr val="99702F"/>
                 </a:solidFill>
                 <a:latin typeface="Helvetica Neue"/>
                 <a:ea typeface="Helvetica Neue"/>
@@ -8940,7 +8940,7 @@
             <a:lvl5pPr algn="ctr">
               <a:defRPr sz="1875" b="1">
                 <a:solidFill>
-                  <a:srgbClr val="B66B08"/>
+                  <a:srgbClr val="99702F"/>
                 </a:solidFill>
                 <a:latin typeface="Helvetica Neue"/>
                 <a:ea typeface="Helvetica Neue"/>
@@ -8950,7 +8950,7 @@
             <a:lvl6pPr algn="ctr">
               <a:defRPr sz="1875" b="1">
                 <a:solidFill>
-                  <a:srgbClr val="B66B08"/>
+                  <a:srgbClr val="99702F"/>
                 </a:solidFill>
                 <a:latin typeface="Helvetica Neue"/>
                 <a:ea typeface="Helvetica Neue"/>
@@ -8960,7 +8960,7 @@
             <a:lvl7pPr algn="ctr">
               <a:defRPr sz="1875" b="1">
                 <a:solidFill>
-                  <a:srgbClr val="B66B08"/>
+                  <a:srgbClr val="99702F"/>
                 </a:solidFill>
                 <a:latin typeface="Helvetica Neue"/>
                 <a:ea typeface="Helvetica Neue"/>
@@ -8970,7 +8970,7 @@
             <a:lvl8pPr algn="ctr">
               <a:defRPr sz="1875" b="1">
                 <a:solidFill>
-                  <a:srgbClr val="B66B08"/>
+                  <a:srgbClr val="99702F"/>
                 </a:solidFill>
                 <a:latin typeface="Helvetica Neue"/>
                 <a:ea typeface="Helvetica Neue"/>
@@ -8980,7 +8980,7 @@
             <a:lvl9pPr algn="ctr">
               <a:defRPr sz="1875" b="1">
                 <a:solidFill>
-                  <a:srgbClr val="B66B08"/>
+                  <a:srgbClr val="99702F"/>
                 </a:solidFill>
                 <a:latin typeface="Helvetica Neue"/>
                 <a:ea typeface="Helvetica Neue"/>
@@ -8992,7 +8992,7 @@
             <a:pPr algn="ctr">
               <a:defRPr sz="1875" b="1">
                 <a:solidFill>
-                  <a:srgbClr val="B66B08"/>
+                  <a:srgbClr val="99702F"/>
                 </a:solidFill>
                 <a:latin typeface="Helvetica Neue"/>
                 <a:ea typeface="Helvetica Neue"/>
@@ -9002,7 +9002,7 @@
             <a:r>
               <a:rPr sz="1875" b="1">
                 <a:solidFill>
-                  <a:srgbClr val="B66B08"/>
+                  <a:srgbClr val="99702F"/>
                 </a:solidFill>
                 <a:latin typeface="Helvetica Neue"/>
                 <a:ea typeface="Helvetica Neue"/>
@@ -9049,7 +9049,7 @@
             <a:defPPr algn="l">
               <a:defRPr sz="2100" b="1">
                 <a:solidFill>
-                  <a:srgbClr val="142033"/>
+                  <a:srgbClr val="2B2B28"/>
                 </a:solidFill>
                 <a:latin typeface="Helvetica Neue"/>
                 <a:ea typeface="Helvetica Neue"/>
@@ -9059,7 +9059,7 @@
             <a:lvl1pPr algn="l">
               <a:defRPr sz="2100" b="1">
                 <a:solidFill>
-                  <a:srgbClr val="142033"/>
+                  <a:srgbClr val="2B2B28"/>
                 </a:solidFill>
                 <a:latin typeface="Helvetica Neue"/>
                 <a:ea typeface="Helvetica Neue"/>
@@ -9069,7 +9069,7 @@
             <a:lvl2pPr algn="l">
               <a:defRPr sz="2100" b="1">
                 <a:solidFill>
-                  <a:srgbClr val="142033"/>
+                  <a:srgbClr val="2B2B28"/>
                 </a:solidFill>
                 <a:latin typeface="Helvetica Neue"/>
                 <a:ea typeface="Helvetica Neue"/>
@@ -9079,7 +9079,7 @@
             <a:lvl3pPr algn="l">
               <a:defRPr sz="2100" b="1">
                 <a:solidFill>
-                  <a:srgbClr val="142033"/>
+                  <a:srgbClr val="2B2B28"/>
                 </a:solidFill>
                 <a:latin typeface="Helvetica Neue"/>
                 <a:ea typeface="Helvetica Neue"/>
@@ -9089,7 +9089,7 @@
             <a:lvl4pPr algn="l">
               <a:defRPr sz="2100" b="1">
                 <a:solidFill>
-                  <a:srgbClr val="142033"/>
+                  <a:srgbClr val="2B2B28"/>
                 </a:solidFill>
                 <a:latin typeface="Helvetica Neue"/>
                 <a:ea typeface="Helvetica Neue"/>
@@ -9099,7 +9099,7 @@
             <a:lvl5pPr algn="l">
               <a:defRPr sz="2100" b="1">
                 <a:solidFill>
-                  <a:srgbClr val="142033"/>
+                  <a:srgbClr val="2B2B28"/>
                 </a:solidFill>
                 <a:latin typeface="Helvetica Neue"/>
                 <a:ea typeface="Helvetica Neue"/>
@@ -9109,7 +9109,7 @@
             <a:lvl6pPr algn="l">
               <a:defRPr sz="2100" b="1">
                 <a:solidFill>
-                  <a:srgbClr val="142033"/>
+                  <a:srgbClr val="2B2B28"/>
                 </a:solidFill>
                 <a:latin typeface="Helvetica Neue"/>
                 <a:ea typeface="Helvetica Neue"/>
@@ -9119,7 +9119,7 @@
             <a:lvl7pPr algn="l">
               <a:defRPr sz="2100" b="1">
                 <a:solidFill>
-                  <a:srgbClr val="142033"/>
+                  <a:srgbClr val="2B2B28"/>
                 </a:solidFill>
                 <a:latin typeface="Helvetica Neue"/>
                 <a:ea typeface="Helvetica Neue"/>
@@ -9129,7 +9129,7 @@
             <a:lvl8pPr algn="l">
               <a:defRPr sz="2100" b="1">
                 <a:solidFill>
-                  <a:srgbClr val="142033"/>
+                  <a:srgbClr val="2B2B28"/>
                 </a:solidFill>
                 <a:latin typeface="Helvetica Neue"/>
                 <a:ea typeface="Helvetica Neue"/>
@@ -9139,7 +9139,7 @@
             <a:lvl9pPr algn="l">
               <a:defRPr sz="2100" b="1">
                 <a:solidFill>
-                  <a:srgbClr val="142033"/>
+                  <a:srgbClr val="2B2B28"/>
                 </a:solidFill>
                 <a:latin typeface="Helvetica Neue"/>
                 <a:ea typeface="Helvetica Neue"/>
@@ -9151,7 +9151,7 @@
             <a:pPr algn="l">
               <a:defRPr sz="2100" b="1">
                 <a:solidFill>
-                  <a:srgbClr val="142033"/>
+                  <a:srgbClr val="2B2B28"/>
                 </a:solidFill>
                 <a:latin typeface="Helvetica Neue"/>
                 <a:ea typeface="Helvetica Neue"/>
@@ -9161,7 +9161,7 @@
             <a:r>
               <a:rPr sz="2100" b="1">
                 <a:solidFill>
-                  <a:srgbClr val="142033"/>
+                  <a:srgbClr val="2B2B28"/>
                 </a:solidFill>
                 <a:latin typeface="Helvetica Neue"/>
                 <a:ea typeface="Helvetica Neue"/>
@@ -9208,7 +9208,7 @@
             <a:defPPr algn="l">
               <a:defRPr sz="1950" b="0">
                 <a:solidFill>
-                  <a:srgbClr val="142033"/>
+                  <a:srgbClr val="2B2B28"/>
                 </a:solidFill>
                 <a:latin typeface="Helvetica Neue"/>
                 <a:ea typeface="Helvetica Neue"/>
@@ -9218,7 +9218,7 @@
             <a:lvl1pPr algn="l">
               <a:defRPr sz="1950" b="0">
                 <a:solidFill>
-                  <a:srgbClr val="142033"/>
+                  <a:srgbClr val="2B2B28"/>
                 </a:solidFill>
                 <a:latin typeface="Helvetica Neue"/>
                 <a:ea typeface="Helvetica Neue"/>
@@ -9228,7 +9228,7 @@
             <a:lvl2pPr algn="l">
               <a:defRPr sz="1950" b="0">
                 <a:solidFill>
-                  <a:srgbClr val="142033"/>
+                  <a:srgbClr val="2B2B28"/>
                 </a:solidFill>
                 <a:latin typeface="Helvetica Neue"/>
                 <a:ea typeface="Helvetica Neue"/>
@@ -9238,7 +9238,7 @@
             <a:lvl3pPr algn="l">
               <a:defRPr sz="1950" b="0">
                 <a:solidFill>
-                  <a:srgbClr val="142033"/>
+                  <a:srgbClr val="2B2B28"/>
                 </a:solidFill>
                 <a:latin typeface="Helvetica Neue"/>
                 <a:ea typeface="Helvetica Neue"/>
@@ -9248,7 +9248,7 @@
             <a:lvl4pPr algn="l">
               <a:defRPr sz="1950" b="0">
                 <a:solidFill>
-                  <a:srgbClr val="142033"/>
+                  <a:srgbClr val="2B2B28"/>
                 </a:solidFill>
                 <a:latin typeface="Helvetica Neue"/>
                 <a:ea typeface="Helvetica Neue"/>
@@ -9258,7 +9258,7 @@
             <a:lvl5pPr algn="l">
               <a:defRPr sz="1950" b="0">
                 <a:solidFill>
-                  <a:srgbClr val="142033"/>
+                  <a:srgbClr val="2B2B28"/>
                 </a:solidFill>
                 <a:latin typeface="Helvetica Neue"/>
                 <a:ea typeface="Helvetica Neue"/>
@@ -9268,7 +9268,7 @@
             <a:lvl6pPr algn="l">
               <a:defRPr sz="1950" b="0">
                 <a:solidFill>
-                  <a:srgbClr val="142033"/>
+                  <a:srgbClr val="2B2B28"/>
                 </a:solidFill>
                 <a:latin typeface="Helvetica Neue"/>
                 <a:ea typeface="Helvetica Neue"/>
@@ -9278,7 +9278,7 @@
             <a:lvl7pPr algn="l">
               <a:defRPr sz="1950" b="0">
                 <a:solidFill>
-                  <a:srgbClr val="142033"/>
+                  <a:srgbClr val="2B2B28"/>
                 </a:solidFill>
                 <a:latin typeface="Helvetica Neue"/>
                 <a:ea typeface="Helvetica Neue"/>
@@ -9288,7 +9288,7 @@
             <a:lvl8pPr algn="l">
               <a:defRPr sz="1950" b="0">
                 <a:solidFill>
-                  <a:srgbClr val="142033"/>
+                  <a:srgbClr val="2B2B28"/>
                 </a:solidFill>
                 <a:latin typeface="Helvetica Neue"/>
                 <a:ea typeface="Helvetica Neue"/>
@@ -9298,7 +9298,7 @@
             <a:lvl9pPr algn="l">
               <a:defRPr sz="1950" b="0">
                 <a:solidFill>
-                  <a:srgbClr val="142033"/>
+                  <a:srgbClr val="2B2B28"/>
                 </a:solidFill>
                 <a:latin typeface="Helvetica Neue"/>
                 <a:ea typeface="Helvetica Neue"/>
@@ -9310,7 +9310,7 @@
             <a:pPr algn="l">
               <a:defRPr sz="1950" b="0">
                 <a:solidFill>
-                  <a:srgbClr val="142033"/>
+                  <a:srgbClr val="2B2B28"/>
                 </a:solidFill>
                 <a:latin typeface="Helvetica Neue"/>
                 <a:ea typeface="Helvetica Neue"/>
@@ -9320,7 +9320,7 @@
             <a:r>
               <a:rPr sz="1950" b="0">
                 <a:solidFill>
-                  <a:srgbClr val="142033"/>
+                  <a:srgbClr val="2B2B28"/>
                 </a:solidFill>
                 <a:latin typeface="Helvetica Neue"/>
                 <a:ea typeface="Helvetica Neue"/>
@@ -9333,7 +9333,7 @@
             <a:pPr algn="l">
               <a:defRPr sz="1950" b="0">
                 <a:solidFill>
-                  <a:srgbClr val="142033"/>
+                  <a:srgbClr val="2B2B28"/>
                 </a:solidFill>
                 <a:latin typeface="Helvetica Neue"/>
                 <a:ea typeface="Helvetica Neue"/>
@@ -9343,7 +9343,7 @@
             <a:r>
               <a:rPr sz="1950" b="0">
                 <a:solidFill>
-                  <a:srgbClr val="142033"/>
+                  <a:srgbClr val="2B2B28"/>
                 </a:solidFill>
                 <a:latin typeface="Helvetica Neue"/>
                 <a:ea typeface="Helvetica Neue"/>
@@ -9376,7 +9376,7 @@
           </a:prstGeom>
           <a:ln xmlns:a="http://schemas.openxmlformats.org/drawingml/2006/main" w="9525">
             <a:solidFill>
-              <a:srgbClr val="D8DBE1"/>
+              <a:srgbClr val="D6D1C8"/>
             </a:solidFill>
             <a:prstDash val="solid"/>
             <a:tailEnd type="none" w="med" len="med"/>
@@ -9419,7 +9419,7 @@
             <a:defPPr algn="l">
               <a:defRPr sz="1950" b="0">
                 <a:solidFill>
-                  <a:srgbClr val="142033"/>
+                  <a:srgbClr val="2B2B28"/>
                 </a:solidFill>
                 <a:latin typeface="Helvetica Neue"/>
                 <a:ea typeface="Helvetica Neue"/>
@@ -9429,7 +9429,7 @@
             <a:lvl1pPr algn="l">
               <a:defRPr sz="1950" b="0">
                 <a:solidFill>
-                  <a:srgbClr val="142033"/>
+                  <a:srgbClr val="2B2B28"/>
                 </a:solidFill>
                 <a:latin typeface="Helvetica Neue"/>
                 <a:ea typeface="Helvetica Neue"/>
@@ -9439,7 +9439,7 @@
             <a:lvl2pPr algn="l">
               <a:defRPr sz="1950" b="0">
                 <a:solidFill>
-                  <a:srgbClr val="142033"/>
+                  <a:srgbClr val="2B2B28"/>
                 </a:solidFill>
                 <a:latin typeface="Helvetica Neue"/>
                 <a:ea typeface="Helvetica Neue"/>
@@ -9449,7 +9449,7 @@
             <a:lvl3pPr algn="l">
               <a:defRPr sz="1950" b="0">
                 <a:solidFill>
-                  <a:srgbClr val="142033"/>
+                  <a:srgbClr val="2B2B28"/>
                 </a:solidFill>
                 <a:latin typeface="Helvetica Neue"/>
                 <a:ea typeface="Helvetica Neue"/>
@@ -9459,7 +9459,7 @@
             <a:lvl4pPr algn="l">
               <a:defRPr sz="1950" b="0">
                 <a:solidFill>
-                  <a:srgbClr val="142033"/>
+                  <a:srgbClr val="2B2B28"/>
                 </a:solidFill>
                 <a:latin typeface="Helvetica Neue"/>
                 <a:ea typeface="Helvetica Neue"/>
@@ -9469,7 +9469,7 @@
             <a:lvl5pPr algn="l">
               <a:defRPr sz="1950" b="0">
                 <a:solidFill>
-                  <a:srgbClr val="142033"/>
+                  <a:srgbClr val="2B2B28"/>
                 </a:solidFill>
                 <a:latin typeface="Helvetica Neue"/>
                 <a:ea typeface="Helvetica Neue"/>
@@ -9479,7 +9479,7 @@
             <a:lvl6pPr algn="l">
               <a:defRPr sz="1950" b="0">
                 <a:solidFill>
-                  <a:srgbClr val="142033"/>
+                  <a:srgbClr val="2B2B28"/>
                 </a:solidFill>
                 <a:latin typeface="Helvetica Neue"/>
                 <a:ea typeface="Helvetica Neue"/>
@@ -9489,7 +9489,7 @@
             <a:lvl7pPr algn="l">
               <a:defRPr sz="1950" b="0">
                 <a:solidFill>
-                  <a:srgbClr val="142033"/>
+                  <a:srgbClr val="2B2B28"/>
                 </a:solidFill>
                 <a:latin typeface="Helvetica Neue"/>
                 <a:ea typeface="Helvetica Neue"/>
@@ -9499,7 +9499,7 @@
             <a:lvl8pPr algn="l">
               <a:defRPr sz="1950" b="0">
                 <a:solidFill>
-                  <a:srgbClr val="142033"/>
+                  <a:srgbClr val="2B2B28"/>
                 </a:solidFill>
                 <a:latin typeface="Helvetica Neue"/>
                 <a:ea typeface="Helvetica Neue"/>
@@ -9509,7 +9509,7 @@
             <a:lvl9pPr algn="l">
               <a:defRPr sz="1950" b="0">
                 <a:solidFill>
-                  <a:srgbClr val="142033"/>
+                  <a:srgbClr val="2B2B28"/>
                 </a:solidFill>
                 <a:latin typeface="Helvetica Neue"/>
                 <a:ea typeface="Helvetica Neue"/>
@@ -9521,7 +9521,7 @@
             <a:pPr algn="l">
               <a:defRPr sz="1950" b="0">
                 <a:solidFill>
-                  <a:srgbClr val="142033"/>
+                  <a:srgbClr val="2B2B28"/>
                 </a:solidFill>
                 <a:latin typeface="Helvetica Neue"/>
                 <a:ea typeface="Helvetica Neue"/>
@@ -9531,7 +9531,7 @@
             <a:r>
               <a:rPr sz="1950" b="0">
                 <a:solidFill>
-                  <a:srgbClr val="142033"/>
+                  <a:srgbClr val="2B2B28"/>
                 </a:solidFill>
                 <a:latin typeface="Helvetica Neue"/>
                 <a:ea typeface="Helvetica Neue"/>
@@ -9544,7 +9544,7 @@
             <a:pPr algn="l">
               <a:defRPr sz="1950" b="0">
                 <a:solidFill>
-                  <a:srgbClr val="142033"/>
+                  <a:srgbClr val="2B2B28"/>
                 </a:solidFill>
                 <a:latin typeface="Helvetica Neue"/>
                 <a:ea typeface="Helvetica Neue"/>
@@ -9554,7 +9554,7 @@
             <a:r>
               <a:rPr sz="1950" b="0">
                 <a:solidFill>
-                  <a:srgbClr val="142033"/>
+                  <a:srgbClr val="2B2B28"/>
                 </a:solidFill>
                 <a:latin typeface="Helvetica Neue"/>
                 <a:ea typeface="Helvetica Neue"/>
@@ -9588,17 +9588,17 @@
             <a:avLst/>
           </a:prstGeom>
           <a:solidFill xmlns:a="http://schemas.openxmlformats.org/drawingml/2006/main">
-            <a:srgbClr val="FFFFFF"/>
+            <a:srgbClr val="FFFEFB"/>
           </a:solidFill>
           <a:ln xmlns:a="http://schemas.openxmlformats.org/drawingml/2006/main" w="19050">
             <a:solidFill>
-              <a:srgbClr val="142033"/>
+              <a:srgbClr val="2B2B28"/>
             </a:solidFill>
             <a:prstDash val="solid"/>
           </a:ln>
           <ns9:effectLst xmlns:ns9="http://schemas.openxmlformats.org/drawingml/2006/main">
             <ns9:outerShdw blurRad="57150" dist="42597" dir="3806097" sx="100000" sy="100000" kx="0" ky="0" algn="ctr" rotWithShape="0">
-              <ns9:srgbClr val="142033">
+              <ns9:srgbClr val="2B2B28">
                 <ns9:alpha val="18000"/>
               </ns9:srgbClr>
             </ns9:outerShdw>
@@ -9634,7 +9634,7 @@
             <a:avLst/>
           </a:prstGeom>
           <a:solidFill xmlns:a="http://schemas.openxmlformats.org/drawingml/2006/main">
-            <a:srgbClr val="FBECEE"/>
+            <a:srgbClr val="F6E7E1"/>
           </a:solidFill>
           <a:ln xmlns:a="http://schemas.openxmlformats.org/drawingml/2006/main" w="0">
             <a:noFill/>
@@ -9678,7 +9678,7 @@
             <a:defPPr algn="ctr">
               <a:defRPr sz="1875" b="1">
                 <a:solidFill>
-                  <a:srgbClr val="C53343"/>
+                  <a:srgbClr val="B44F45"/>
                 </a:solidFill>
                 <a:latin typeface="Helvetica Neue"/>
                 <a:ea typeface="Helvetica Neue"/>
@@ -9688,7 +9688,7 @@
             <a:lvl1pPr algn="ctr">
               <a:defRPr sz="1875" b="1">
                 <a:solidFill>
-                  <a:srgbClr val="C53343"/>
+                  <a:srgbClr val="B44F45"/>
                 </a:solidFill>
                 <a:latin typeface="Helvetica Neue"/>
                 <a:ea typeface="Helvetica Neue"/>
@@ -9698,7 +9698,7 @@
             <a:lvl2pPr algn="ctr">
               <a:defRPr sz="1875" b="1">
                 <a:solidFill>
-                  <a:srgbClr val="C53343"/>
+                  <a:srgbClr val="B44F45"/>
                 </a:solidFill>
                 <a:latin typeface="Helvetica Neue"/>
                 <a:ea typeface="Helvetica Neue"/>
@@ -9708,7 +9708,7 @@
             <a:lvl3pPr algn="ctr">
               <a:defRPr sz="1875" b="1">
                 <a:solidFill>
-                  <a:srgbClr val="C53343"/>
+                  <a:srgbClr val="B44F45"/>
                 </a:solidFill>
                 <a:latin typeface="Helvetica Neue"/>
                 <a:ea typeface="Helvetica Neue"/>
@@ -9718,7 +9718,7 @@
             <a:lvl4pPr algn="ctr">
               <a:defRPr sz="1875" b="1">
                 <a:solidFill>
-                  <a:srgbClr val="C53343"/>
+                  <a:srgbClr val="B44F45"/>
                 </a:solidFill>
                 <a:latin typeface="Helvetica Neue"/>
                 <a:ea typeface="Helvetica Neue"/>
@@ -9728,7 +9728,7 @@
             <a:lvl5pPr algn="ctr">
               <a:defRPr sz="1875" b="1">
                 <a:solidFill>
-                  <a:srgbClr val="C53343"/>
+                  <a:srgbClr val="B44F45"/>
                 </a:solidFill>
                 <a:latin typeface="Helvetica Neue"/>
                 <a:ea typeface="Helvetica Neue"/>
@@ -9738,7 +9738,7 @@
             <a:lvl6pPr algn="ctr">
               <a:defRPr sz="1875" b="1">
                 <a:solidFill>
-                  <a:srgbClr val="C53343"/>
+                  <a:srgbClr val="B44F45"/>
                 </a:solidFill>
                 <a:latin typeface="Helvetica Neue"/>
                 <a:ea typeface="Helvetica Neue"/>
@@ -9748,7 +9748,7 @@
             <a:lvl7pPr algn="ctr">
               <a:defRPr sz="1875" b="1">
                 <a:solidFill>
-                  <a:srgbClr val="C53343"/>
+                  <a:srgbClr val="B44F45"/>
                 </a:solidFill>
                 <a:latin typeface="Helvetica Neue"/>
                 <a:ea typeface="Helvetica Neue"/>
@@ -9758,7 +9758,7 @@
             <a:lvl8pPr algn="ctr">
               <a:defRPr sz="1875" b="1">
                 <a:solidFill>
-                  <a:srgbClr val="C53343"/>
+                  <a:srgbClr val="B44F45"/>
                 </a:solidFill>
                 <a:latin typeface="Helvetica Neue"/>
                 <a:ea typeface="Helvetica Neue"/>
@@ -9768,7 +9768,7 @@
             <a:lvl9pPr algn="ctr">
               <a:defRPr sz="1875" b="1">
                 <a:solidFill>
-                  <a:srgbClr val="C53343"/>
+                  <a:srgbClr val="B44F45"/>
                 </a:solidFill>
                 <a:latin typeface="Helvetica Neue"/>
                 <a:ea typeface="Helvetica Neue"/>
@@ -9780,7 +9780,7 @@
             <a:pPr algn="ctr">
               <a:defRPr sz="1875" b="1">
                 <a:solidFill>
-                  <a:srgbClr val="C53343"/>
+                  <a:srgbClr val="B44F45"/>
                 </a:solidFill>
                 <a:latin typeface="Helvetica Neue"/>
                 <a:ea typeface="Helvetica Neue"/>
@@ -9790,7 +9790,7 @@
             <a:r>
               <a:rPr sz="1875" b="1">
                 <a:solidFill>
-                  <a:srgbClr val="C53343"/>
+                  <a:srgbClr val="B44F45"/>
                 </a:solidFill>
                 <a:latin typeface="Helvetica Neue"/>
                 <a:ea typeface="Helvetica Neue"/>
@@ -9837,7 +9837,7 @@
             <a:defPPr algn="l">
               <a:defRPr sz="2100" b="1">
                 <a:solidFill>
-                  <a:srgbClr val="142033"/>
+                  <a:srgbClr val="2B2B28"/>
                 </a:solidFill>
                 <a:latin typeface="Helvetica Neue"/>
                 <a:ea typeface="Helvetica Neue"/>
@@ -9847,7 +9847,7 @@
             <a:lvl1pPr algn="l">
               <a:defRPr sz="2100" b="1">
                 <a:solidFill>
-                  <a:srgbClr val="142033"/>
+                  <a:srgbClr val="2B2B28"/>
                 </a:solidFill>
                 <a:latin typeface="Helvetica Neue"/>
                 <a:ea typeface="Helvetica Neue"/>
@@ -9857,7 +9857,7 @@
             <a:lvl2pPr algn="l">
               <a:defRPr sz="2100" b="1">
                 <a:solidFill>
-                  <a:srgbClr val="142033"/>
+                  <a:srgbClr val="2B2B28"/>
                 </a:solidFill>
                 <a:latin typeface="Helvetica Neue"/>
                 <a:ea typeface="Helvetica Neue"/>
@@ -9867,7 +9867,7 @@
             <a:lvl3pPr algn="l">
               <a:defRPr sz="2100" b="1">
                 <a:solidFill>
-                  <a:srgbClr val="142033"/>
+                  <a:srgbClr val="2B2B28"/>
                 </a:solidFill>
                 <a:latin typeface="Helvetica Neue"/>
                 <a:ea typeface="Helvetica Neue"/>
@@ -9877,7 +9877,7 @@
             <a:lvl4pPr algn="l">
               <a:defRPr sz="2100" b="1">
                 <a:solidFill>
-                  <a:srgbClr val="142033"/>
+                  <a:srgbClr val="2B2B28"/>
                 </a:solidFill>
                 <a:latin typeface="Helvetica Neue"/>
                 <a:ea typeface="Helvetica Neue"/>
@@ -9887,7 +9887,7 @@
             <a:lvl5pPr algn="l">
               <a:defRPr sz="2100" b="1">
                 <a:solidFill>
-                  <a:srgbClr val="142033"/>
+                  <a:srgbClr val="2B2B28"/>
                 </a:solidFill>
                 <a:latin typeface="Helvetica Neue"/>
                 <a:ea typeface="Helvetica Neue"/>
@@ -9897,7 +9897,7 @@
             <a:lvl6pPr algn="l">
               <a:defRPr sz="2100" b="1">
                 <a:solidFill>
-                  <a:srgbClr val="142033"/>
+                  <a:srgbClr val="2B2B28"/>
                 </a:solidFill>
                 <a:latin typeface="Helvetica Neue"/>
                 <a:ea typeface="Helvetica Neue"/>
@@ -9907,7 +9907,7 @@
             <a:lvl7pPr algn="l">
               <a:defRPr sz="2100" b="1">
                 <a:solidFill>
-                  <a:srgbClr val="142033"/>
+                  <a:srgbClr val="2B2B28"/>
                 </a:solidFill>
                 <a:latin typeface="Helvetica Neue"/>
                 <a:ea typeface="Helvetica Neue"/>
@@ -9917,7 +9917,7 @@
             <a:lvl8pPr algn="l">
               <a:defRPr sz="2100" b="1">
                 <a:solidFill>
-                  <a:srgbClr val="142033"/>
+                  <a:srgbClr val="2B2B28"/>
                 </a:solidFill>
                 <a:latin typeface="Helvetica Neue"/>
                 <a:ea typeface="Helvetica Neue"/>
@@ -9927,7 +9927,7 @@
             <a:lvl9pPr algn="l">
               <a:defRPr sz="2100" b="1">
                 <a:solidFill>
-                  <a:srgbClr val="142033"/>
+                  <a:srgbClr val="2B2B28"/>
                 </a:solidFill>
                 <a:latin typeface="Helvetica Neue"/>
                 <a:ea typeface="Helvetica Neue"/>
@@ -9939,7 +9939,7 @@
             <a:pPr algn="l">
               <a:defRPr sz="2100" b="1">
                 <a:solidFill>
-                  <a:srgbClr val="142033"/>
+                  <a:srgbClr val="2B2B28"/>
                 </a:solidFill>
                 <a:latin typeface="Helvetica Neue"/>
                 <a:ea typeface="Helvetica Neue"/>
@@ -9949,7 +9949,7 @@
             <a:r>
               <a:rPr sz="2100" b="1">
                 <a:solidFill>
-                  <a:srgbClr val="142033"/>
+                  <a:srgbClr val="2B2B28"/>
                 </a:solidFill>
                 <a:latin typeface="Helvetica Neue"/>
                 <a:ea typeface="Helvetica Neue"/>
@@ -9996,7 +9996,7 @@
             <a:defPPr algn="l">
               <a:defRPr sz="1950" b="0">
                 <a:solidFill>
-                  <a:srgbClr val="142033"/>
+                  <a:srgbClr val="2B2B28"/>
                 </a:solidFill>
                 <a:latin typeface="Helvetica Neue"/>
                 <a:ea typeface="Helvetica Neue"/>
@@ -10006,7 +10006,7 @@
             <a:lvl1pPr algn="l">
               <a:defRPr sz="1950" b="0">
                 <a:solidFill>
-                  <a:srgbClr val="142033"/>
+                  <a:srgbClr val="2B2B28"/>
                 </a:solidFill>
                 <a:latin typeface="Helvetica Neue"/>
                 <a:ea typeface="Helvetica Neue"/>
@@ -10016,7 +10016,7 @@
             <a:lvl2pPr algn="l">
               <a:defRPr sz="1950" b="0">
                 <a:solidFill>
-                  <a:srgbClr val="142033"/>
+                  <a:srgbClr val="2B2B28"/>
                 </a:solidFill>
                 <a:latin typeface="Helvetica Neue"/>
                 <a:ea typeface="Helvetica Neue"/>
@@ -10026,7 +10026,7 @@
             <a:lvl3pPr algn="l">
               <a:defRPr sz="1950" b="0">
                 <a:solidFill>
-                  <a:srgbClr val="142033"/>
+                  <a:srgbClr val="2B2B28"/>
                 </a:solidFill>
                 <a:latin typeface="Helvetica Neue"/>
                 <a:ea typeface="Helvetica Neue"/>
@@ -10036,7 +10036,7 @@
             <a:lvl4pPr algn="l">
               <a:defRPr sz="1950" b="0">
                 <a:solidFill>
-                  <a:srgbClr val="142033"/>
+                  <a:srgbClr val="2B2B28"/>
                 </a:solidFill>
                 <a:latin typeface="Helvetica Neue"/>
                 <a:ea typeface="Helvetica Neue"/>
@@ -10046,7 +10046,7 @@
             <a:lvl5pPr algn="l">
               <a:defRPr sz="1950" b="0">
                 <a:solidFill>
-                  <a:srgbClr val="142033"/>
+                  <a:srgbClr val="2B2B28"/>
                 </a:solidFill>
                 <a:latin typeface="Helvetica Neue"/>
                 <a:ea typeface="Helvetica Neue"/>
@@ -10056,7 +10056,7 @@
             <a:lvl6pPr algn="l">
               <a:defRPr sz="1950" b="0">
                 <a:solidFill>
-                  <a:srgbClr val="142033"/>
+                  <a:srgbClr val="2B2B28"/>
                 </a:solidFill>
                 <a:latin typeface="Helvetica Neue"/>
                 <a:ea typeface="Helvetica Neue"/>
@@ -10066,7 +10066,7 @@
             <a:lvl7pPr algn="l">
               <a:defRPr sz="1950" b="0">
                 <a:solidFill>
-                  <a:srgbClr val="142033"/>
+                  <a:srgbClr val="2B2B28"/>
                 </a:solidFill>
                 <a:latin typeface="Helvetica Neue"/>
                 <a:ea typeface="Helvetica Neue"/>
@@ -10076,7 +10076,7 @@
             <a:lvl8pPr algn="l">
               <a:defRPr sz="1950" b="0">
                 <a:solidFill>
-                  <a:srgbClr val="142033"/>
+                  <a:srgbClr val="2B2B28"/>
                 </a:solidFill>
                 <a:latin typeface="Helvetica Neue"/>
                 <a:ea typeface="Helvetica Neue"/>
@@ -10086,7 +10086,7 @@
             <a:lvl9pPr algn="l">
               <a:defRPr sz="1950" b="0">
                 <a:solidFill>
-                  <a:srgbClr val="142033"/>
+                  <a:srgbClr val="2B2B28"/>
                 </a:solidFill>
                 <a:latin typeface="Helvetica Neue"/>
                 <a:ea typeface="Helvetica Neue"/>
@@ -10098,7 +10098,7 @@
             <a:pPr algn="l">
               <a:defRPr sz="1950" b="0">
                 <a:solidFill>
-                  <a:srgbClr val="142033"/>
+                  <a:srgbClr val="2B2B28"/>
                 </a:solidFill>
                 <a:latin typeface="Helvetica Neue"/>
                 <a:ea typeface="Helvetica Neue"/>
@@ -10108,7 +10108,7 @@
             <a:r>
               <a:rPr sz="1950" b="0">
                 <a:solidFill>
-                  <a:srgbClr val="142033"/>
+                  <a:srgbClr val="2B2B28"/>
                 </a:solidFill>
                 <a:latin typeface="Helvetica Neue"/>
                 <a:ea typeface="Helvetica Neue"/>
@@ -10121,7 +10121,7 @@
             <a:pPr algn="l">
               <a:defRPr sz="1950" b="0">
                 <a:solidFill>
-                  <a:srgbClr val="142033"/>
+                  <a:srgbClr val="2B2B28"/>
                 </a:solidFill>
                 <a:latin typeface="Helvetica Neue"/>
                 <a:ea typeface="Helvetica Neue"/>
@@ -10131,7 +10131,7 @@
             <a:r>
               <a:rPr sz="1950" b="0">
                 <a:solidFill>
-                  <a:srgbClr val="142033"/>
+                  <a:srgbClr val="2B2B28"/>
                 </a:solidFill>
                 <a:latin typeface="Helvetica Neue"/>
                 <a:ea typeface="Helvetica Neue"/>
@@ -10164,7 +10164,7 @@
           </a:prstGeom>
           <a:ln xmlns:a="http://schemas.openxmlformats.org/drawingml/2006/main" w="9525">
             <a:solidFill>
-              <a:srgbClr val="D8DBE1"/>
+              <a:srgbClr val="D6D1C8"/>
             </a:solidFill>
             <a:prstDash val="solid"/>
             <a:tailEnd type="none" w="med" len="med"/>
@@ -10207,7 +10207,7 @@
             <a:defPPr algn="l">
               <a:defRPr sz="1950" b="0">
                 <a:solidFill>
-                  <a:srgbClr val="142033"/>
+                  <a:srgbClr val="2B2B28"/>
                 </a:solidFill>
                 <a:latin typeface="Helvetica Neue"/>
                 <a:ea typeface="Helvetica Neue"/>
@@ -10217,7 +10217,7 @@
             <a:lvl1pPr algn="l">
               <a:defRPr sz="1950" b="0">
                 <a:solidFill>
-                  <a:srgbClr val="142033"/>
+                  <a:srgbClr val="2B2B28"/>
                 </a:solidFill>
                 <a:latin typeface="Helvetica Neue"/>
                 <a:ea typeface="Helvetica Neue"/>
@@ -10227,7 +10227,7 @@
             <a:lvl2pPr algn="l">
               <a:defRPr sz="1950" b="0">
                 <a:solidFill>
-                  <a:srgbClr val="142033"/>
+                  <a:srgbClr val="2B2B28"/>
                 </a:solidFill>
                 <a:latin typeface="Helvetica Neue"/>
                 <a:ea typeface="Helvetica Neue"/>
@@ -10237,7 +10237,7 @@
             <a:lvl3pPr algn="l">
               <a:defRPr sz="1950" b="0">
                 <a:solidFill>
-                  <a:srgbClr val="142033"/>
+                  <a:srgbClr val="2B2B28"/>
                 </a:solidFill>
                 <a:latin typeface="Helvetica Neue"/>
                 <a:ea typeface="Helvetica Neue"/>
@@ -10247,7 +10247,7 @@
             <a:lvl4pPr algn="l">
               <a:defRPr sz="1950" b="0">
                 <a:solidFill>
-                  <a:srgbClr val="142033"/>
+                  <a:srgbClr val="2B2B28"/>
                 </a:solidFill>
                 <a:latin typeface="Helvetica Neue"/>
                 <a:ea typeface="Helvetica Neue"/>
@@ -10257,7 +10257,7 @@
             <a:lvl5pPr algn="l">
               <a:defRPr sz="1950" b="0">
                 <a:solidFill>
-                  <a:srgbClr val="142033"/>
+                  <a:srgbClr val="2B2B28"/>
                 </a:solidFill>
                 <a:latin typeface="Helvetica Neue"/>
                 <a:ea typeface="Helvetica Neue"/>
@@ -10267,7 +10267,7 @@
             <a:lvl6pPr algn="l">
               <a:defRPr sz="1950" b="0">
                 <a:solidFill>
-                  <a:srgbClr val="142033"/>
+                  <a:srgbClr val="2B2B28"/>
                 </a:solidFill>
                 <a:latin typeface="Helvetica Neue"/>
                 <a:ea typeface="Helvetica Neue"/>
@@ -10277,7 +10277,7 @@
             <a:lvl7pPr algn="l">
               <a:defRPr sz="1950" b="0">
                 <a:solidFill>
-                  <a:srgbClr val="142033"/>
+                  <a:srgbClr val="2B2B28"/>
                 </a:solidFill>
                 <a:latin typeface="Helvetica Neue"/>
                 <a:ea typeface="Helvetica Neue"/>
@@ -10287,7 +10287,7 @@
             <a:lvl8pPr algn="l">
               <a:defRPr sz="1950" b="0">
                 <a:solidFill>
-                  <a:srgbClr val="142033"/>
+                  <a:srgbClr val="2B2B28"/>
                 </a:solidFill>
                 <a:latin typeface="Helvetica Neue"/>
                 <a:ea typeface="Helvetica Neue"/>
@@ -10297,7 +10297,7 @@
             <a:lvl9pPr algn="l">
               <a:defRPr sz="1950" b="0">
                 <a:solidFill>
-                  <a:srgbClr val="142033"/>
+                  <a:srgbClr val="2B2B28"/>
                 </a:solidFill>
                 <a:latin typeface="Helvetica Neue"/>
                 <a:ea typeface="Helvetica Neue"/>
@@ -10309,7 +10309,7 @@
             <a:pPr algn="l">
               <a:defRPr sz="1950" b="0">
                 <a:solidFill>
-                  <a:srgbClr val="142033"/>
+                  <a:srgbClr val="2B2B28"/>
                 </a:solidFill>
                 <a:latin typeface="Helvetica Neue"/>
                 <a:ea typeface="Helvetica Neue"/>
@@ -10319,7 +10319,7 @@
             <a:r>
               <a:rPr sz="1950" b="0">
                 <a:solidFill>
-                  <a:srgbClr val="142033"/>
+                  <a:srgbClr val="2B2B28"/>
                 </a:solidFill>
                 <a:latin typeface="Helvetica Neue"/>
                 <a:ea typeface="Helvetica Neue"/>
@@ -10332,7 +10332,7 @@
             <a:pPr algn="l">
               <a:defRPr sz="1950" b="0">
                 <a:solidFill>
-                  <a:srgbClr val="142033"/>
+                  <a:srgbClr val="2B2B28"/>
                 </a:solidFill>
                 <a:latin typeface="Helvetica Neue"/>
                 <a:ea typeface="Helvetica Neue"/>
@@ -10342,7 +10342,7 @@
             <a:r>
               <a:rPr sz="1950" b="0">
                 <a:solidFill>
-                  <a:srgbClr val="142033"/>
+                  <a:srgbClr val="2B2B28"/>
                 </a:solidFill>
                 <a:latin typeface="Helvetica Neue"/>
                 <a:ea typeface="Helvetica Neue"/>
@@ -10376,17 +10376,17 @@
             <a:avLst/>
           </a:prstGeom>
           <a:solidFill xmlns:a="http://schemas.openxmlformats.org/drawingml/2006/main">
-            <a:srgbClr val="FFFFFF"/>
+            <a:srgbClr val="FFFEFB"/>
           </a:solidFill>
           <a:ln xmlns:a="http://schemas.openxmlformats.org/drawingml/2006/main" w="19050">
             <a:solidFill>
-              <a:srgbClr val="142033"/>
+              <a:srgbClr val="2B2B28"/>
             </a:solidFill>
             <a:prstDash val="solid"/>
           </a:ln>
           <ns10:effectLst xmlns:ns10="http://schemas.openxmlformats.org/drawingml/2006/main">
             <ns10:outerShdw blurRad="57150" dist="42597" dir="3806097" sx="100000" sy="100000" kx="0" ky="0" algn="ctr" rotWithShape="0">
-              <ns10:srgbClr val="142033">
+              <ns10:srgbClr val="2B2B28">
                 <ns10:alpha val="18000"/>
               </ns10:srgbClr>
             </ns10:outerShdw>
@@ -10422,7 +10422,7 @@
             <a:avLst/>
           </a:prstGeom>
           <a:solidFill xmlns:a="http://schemas.openxmlformats.org/drawingml/2006/main">
-            <a:srgbClr val="FBECEE"/>
+            <a:srgbClr val="F6E7E1"/>
           </a:solidFill>
           <a:ln xmlns:a="http://schemas.openxmlformats.org/drawingml/2006/main" w="0">
             <a:noFill/>
@@ -10466,7 +10466,7 @@
             <a:defPPr algn="ctr">
               <a:defRPr sz="1875" b="1">
                 <a:solidFill>
-                  <a:srgbClr val="C53343"/>
+                  <a:srgbClr val="B44F45"/>
                 </a:solidFill>
                 <a:latin typeface="Helvetica Neue"/>
                 <a:ea typeface="Helvetica Neue"/>
@@ -10476,7 +10476,7 @@
             <a:lvl1pPr algn="ctr">
               <a:defRPr sz="1875" b="1">
                 <a:solidFill>
-                  <a:srgbClr val="C53343"/>
+                  <a:srgbClr val="B44F45"/>
                 </a:solidFill>
                 <a:latin typeface="Helvetica Neue"/>
                 <a:ea typeface="Helvetica Neue"/>
@@ -10486,7 +10486,7 @@
             <a:lvl2pPr algn="ctr">
               <a:defRPr sz="1875" b="1">
                 <a:solidFill>
-                  <a:srgbClr val="C53343"/>
+                  <a:srgbClr val="B44F45"/>
                 </a:solidFill>
                 <a:latin typeface="Helvetica Neue"/>
                 <a:ea typeface="Helvetica Neue"/>
@@ -10496,7 +10496,7 @@
             <a:lvl3pPr algn="ctr">
               <a:defRPr sz="1875" b="1">
                 <a:solidFill>
-                  <a:srgbClr val="C53343"/>
+                  <a:srgbClr val="B44F45"/>
                 </a:solidFill>
                 <a:latin typeface="Helvetica Neue"/>
                 <a:ea typeface="Helvetica Neue"/>
@@ -10506,7 +10506,7 @@
             <a:lvl4pPr algn="ctr">
               <a:defRPr sz="1875" b="1">
                 <a:solidFill>
-                  <a:srgbClr val="C53343"/>
+                  <a:srgbClr val="B44F45"/>
                 </a:solidFill>
                 <a:latin typeface="Helvetica Neue"/>
                 <a:ea typeface="Helvetica Neue"/>
@@ -10516,7 +10516,7 @@
             <a:lvl5pPr algn="ctr">
               <a:defRPr sz="1875" b="1">
                 <a:solidFill>
-                  <a:srgbClr val="C53343"/>
+                  <a:srgbClr val="B44F45"/>
                 </a:solidFill>
                 <a:latin typeface="Helvetica Neue"/>
                 <a:ea typeface="Helvetica Neue"/>
@@ -10526,7 +10526,7 @@
             <a:lvl6pPr algn="ctr">
               <a:defRPr sz="1875" b="1">
                 <a:solidFill>
-                  <a:srgbClr val="C53343"/>
+                  <a:srgbClr val="B44F45"/>
                 </a:solidFill>
                 <a:latin typeface="Helvetica Neue"/>
                 <a:ea typeface="Helvetica Neue"/>
@@ -10536,7 +10536,7 @@
             <a:lvl7pPr algn="ctr">
               <a:defRPr sz="1875" b="1">
                 <a:solidFill>
-                  <a:srgbClr val="C53343"/>
+                  <a:srgbClr val="B44F45"/>
                 </a:solidFill>
                 <a:latin typeface="Helvetica Neue"/>
                 <a:ea typeface="Helvetica Neue"/>
@@ -10546,7 +10546,7 @@
             <a:lvl8pPr algn="ctr">
               <a:defRPr sz="1875" b="1">
                 <a:solidFill>
-                  <a:srgbClr val="C53343"/>
+                  <a:srgbClr val="B44F45"/>
                 </a:solidFill>
                 <a:latin typeface="Helvetica Neue"/>
                 <a:ea typeface="Helvetica Neue"/>
@@ -10556,7 +10556,7 @@
             <a:lvl9pPr algn="ctr">
               <a:defRPr sz="1875" b="1">
                 <a:solidFill>
-                  <a:srgbClr val="C53343"/>
+                  <a:srgbClr val="B44F45"/>
                 </a:solidFill>
                 <a:latin typeface="Helvetica Neue"/>
                 <a:ea typeface="Helvetica Neue"/>
@@ -10568,7 +10568,7 @@
             <a:pPr algn="ctr">
               <a:defRPr sz="1875" b="1">
                 <a:solidFill>
-                  <a:srgbClr val="C53343"/>
+                  <a:srgbClr val="B44F45"/>
                 </a:solidFill>
                 <a:latin typeface="Helvetica Neue"/>
                 <a:ea typeface="Helvetica Neue"/>
@@ -10578,7 +10578,7 @@
             <a:r>
               <a:rPr sz="1875" b="1">
                 <a:solidFill>
-                  <a:srgbClr val="C53343"/>
+                  <a:srgbClr val="B44F45"/>
                 </a:solidFill>
                 <a:latin typeface="Helvetica Neue"/>
                 <a:ea typeface="Helvetica Neue"/>
@@ -10625,7 +10625,7 @@
             <a:defPPr algn="l">
               <a:defRPr sz="2100" b="1">
                 <a:solidFill>
-                  <a:srgbClr val="142033"/>
+                  <a:srgbClr val="2B2B28"/>
                 </a:solidFill>
                 <a:latin typeface="Helvetica Neue"/>
                 <a:ea typeface="Helvetica Neue"/>
@@ -10635,7 +10635,7 @@
             <a:lvl1pPr algn="l">
               <a:defRPr sz="2100" b="1">
                 <a:solidFill>
-                  <a:srgbClr val="142033"/>
+                  <a:srgbClr val="2B2B28"/>
                 </a:solidFill>
                 <a:latin typeface="Helvetica Neue"/>
                 <a:ea typeface="Helvetica Neue"/>
@@ -10645,7 +10645,7 @@
             <a:lvl2pPr algn="l">
               <a:defRPr sz="2100" b="1">
                 <a:solidFill>
-                  <a:srgbClr val="142033"/>
+                  <a:srgbClr val="2B2B28"/>
                 </a:solidFill>
                 <a:latin typeface="Helvetica Neue"/>
                 <a:ea typeface="Helvetica Neue"/>
@@ -10655,7 +10655,7 @@
             <a:lvl3pPr algn="l">
               <a:defRPr sz="2100" b="1">
                 <a:solidFill>
-                  <a:srgbClr val="142033"/>
+                  <a:srgbClr val="2B2B28"/>
                 </a:solidFill>
                 <a:latin typeface="Helvetica Neue"/>
                 <a:ea typeface="Helvetica Neue"/>
@@ -10665,7 +10665,7 @@
             <a:lvl4pPr algn="l">
               <a:defRPr sz="2100" b="1">
                 <a:solidFill>
-                  <a:srgbClr val="142033"/>
+                  <a:srgbClr val="2B2B28"/>
                 </a:solidFill>
                 <a:latin typeface="Helvetica Neue"/>
                 <a:ea typeface="Helvetica Neue"/>
@@ -10675,7 +10675,7 @@
             <a:lvl5pPr algn="l">
               <a:defRPr sz="2100" b="1">
                 <a:solidFill>
-                  <a:srgbClr val="142033"/>
+                  <a:srgbClr val="2B2B28"/>
                 </a:solidFill>
                 <a:latin typeface="Helvetica Neue"/>
                 <a:ea typeface="Helvetica Neue"/>
@@ -10685,7 +10685,7 @@
             <a:lvl6pPr algn="l">
               <a:defRPr sz="2100" b="1">
                 <a:solidFill>
-                  <a:srgbClr val="142033"/>
+                  <a:srgbClr val="2B2B28"/>
                 </a:solidFill>
                 <a:latin typeface="Helvetica Neue"/>
                 <a:ea typeface="Helvetica Neue"/>
@@ -10695,7 +10695,7 @@
             <a:lvl7pPr algn="l">
               <a:defRPr sz="2100" b="1">
                 <a:solidFill>
-                  <a:srgbClr val="142033"/>
+                  <a:srgbClr val="2B2B28"/>
                 </a:solidFill>
                 <a:latin typeface="Helvetica Neue"/>
                 <a:ea typeface="Helvetica Neue"/>
@@ -10705,7 +10705,7 @@
             <a:lvl8pPr algn="l">
               <a:defRPr sz="2100" b="1">
                 <a:solidFill>
-                  <a:srgbClr val="142033"/>
+                  <a:srgbClr val="2B2B28"/>
                 </a:solidFill>
                 <a:latin typeface="Helvetica Neue"/>
                 <a:ea typeface="Helvetica Neue"/>
@@ -10715,7 +10715,7 @@
             <a:lvl9pPr algn="l">
               <a:defRPr sz="2100" b="1">
                 <a:solidFill>
-                  <a:srgbClr val="142033"/>
+                  <a:srgbClr val="2B2B28"/>
                 </a:solidFill>
                 <a:latin typeface="Helvetica Neue"/>
                 <a:ea typeface="Helvetica Neue"/>
@@ -10727,7 +10727,7 @@
             <a:pPr algn="l">
               <a:defRPr sz="2100" b="1">
                 <a:solidFill>
-                  <a:srgbClr val="142033"/>
+                  <a:srgbClr val="2B2B28"/>
                 </a:solidFill>
                 <a:latin typeface="Helvetica Neue"/>
                 <a:ea typeface="Helvetica Neue"/>
@@ -10737,7 +10737,7 @@
             <a:r>
               <a:rPr sz="2100" b="1">
                 <a:solidFill>
-                  <a:srgbClr val="142033"/>
+                  <a:srgbClr val="2B2B28"/>
                 </a:solidFill>
                 <a:latin typeface="Helvetica Neue"/>
                 <a:ea typeface="Helvetica Neue"/>
@@ -10784,7 +10784,7 @@
             <a:defPPr algn="l">
               <a:defRPr sz="1950" b="0">
                 <a:solidFill>
-                  <a:srgbClr val="142033"/>
+                  <a:srgbClr val="2B2B28"/>
                 </a:solidFill>
                 <a:latin typeface="Helvetica Neue"/>
                 <a:ea typeface="Helvetica Neue"/>
@@ -10794,7 +10794,7 @@
             <a:lvl1pPr algn="l">
               <a:defRPr sz="1950" b="0">
                 <a:solidFill>
-                  <a:srgbClr val="142033"/>
+                  <a:srgbClr val="2B2B28"/>
                 </a:solidFill>
                 <a:latin typeface="Helvetica Neue"/>
                 <a:ea typeface="Helvetica Neue"/>
@@ -10804,7 +10804,7 @@
             <a:lvl2pPr algn="l">
               <a:defRPr sz="1950" b="0">
                 <a:solidFill>
-                  <a:srgbClr val="142033"/>
+                  <a:srgbClr val="2B2B28"/>
                 </a:solidFill>
                 <a:latin typeface="Helvetica Neue"/>
                 <a:ea typeface="Helvetica Neue"/>
@@ -10814,7 +10814,7 @@
             <a:lvl3pPr algn="l">
               <a:defRPr sz="1950" b="0">
                 <a:solidFill>
-                  <a:srgbClr val="142033"/>
+                  <a:srgbClr val="2B2B28"/>
                 </a:solidFill>
                 <a:latin typeface="Helvetica Neue"/>
                 <a:ea typeface="Helvetica Neue"/>
@@ -10824,7 +10824,7 @@
             <a:lvl4pPr algn="l">
               <a:defRPr sz="1950" b="0">
                 <a:solidFill>
-                  <a:srgbClr val="142033"/>
+                  <a:srgbClr val="2B2B28"/>
                 </a:solidFill>
                 <a:latin typeface="Helvetica Neue"/>
                 <a:ea typeface="Helvetica Neue"/>
@@ -10834,7 +10834,7 @@
             <a:lvl5pPr algn="l">
               <a:defRPr sz="1950" b="0">
                 <a:solidFill>
-                  <a:srgbClr val="142033"/>
+                  <a:srgbClr val="2B2B28"/>
                 </a:solidFill>
                 <a:latin typeface="Helvetica Neue"/>
                 <a:ea typeface="Helvetica Neue"/>
@@ -10844,7 +10844,7 @@
             <a:lvl6pPr algn="l">
               <a:defRPr sz="1950" b="0">
                 <a:solidFill>
-                  <a:srgbClr val="142033"/>
+                  <a:srgbClr val="2B2B28"/>
                 </a:solidFill>
                 <a:latin typeface="Helvetica Neue"/>
                 <a:ea typeface="Helvetica Neue"/>
@@ -10854,7 +10854,7 @@
             <a:lvl7pPr algn="l">
               <a:defRPr sz="1950" b="0">
                 <a:solidFill>
-                  <a:srgbClr val="142033"/>
+                  <a:srgbClr val="2B2B28"/>
                 </a:solidFill>
                 <a:latin typeface="Helvetica Neue"/>
                 <a:ea typeface="Helvetica Neue"/>
@@ -10864,7 +10864,7 @@
             <a:lvl8pPr algn="l">
               <a:defRPr sz="1950" b="0">
                 <a:solidFill>
-                  <a:srgbClr val="142033"/>
+                  <a:srgbClr val="2B2B28"/>
                 </a:solidFill>
                 <a:latin typeface="Helvetica Neue"/>
                 <a:ea typeface="Helvetica Neue"/>
@@ -10874,7 +10874,7 @@
             <a:lvl9pPr algn="l">
               <a:defRPr sz="1950" b="0">
                 <a:solidFill>
-                  <a:srgbClr val="142033"/>
+                  <a:srgbClr val="2B2B28"/>
                 </a:solidFill>
                 <a:latin typeface="Helvetica Neue"/>
                 <a:ea typeface="Helvetica Neue"/>
@@ -10886,7 +10886,7 @@
             <a:pPr algn="l">
               <a:defRPr sz="1950" b="0">
                 <a:solidFill>
-                  <a:srgbClr val="142033"/>
+                  <a:srgbClr val="2B2B28"/>
                 </a:solidFill>
                 <a:latin typeface="Helvetica Neue"/>
                 <a:ea typeface="Helvetica Neue"/>
@@ -10896,7 +10896,7 @@
             <a:r>
               <a:rPr sz="1950" b="0">
                 <a:solidFill>
-                  <a:srgbClr val="142033"/>
+                  <a:srgbClr val="2B2B28"/>
                 </a:solidFill>
                 <a:latin typeface="Helvetica Neue"/>
                 <a:ea typeface="Helvetica Neue"/>
@@ -10909,7 +10909,7 @@
             <a:pPr algn="l">
               <a:defRPr sz="1950" b="0">
                 <a:solidFill>
-                  <a:srgbClr val="142033"/>
+                  <a:srgbClr val="2B2B28"/>
                 </a:solidFill>
                 <a:latin typeface="Helvetica Neue"/>
                 <a:ea typeface="Helvetica Neue"/>
@@ -10919,7 +10919,7 @@
             <a:r>
               <a:rPr sz="1950" b="0">
                 <a:solidFill>
-                  <a:srgbClr val="142033"/>
+                  <a:srgbClr val="2B2B28"/>
                 </a:solidFill>
                 <a:latin typeface="Helvetica Neue"/>
                 <a:ea typeface="Helvetica Neue"/>
@@ -10952,7 +10952,7 @@
           </a:prstGeom>
           <a:ln xmlns:a="http://schemas.openxmlformats.org/drawingml/2006/main" w="9525">
             <a:solidFill>
-              <a:srgbClr val="D8DBE1"/>
+              <a:srgbClr val="D6D1C8"/>
             </a:solidFill>
             <a:prstDash val="solid"/>
             <a:tailEnd type="none" w="med" len="med"/>
@@ -10995,7 +10995,7 @@
             <a:defPPr algn="l">
               <a:defRPr sz="1950" b="0">
                 <a:solidFill>
-                  <a:srgbClr val="142033"/>
+                  <a:srgbClr val="2B2B28"/>
                 </a:solidFill>
                 <a:latin typeface="Helvetica Neue"/>
                 <a:ea typeface="Helvetica Neue"/>
@@ -11005,7 +11005,7 @@
             <a:lvl1pPr algn="l">
               <a:defRPr sz="1950" b="0">
                 <a:solidFill>
-                  <a:srgbClr val="142033"/>
+                  <a:srgbClr val="2B2B28"/>
                 </a:solidFill>
                 <a:latin typeface="Helvetica Neue"/>
                 <a:ea typeface="Helvetica Neue"/>
@@ -11015,7 +11015,7 @@
             <a:lvl2pPr algn="l">
               <a:defRPr sz="1950" b="0">
                 <a:solidFill>
-                  <a:srgbClr val="142033"/>
+                  <a:srgbClr val="2B2B28"/>
                 </a:solidFill>
                 <a:latin typeface="Helvetica Neue"/>
                 <a:ea typeface="Helvetica Neue"/>
@@ -11025,7 +11025,7 @@
             <a:lvl3pPr algn="l">
               <a:defRPr sz="1950" b="0">
                 <a:solidFill>
-                  <a:srgbClr val="142033"/>
+                  <a:srgbClr val="2B2B28"/>
                 </a:solidFill>
                 <a:latin typeface="Helvetica Neue"/>
                 <a:ea typeface="Helvetica Neue"/>
@@ -11035,7 +11035,7 @@
             <a:lvl4pPr algn="l">
               <a:defRPr sz="1950" b="0">
                 <a:solidFill>
-                  <a:srgbClr val="142033"/>
+                  <a:srgbClr val="2B2B28"/>
                 </a:solidFill>
                 <a:latin typeface="Helvetica Neue"/>
                 <a:ea typeface="Helvetica Neue"/>
@@ -11045,7 +11045,7 @@
             <a:lvl5pPr algn="l">
               <a:defRPr sz="1950" b="0">
                 <a:solidFill>
-                  <a:srgbClr val="142033"/>
+                  <a:srgbClr val="2B2B28"/>
                 </a:solidFill>
                 <a:latin typeface="Helvetica Neue"/>
                 <a:ea typeface="Helvetica Neue"/>
@@ -11055,7 +11055,7 @@
             <a:lvl6pPr algn="l">
               <a:defRPr sz="1950" b="0">
                 <a:solidFill>
-                  <a:srgbClr val="142033"/>
+                  <a:srgbClr val="2B2B28"/>
                 </a:solidFill>
                 <a:latin typeface="Helvetica Neue"/>
                 <a:ea typeface="Helvetica Neue"/>
@@ -11065,7 +11065,7 @@
             <a:lvl7pPr algn="l">
               <a:defRPr sz="1950" b="0">
                 <a:solidFill>
-                  <a:srgbClr val="142033"/>
+                  <a:srgbClr val="2B2B28"/>
                 </a:solidFill>
                 <a:latin typeface="Helvetica Neue"/>
                 <a:ea typeface="Helvetica Neue"/>
@@ -11075,7 +11075,7 @@
             <a:lvl8pPr algn="l">
               <a:defRPr sz="1950" b="0">
                 <a:solidFill>
-                  <a:srgbClr val="142033"/>
+                  <a:srgbClr val="2B2B28"/>
                 </a:solidFill>
                 <a:latin typeface="Helvetica Neue"/>
                 <a:ea typeface="Helvetica Neue"/>
@@ -11085,7 +11085,7 @@
             <a:lvl9pPr algn="l">
               <a:defRPr sz="1950" b="0">
                 <a:solidFill>
-                  <a:srgbClr val="142033"/>
+                  <a:srgbClr val="2B2B28"/>
                 </a:solidFill>
                 <a:latin typeface="Helvetica Neue"/>
                 <a:ea typeface="Helvetica Neue"/>
@@ -11097,7 +11097,7 @@
             <a:pPr algn="l">
               <a:defRPr sz="1950" b="0">
                 <a:solidFill>
-                  <a:srgbClr val="142033"/>
+                  <a:srgbClr val="2B2B28"/>
                 </a:solidFill>
                 <a:latin typeface="Helvetica Neue"/>
                 <a:ea typeface="Helvetica Neue"/>
@@ -11107,7 +11107,7 @@
             <a:r>
               <a:rPr sz="1950" b="0">
                 <a:solidFill>
-                  <a:srgbClr val="142033"/>
+                  <a:srgbClr val="2B2B28"/>
                 </a:solidFill>
                 <a:latin typeface="Helvetica Neue"/>
                 <a:ea typeface="Helvetica Neue"/>
@@ -11120,7 +11120,7 @@
             <a:pPr algn="l">
               <a:defRPr sz="1950" b="0">
                 <a:solidFill>
-                  <a:srgbClr val="142033"/>
+                  <a:srgbClr val="2B2B28"/>
                 </a:solidFill>
                 <a:latin typeface="Helvetica Neue"/>
                 <a:ea typeface="Helvetica Neue"/>
@@ -11130,7 +11130,7 @@
             <a:r>
               <a:rPr sz="1950" b="0">
                 <a:solidFill>
-                  <a:srgbClr val="142033"/>
+                  <a:srgbClr val="2B2B28"/>
                 </a:solidFill>
                 <a:latin typeface="Helvetica Neue"/>
                 <a:ea typeface="Helvetica Neue"/>
@@ -11163,7 +11163,7 @@
           </a:prstGeom>
           <a:ln xmlns:a="http://schemas.openxmlformats.org/drawingml/2006/main" w="22860">
             <a:solidFill>
-              <a:srgbClr val="142033"/>
+              <a:srgbClr val="2B2B28"/>
             </a:solidFill>
             <a:prstDash val="solid"/>
             <a:tailEnd type="triangle" w="med" len="med"/>
@@ -11206,7 +11206,7 @@
             <a:defPPr algn="l">
               <a:defRPr sz="1650" b="1">
                 <a:solidFill>
-                  <a:srgbClr val="4B596C"/>
+                  <a:srgbClr val="57564F"/>
                 </a:solidFill>
                 <a:latin typeface="Helvetica Neue"/>
                 <a:ea typeface="Helvetica Neue"/>
@@ -11216,7 +11216,7 @@
             <a:lvl1pPr algn="l">
               <a:defRPr sz="1650" b="1">
                 <a:solidFill>
-                  <a:srgbClr val="4B596C"/>
+                  <a:srgbClr val="57564F"/>
                 </a:solidFill>
                 <a:latin typeface="Helvetica Neue"/>
                 <a:ea typeface="Helvetica Neue"/>
@@ -11226,7 +11226,7 @@
             <a:lvl2pPr algn="l">
               <a:defRPr sz="1650" b="1">
                 <a:solidFill>
-                  <a:srgbClr val="4B596C"/>
+                  <a:srgbClr val="57564F"/>
                 </a:solidFill>
                 <a:latin typeface="Helvetica Neue"/>
                 <a:ea typeface="Helvetica Neue"/>
@@ -11236,7 +11236,7 @@
             <a:lvl3pPr algn="l">
               <a:defRPr sz="1650" b="1">
                 <a:solidFill>
-                  <a:srgbClr val="4B596C"/>
+                  <a:srgbClr val="57564F"/>
                 </a:solidFill>
                 <a:latin typeface="Helvetica Neue"/>
                 <a:ea typeface="Helvetica Neue"/>
@@ -11246,7 +11246,7 @@
             <a:lvl4pPr algn="l">
               <a:defRPr sz="1650" b="1">
                 <a:solidFill>
-                  <a:srgbClr val="4B596C"/>
+                  <a:srgbClr val="57564F"/>
                 </a:solidFill>
                 <a:latin typeface="Helvetica Neue"/>
                 <a:ea typeface="Helvetica Neue"/>
@@ -11256,7 +11256,7 @@
             <a:lvl5pPr algn="l">
               <a:defRPr sz="1650" b="1">
                 <a:solidFill>
-                  <a:srgbClr val="4B596C"/>
+                  <a:srgbClr val="57564F"/>
                 </a:solidFill>
                 <a:latin typeface="Helvetica Neue"/>
                 <a:ea typeface="Helvetica Neue"/>
@@ -11266,7 +11266,7 @@
             <a:lvl6pPr algn="l">
               <a:defRPr sz="1650" b="1">
                 <a:solidFill>
-                  <a:srgbClr val="4B596C"/>
+                  <a:srgbClr val="57564F"/>
                 </a:solidFill>
                 <a:latin typeface="Helvetica Neue"/>
                 <a:ea typeface="Helvetica Neue"/>
@@ -11276,7 +11276,7 @@
             <a:lvl7pPr algn="l">
               <a:defRPr sz="1650" b="1">
                 <a:solidFill>
-                  <a:srgbClr val="4B596C"/>
+                  <a:srgbClr val="57564F"/>
                 </a:solidFill>
                 <a:latin typeface="Helvetica Neue"/>
                 <a:ea typeface="Helvetica Neue"/>
@@ -11286,7 +11286,7 @@
             <a:lvl8pPr algn="l">
               <a:defRPr sz="1650" b="1">
                 <a:solidFill>
-                  <a:srgbClr val="4B596C"/>
+                  <a:srgbClr val="57564F"/>
                 </a:solidFill>
                 <a:latin typeface="Helvetica Neue"/>
                 <a:ea typeface="Helvetica Neue"/>
@@ -11296,7 +11296,7 @@
             <a:lvl9pPr algn="l">
               <a:defRPr sz="1650" b="1">
                 <a:solidFill>
-                  <a:srgbClr val="4B596C"/>
+                  <a:srgbClr val="57564F"/>
                 </a:solidFill>
                 <a:latin typeface="Helvetica Neue"/>
                 <a:ea typeface="Helvetica Neue"/>
@@ -11308,7 +11308,7 @@
             <a:pPr algn="l">
               <a:defRPr sz="1650" b="1">
                 <a:solidFill>
-                  <a:srgbClr val="4B596C"/>
+                  <a:srgbClr val="57564F"/>
                 </a:solidFill>
                 <a:latin typeface="Helvetica Neue"/>
                 <a:ea typeface="Helvetica Neue"/>
@@ -11318,7 +11318,7 @@
             <a:r>
               <a:rPr sz="1650" b="1">
                 <a:solidFill>
-                  <a:srgbClr val="4B596C"/>
+                  <a:srgbClr val="57564F"/>
                 </a:solidFill>
                 <a:latin typeface="Helvetica Neue"/>
                 <a:ea typeface="Helvetica Neue"/>
@@ -11351,7 +11351,7 @@
           </a:prstGeom>
           <a:ln xmlns:a="http://schemas.openxmlformats.org/drawingml/2006/main" w="22860">
             <a:solidFill>
-              <a:srgbClr val="142033"/>
+              <a:srgbClr val="2B2B28"/>
             </a:solidFill>
             <a:prstDash val="solid"/>
             <a:tailEnd type="triangle" w="med" len="med"/>
@@ -11394,7 +11394,7 @@
             <a:defPPr algn="l">
               <a:defRPr sz="1575" b="1">
                 <a:solidFill>
-                  <a:srgbClr val="4B596C"/>
+                  <a:srgbClr val="57564F"/>
                 </a:solidFill>
                 <a:latin typeface="Helvetica Neue"/>
                 <a:ea typeface="Helvetica Neue"/>
@@ -11404,7 +11404,7 @@
             <a:lvl1pPr algn="l">
               <a:defRPr sz="1575" b="1">
                 <a:solidFill>
-                  <a:srgbClr val="4B596C"/>
+                  <a:srgbClr val="57564F"/>
                 </a:solidFill>
                 <a:latin typeface="Helvetica Neue"/>
                 <a:ea typeface="Helvetica Neue"/>
@@ -11414,7 +11414,7 @@
             <a:lvl2pPr algn="l">
               <a:defRPr sz="1575" b="1">
                 <a:solidFill>
-                  <a:srgbClr val="4B596C"/>
+                  <a:srgbClr val="57564F"/>
                 </a:solidFill>
                 <a:latin typeface="Helvetica Neue"/>
                 <a:ea typeface="Helvetica Neue"/>
@@ -11424,7 +11424,7 @@
             <a:lvl3pPr algn="l">
               <a:defRPr sz="1575" b="1">
                 <a:solidFill>
-                  <a:srgbClr val="4B596C"/>
+                  <a:srgbClr val="57564F"/>
                 </a:solidFill>
                 <a:latin typeface="Helvetica Neue"/>
                 <a:ea typeface="Helvetica Neue"/>
@@ -11434,7 +11434,7 @@
             <a:lvl4pPr algn="l">
               <a:defRPr sz="1575" b="1">
                 <a:solidFill>
-                  <a:srgbClr val="4B596C"/>
+                  <a:srgbClr val="57564F"/>
                 </a:solidFill>
                 <a:latin typeface="Helvetica Neue"/>
                 <a:ea typeface="Helvetica Neue"/>
@@ -11444,7 +11444,7 @@
             <a:lvl5pPr algn="l">
               <a:defRPr sz="1575" b="1">
                 <a:solidFill>
-                  <a:srgbClr val="4B596C"/>
+                  <a:srgbClr val="57564F"/>
                 </a:solidFill>
                 <a:latin typeface="Helvetica Neue"/>
                 <a:ea typeface="Helvetica Neue"/>
@@ -11454,7 +11454,7 @@
             <a:lvl6pPr algn="l">
               <a:defRPr sz="1575" b="1">
                 <a:solidFill>
-                  <a:srgbClr val="4B596C"/>
+                  <a:srgbClr val="57564F"/>
                 </a:solidFill>
                 <a:latin typeface="Helvetica Neue"/>
                 <a:ea typeface="Helvetica Neue"/>
@@ -11464,7 +11464,7 @@
             <a:lvl7pPr algn="l">
               <a:defRPr sz="1575" b="1">
                 <a:solidFill>
-                  <a:srgbClr val="4B596C"/>
+                  <a:srgbClr val="57564F"/>
                 </a:solidFill>
                 <a:latin typeface="Helvetica Neue"/>
                 <a:ea typeface="Helvetica Neue"/>
@@ -11474,7 +11474,7 @@
             <a:lvl8pPr algn="l">
               <a:defRPr sz="1575" b="1">
                 <a:solidFill>
-                  <a:srgbClr val="4B596C"/>
+                  <a:srgbClr val="57564F"/>
                 </a:solidFill>
                 <a:latin typeface="Helvetica Neue"/>
                 <a:ea typeface="Helvetica Neue"/>
@@ -11484,7 +11484,7 @@
             <a:lvl9pPr algn="l">
               <a:defRPr sz="1575" b="1">
                 <a:solidFill>
-                  <a:srgbClr val="4B596C"/>
+                  <a:srgbClr val="57564F"/>
                 </a:solidFill>
                 <a:latin typeface="Helvetica Neue"/>
                 <a:ea typeface="Helvetica Neue"/>
@@ -11496,7 +11496,7 @@
             <a:pPr algn="l">
               <a:defRPr sz="1575" b="1">
                 <a:solidFill>
-                  <a:srgbClr val="4B596C"/>
+                  <a:srgbClr val="57564F"/>
                 </a:solidFill>
                 <a:latin typeface="Helvetica Neue"/>
                 <a:ea typeface="Helvetica Neue"/>
@@ -11506,7 +11506,7 @@
             <a:r>
               <a:rPr sz="1575" b="1">
                 <a:solidFill>
-                  <a:srgbClr val="4B596C"/>
+                  <a:srgbClr val="57564F"/>
                 </a:solidFill>
                 <a:latin typeface="Helvetica Neue"/>
                 <a:ea typeface="Helvetica Neue"/>
@@ -11539,7 +11539,7 @@
           </a:prstGeom>
           <a:ln xmlns:a="http://schemas.openxmlformats.org/drawingml/2006/main" w="22860">
             <a:solidFill>
-              <a:srgbClr val="142033"/>
+              <a:srgbClr val="2B2B28"/>
             </a:solidFill>
             <a:prstDash val="solid"/>
             <a:tailEnd type="none" w="med" len="med"/>
@@ -11568,7 +11568,7 @@
           </a:prstGeom>
           <a:ln xmlns:a="http://schemas.openxmlformats.org/drawingml/2006/main" w="22860">
             <a:solidFill>
-              <a:srgbClr val="142033"/>
+              <a:srgbClr val="2B2B28"/>
             </a:solidFill>
             <a:prstDash val="solid"/>
             <a:tailEnd type="none" w="med" len="med"/>
@@ -11597,7 +11597,7 @@
           </a:prstGeom>
           <a:ln xmlns:a="http://schemas.openxmlformats.org/drawingml/2006/main" w="22860">
             <a:solidFill>
-              <a:srgbClr val="142033"/>
+              <a:srgbClr val="2B2B28"/>
             </a:solidFill>
             <a:prstDash val="solid"/>
             <a:tailEnd type="triangle" w="med" len="med"/>
@@ -11640,7 +11640,7 @@
             <a:defPPr algn="l">
               <a:defRPr sz="1575" b="1">
                 <a:solidFill>
-                  <a:srgbClr val="4B596C"/>
+                  <a:srgbClr val="57564F"/>
                 </a:solidFill>
                 <a:latin typeface="Helvetica Neue"/>
                 <a:ea typeface="Helvetica Neue"/>
@@ -11650,7 +11650,7 @@
             <a:lvl1pPr algn="l">
               <a:defRPr sz="1575" b="1">
                 <a:solidFill>
-                  <a:srgbClr val="4B596C"/>
+                  <a:srgbClr val="57564F"/>
                 </a:solidFill>
                 <a:latin typeface="Helvetica Neue"/>
                 <a:ea typeface="Helvetica Neue"/>
@@ -11660,7 +11660,7 @@
             <a:lvl2pPr algn="l">
               <a:defRPr sz="1575" b="1">
                 <a:solidFill>
-                  <a:srgbClr val="4B596C"/>
+                  <a:srgbClr val="57564F"/>
                 </a:solidFill>
                 <a:latin typeface="Helvetica Neue"/>
                 <a:ea typeface="Helvetica Neue"/>
@@ -11670,7 +11670,7 @@
             <a:lvl3pPr algn="l">
               <a:defRPr sz="1575" b="1">
                 <a:solidFill>
-                  <a:srgbClr val="4B596C"/>
+                  <a:srgbClr val="57564F"/>
                 </a:solidFill>
                 <a:latin typeface="Helvetica Neue"/>
                 <a:ea typeface="Helvetica Neue"/>
@@ -11680,7 +11680,7 @@
             <a:lvl4pPr algn="l">
               <a:defRPr sz="1575" b="1">
                 <a:solidFill>
-                  <a:srgbClr val="4B596C"/>
+                  <a:srgbClr val="57564F"/>
                 </a:solidFill>
                 <a:latin typeface="Helvetica Neue"/>
                 <a:ea typeface="Helvetica Neue"/>
@@ -11690,7 +11690,7 @@
             <a:lvl5pPr algn="l">
               <a:defRPr sz="1575" b="1">
                 <a:solidFill>
-                  <a:srgbClr val="4B596C"/>
+                  <a:srgbClr val="57564F"/>
                 </a:solidFill>
                 <a:latin typeface="Helvetica Neue"/>
                 <a:ea typeface="Helvetica Neue"/>
@@ -11700,7 +11700,7 @@
             <a:lvl6pPr algn="l">
               <a:defRPr sz="1575" b="1">
                 <a:solidFill>
-                  <a:srgbClr val="4B596C"/>
+                  <a:srgbClr val="57564F"/>
                 </a:solidFill>
                 <a:latin typeface="Helvetica Neue"/>
                 <a:ea typeface="Helvetica Neue"/>
@@ -11710,7 +11710,7 @@
             <a:lvl7pPr algn="l">
               <a:defRPr sz="1575" b="1">
                 <a:solidFill>
-                  <a:srgbClr val="4B596C"/>
+                  <a:srgbClr val="57564F"/>
                 </a:solidFill>
                 <a:latin typeface="Helvetica Neue"/>
                 <a:ea typeface="Helvetica Neue"/>
@@ -11720,7 +11720,7 @@
             <a:lvl8pPr algn="l">
               <a:defRPr sz="1575" b="1">
                 <a:solidFill>
-                  <a:srgbClr val="4B596C"/>
+                  <a:srgbClr val="57564F"/>
                 </a:solidFill>
                 <a:latin typeface="Helvetica Neue"/>
                 <a:ea typeface="Helvetica Neue"/>
@@ -11730,7 +11730,7 @@
             <a:lvl9pPr algn="l">
               <a:defRPr sz="1575" b="1">
                 <a:solidFill>
-                  <a:srgbClr val="4B596C"/>
+                  <a:srgbClr val="57564F"/>
                 </a:solidFill>
                 <a:latin typeface="Helvetica Neue"/>
                 <a:ea typeface="Helvetica Neue"/>
@@ -11742,7 +11742,7 @@
             <a:pPr algn="l">
               <a:defRPr sz="1575" b="1">
                 <a:solidFill>
-                  <a:srgbClr val="4B596C"/>
+                  <a:srgbClr val="57564F"/>
                 </a:solidFill>
                 <a:latin typeface="Helvetica Neue"/>
                 <a:ea typeface="Helvetica Neue"/>
@@ -11752,7 +11752,7 @@
             <a:r>
               <a:rPr sz="1575" b="1">
                 <a:solidFill>
-                  <a:srgbClr val="4B596C"/>
+                  <a:srgbClr val="57564F"/>
                 </a:solidFill>
                 <a:latin typeface="Helvetica Neue"/>
                 <a:ea typeface="Helvetica Neue"/>
@@ -11785,7 +11785,7 @@
           </a:prstGeom>
           <a:ln xmlns:a="http://schemas.openxmlformats.org/drawingml/2006/main" w="22860">
             <a:solidFill>
-              <a:srgbClr val="142033"/>
+              <a:srgbClr val="2B2B28"/>
             </a:solidFill>
             <a:prstDash val="solid"/>
             <a:tailEnd type="triangle" w="med" len="med"/>
@@ -11828,7 +11828,7 @@
             <a:defPPr algn="l">
               <a:defRPr sz="1500" b="1">
                 <a:solidFill>
-                  <a:srgbClr val="4B596C"/>
+                  <a:srgbClr val="57564F"/>
                 </a:solidFill>
                 <a:latin typeface="Helvetica Neue"/>
                 <a:ea typeface="Helvetica Neue"/>
@@ -11838,7 +11838,7 @@
             <a:lvl1pPr algn="l">
               <a:defRPr sz="1500" b="1">
                 <a:solidFill>
-                  <a:srgbClr val="4B596C"/>
+                  <a:srgbClr val="57564F"/>
                 </a:solidFill>
                 <a:latin typeface="Helvetica Neue"/>
                 <a:ea typeface="Helvetica Neue"/>
@@ -11848,7 +11848,7 @@
             <a:lvl2pPr algn="l">
               <a:defRPr sz="1500" b="1">
                 <a:solidFill>
-                  <a:srgbClr val="4B596C"/>
+                  <a:srgbClr val="57564F"/>
                 </a:solidFill>
                 <a:latin typeface="Helvetica Neue"/>
                 <a:ea typeface="Helvetica Neue"/>
@@ -11858,7 +11858,7 @@
             <a:lvl3pPr algn="l">
               <a:defRPr sz="1500" b="1">
                 <a:solidFill>
-                  <a:srgbClr val="4B596C"/>
+                  <a:srgbClr val="57564F"/>
                 </a:solidFill>
                 <a:latin typeface="Helvetica Neue"/>
                 <a:ea typeface="Helvetica Neue"/>
@@ -11868,7 +11868,7 @@
             <a:lvl4pPr algn="l">
               <a:defRPr sz="1500" b="1">
                 <a:solidFill>
-                  <a:srgbClr val="4B596C"/>
+                  <a:srgbClr val="57564F"/>
                 </a:solidFill>
                 <a:latin typeface="Helvetica Neue"/>
                 <a:ea typeface="Helvetica Neue"/>
@@ -11878,7 +11878,7 @@
             <a:lvl5pPr algn="l">
               <a:defRPr sz="1500" b="1">
                 <a:solidFill>
-                  <a:srgbClr val="4B596C"/>
+                  <a:srgbClr val="57564F"/>
                 </a:solidFill>
                 <a:latin typeface="Helvetica Neue"/>
                 <a:ea typeface="Helvetica Neue"/>
@@ -11888,7 +11888,7 @@
             <a:lvl6pPr algn="l">
               <a:defRPr sz="1500" b="1">
                 <a:solidFill>
-                  <a:srgbClr val="4B596C"/>
+                  <a:srgbClr val="57564F"/>
                 </a:solidFill>
                 <a:latin typeface="Helvetica Neue"/>
                 <a:ea typeface="Helvetica Neue"/>
@@ -11898,7 +11898,7 @@
             <a:lvl7pPr algn="l">
               <a:defRPr sz="1500" b="1">
                 <a:solidFill>
-                  <a:srgbClr val="4B596C"/>
+                  <a:srgbClr val="57564F"/>
                 </a:solidFill>
                 <a:latin typeface="Helvetica Neue"/>
                 <a:ea typeface="Helvetica Neue"/>
@@ -11908,7 +11908,7 @@
             <a:lvl8pPr algn="l">
               <a:defRPr sz="1500" b="1">
                 <a:solidFill>
-                  <a:srgbClr val="4B596C"/>
+                  <a:srgbClr val="57564F"/>
                 </a:solidFill>
                 <a:latin typeface="Helvetica Neue"/>
                 <a:ea typeface="Helvetica Neue"/>
@@ -11918,7 +11918,7 @@
             <a:lvl9pPr algn="l">
               <a:defRPr sz="1500" b="1">
                 <a:solidFill>
-                  <a:srgbClr val="4B596C"/>
+                  <a:srgbClr val="57564F"/>
                 </a:solidFill>
                 <a:latin typeface="Helvetica Neue"/>
                 <a:ea typeface="Helvetica Neue"/>
@@ -11930,7 +11930,7 @@
             <a:pPr algn="l">
               <a:defRPr sz="1500" b="1">
                 <a:solidFill>
-                  <a:srgbClr val="4B596C"/>
+                  <a:srgbClr val="57564F"/>
                 </a:solidFill>
                 <a:latin typeface="Helvetica Neue"/>
                 <a:ea typeface="Helvetica Neue"/>
@@ -11940,7 +11940,7 @@
             <a:r>
               <a:rPr sz="1500" b="1">
                 <a:solidFill>
-                  <a:srgbClr val="4B596C"/>
+                  <a:srgbClr val="57564F"/>
                 </a:solidFill>
                 <a:latin typeface="Helvetica Neue"/>
                 <a:ea typeface="Helvetica Neue"/>
@@ -11973,7 +11973,7 @@
           </a:prstGeom>
           <a:ln xmlns:a="http://schemas.openxmlformats.org/drawingml/2006/main" w="22860">
             <a:solidFill>
-              <a:srgbClr val="142033"/>
+              <a:srgbClr val="2B2B28"/>
             </a:solidFill>
             <a:prstDash val="solid"/>
             <a:tailEnd type="none" w="med" len="med"/>
@@ -12002,7 +12002,7 @@
           </a:prstGeom>
           <a:ln xmlns:a="http://schemas.openxmlformats.org/drawingml/2006/main" w="22860">
             <a:solidFill>
-              <a:srgbClr val="142033"/>
+              <a:srgbClr val="2B2B28"/>
             </a:solidFill>
             <a:prstDash val="solid"/>
             <a:tailEnd type="none" w="med" len="med"/>
@@ -12031,7 +12031,7 @@
           </a:prstGeom>
           <a:ln xmlns:a="http://schemas.openxmlformats.org/drawingml/2006/main" w="22860">
             <a:solidFill>
-              <a:srgbClr val="142033"/>
+              <a:srgbClr val="2B2B28"/>
             </a:solidFill>
             <a:prstDash val="solid"/>
             <a:tailEnd type="triangle" w="med" len="med"/>
@@ -12074,7 +12074,7 @@
             <a:defPPr algn="l">
               <a:defRPr sz="1575" b="1">
                 <a:solidFill>
-                  <a:srgbClr val="4B596C"/>
+                  <a:srgbClr val="57564F"/>
                 </a:solidFill>
                 <a:latin typeface="Helvetica Neue"/>
                 <a:ea typeface="Helvetica Neue"/>
@@ -12084,7 +12084,7 @@
             <a:lvl1pPr algn="l">
               <a:defRPr sz="1575" b="1">
                 <a:solidFill>
-                  <a:srgbClr val="4B596C"/>
+                  <a:srgbClr val="57564F"/>
                 </a:solidFill>
                 <a:latin typeface="Helvetica Neue"/>
                 <a:ea typeface="Helvetica Neue"/>
@@ -12094,7 +12094,7 @@
             <a:lvl2pPr algn="l">
               <a:defRPr sz="1575" b="1">
                 <a:solidFill>
-                  <a:srgbClr val="4B596C"/>
+                  <a:srgbClr val="57564F"/>
                 </a:solidFill>
                 <a:latin typeface="Helvetica Neue"/>
                 <a:ea typeface="Helvetica Neue"/>
@@ -12104,7 +12104,7 @@
             <a:lvl3pPr algn="l">
               <a:defRPr sz="1575" b="1">
                 <a:solidFill>
-                  <a:srgbClr val="4B596C"/>
+                  <a:srgbClr val="57564F"/>
                 </a:solidFill>
                 <a:latin typeface="Helvetica Neue"/>
                 <a:ea typeface="Helvetica Neue"/>
@@ -12114,7 +12114,7 @@
             <a:lvl4pPr algn="l">
               <a:defRPr sz="1575" b="1">
                 <a:solidFill>
-                  <a:srgbClr val="4B596C"/>
+                  <a:srgbClr val="57564F"/>
                 </a:solidFill>
                 <a:latin typeface="Helvetica Neue"/>
                 <a:ea typeface="Helvetica Neue"/>
@@ -12124,7 +12124,7 @@
             <a:lvl5pPr algn="l">
               <a:defRPr sz="1575" b="1">
                 <a:solidFill>
-                  <a:srgbClr val="4B596C"/>
+                  <a:srgbClr val="57564F"/>
                 </a:solidFill>
                 <a:latin typeface="Helvetica Neue"/>
                 <a:ea typeface="Helvetica Neue"/>
@@ -12134,7 +12134,7 @@
             <a:lvl6pPr algn="l">
               <a:defRPr sz="1575" b="1">
                 <a:solidFill>
-                  <a:srgbClr val="4B596C"/>
+                  <a:srgbClr val="57564F"/>
                 </a:solidFill>
                 <a:latin typeface="Helvetica Neue"/>
                 <a:ea typeface="Helvetica Neue"/>
@@ -12144,7 +12144,7 @@
             <a:lvl7pPr algn="l">
               <a:defRPr sz="1575" b="1">
                 <a:solidFill>
-                  <a:srgbClr val="4B596C"/>
+                  <a:srgbClr val="57564F"/>
                 </a:solidFill>
                 <a:latin typeface="Helvetica Neue"/>
                 <a:ea typeface="Helvetica Neue"/>
@@ -12154,7 +12154,7 @@
             <a:lvl8pPr algn="l">
               <a:defRPr sz="1575" b="1">
                 <a:solidFill>
-                  <a:srgbClr val="4B596C"/>
+                  <a:srgbClr val="57564F"/>
                 </a:solidFill>
                 <a:latin typeface="Helvetica Neue"/>
                 <a:ea typeface="Helvetica Neue"/>
@@ -12164,7 +12164,7 @@
             <a:lvl9pPr algn="l">
               <a:defRPr sz="1575" b="1">
                 <a:solidFill>
-                  <a:srgbClr val="4B596C"/>
+                  <a:srgbClr val="57564F"/>
                 </a:solidFill>
                 <a:latin typeface="Helvetica Neue"/>
                 <a:ea typeface="Helvetica Neue"/>
@@ -12176,7 +12176,7 @@
             <a:pPr algn="l">
               <a:defRPr sz="1575" b="1">
                 <a:solidFill>
-                  <a:srgbClr val="4B596C"/>
+                  <a:srgbClr val="57564F"/>
                 </a:solidFill>
                 <a:latin typeface="Helvetica Neue"/>
                 <a:ea typeface="Helvetica Neue"/>
@@ -12186,7 +12186,7 @@
             <a:r>
               <a:rPr sz="1575" b="1">
                 <a:solidFill>
-                  <a:srgbClr val="4B596C"/>
+                  <a:srgbClr val="57564F"/>
                 </a:solidFill>
                 <a:latin typeface="Helvetica Neue"/>
                 <a:ea typeface="Helvetica Neue"/>
@@ -12219,7 +12219,7 @@
           </a:prstGeom>
           <a:ln xmlns:a="http://schemas.openxmlformats.org/drawingml/2006/main" w="22860">
             <a:solidFill>
-              <a:srgbClr val="142033"/>
+              <a:srgbClr val="2B2B28"/>
             </a:solidFill>
             <a:prstDash val="solid"/>
             <a:tailEnd type="triangle" w="med" len="med"/>
@@ -12262,7 +12262,7 @@
             <a:defPPr algn="l">
               <a:defRPr sz="1575" b="1">
                 <a:solidFill>
-                  <a:srgbClr val="4B596C"/>
+                  <a:srgbClr val="57564F"/>
                 </a:solidFill>
                 <a:latin typeface="Helvetica Neue"/>
                 <a:ea typeface="Helvetica Neue"/>
@@ -12272,7 +12272,7 @@
             <a:lvl1pPr algn="l">
               <a:defRPr sz="1575" b="1">
                 <a:solidFill>
-                  <a:srgbClr val="4B596C"/>
+                  <a:srgbClr val="57564F"/>
                 </a:solidFill>
                 <a:latin typeface="Helvetica Neue"/>
                 <a:ea typeface="Helvetica Neue"/>
@@ -12282,7 +12282,7 @@
             <a:lvl2pPr algn="l">
               <a:defRPr sz="1575" b="1">
                 <a:solidFill>
-                  <a:srgbClr val="4B596C"/>
+                  <a:srgbClr val="57564F"/>
                 </a:solidFill>
                 <a:latin typeface="Helvetica Neue"/>
                 <a:ea typeface="Helvetica Neue"/>
@@ -12292,7 +12292,7 @@
             <a:lvl3pPr algn="l">
               <a:defRPr sz="1575" b="1">
                 <a:solidFill>
-                  <a:srgbClr val="4B596C"/>
+                  <a:srgbClr val="57564F"/>
                 </a:solidFill>
                 <a:latin typeface="Helvetica Neue"/>
                 <a:ea typeface="Helvetica Neue"/>
@@ -12302,7 +12302,7 @@
             <a:lvl4pPr algn="l">
               <a:defRPr sz="1575" b="1">
                 <a:solidFill>
-                  <a:srgbClr val="4B596C"/>
+                  <a:srgbClr val="57564F"/>
                 </a:solidFill>
                 <a:latin typeface="Helvetica Neue"/>
                 <a:ea typeface="Helvetica Neue"/>
@@ -12312,7 +12312,7 @@
             <a:lvl5pPr algn="l">
               <a:defRPr sz="1575" b="1">
                 <a:solidFill>
-                  <a:srgbClr val="4B596C"/>
+                  <a:srgbClr val="57564F"/>
                 </a:solidFill>
                 <a:latin typeface="Helvetica Neue"/>
                 <a:ea typeface="Helvetica Neue"/>
@@ -12322,7 +12322,7 @@
             <a:lvl6pPr algn="l">
               <a:defRPr sz="1575" b="1">
                 <a:solidFill>
-                  <a:srgbClr val="4B596C"/>
+                  <a:srgbClr val="57564F"/>
                 </a:solidFill>
                 <a:latin typeface="Helvetica Neue"/>
                 <a:ea typeface="Helvetica Neue"/>
@@ -12332,7 +12332,7 @@
             <a:lvl7pPr algn="l">
               <a:defRPr sz="1575" b="1">
                 <a:solidFill>
-                  <a:srgbClr val="4B596C"/>
+                  <a:srgbClr val="57564F"/>
                 </a:solidFill>
                 <a:latin typeface="Helvetica Neue"/>
                 <a:ea typeface="Helvetica Neue"/>
@@ -12342,7 +12342,7 @@
             <a:lvl8pPr algn="l">
               <a:defRPr sz="1575" b="1">
                 <a:solidFill>
-                  <a:srgbClr val="4B596C"/>
+                  <a:srgbClr val="57564F"/>
                 </a:solidFill>
                 <a:latin typeface="Helvetica Neue"/>
                 <a:ea typeface="Helvetica Neue"/>
@@ -12352,7 +12352,7 @@
             <a:lvl9pPr algn="l">
               <a:defRPr sz="1575" b="1">
                 <a:solidFill>
-                  <a:srgbClr val="4B596C"/>
+                  <a:srgbClr val="57564F"/>
                 </a:solidFill>
                 <a:latin typeface="Helvetica Neue"/>
                 <a:ea typeface="Helvetica Neue"/>
@@ -12364,7 +12364,7 @@
             <a:pPr algn="l">
               <a:defRPr sz="1575" b="1">
                 <a:solidFill>
-                  <a:srgbClr val="4B596C"/>
+                  <a:srgbClr val="57564F"/>
                 </a:solidFill>
                 <a:latin typeface="Helvetica Neue"/>
                 <a:ea typeface="Helvetica Neue"/>
@@ -12374,7 +12374,7 @@
             <a:r>
               <a:rPr sz="1575" b="1">
                 <a:solidFill>
-                  <a:srgbClr val="4B596C"/>
+                  <a:srgbClr val="57564F"/>
                 </a:solidFill>
                 <a:latin typeface="Helvetica Neue"/>
                 <a:ea typeface="Helvetica Neue"/>
